--- a/LectureSlides/09_GeneralizingTheLinearModel.pptx
+++ b/LectureSlides/09_GeneralizingTheLinearModel.pptx
@@ -269,7 +269,7 @@
           <a:p>
             <a:fld id="{35BCC803-D91A-40A8-8BFC-49FB40BF6589}" type="datetimeFigureOut">
               <a:rPr lang="en-US" smtClean="0"/>
-              <a:t>10/2/2025</a:t>
+              <a:t>9/28/2026</a:t>
             </a:fld>
             <a:endParaRPr lang="en-US"/>
           </a:p>
@@ -907,7 +907,7 @@
           <a:p>
             <a:fld id="{241EB5C9-1307-BA42-ABA2-0BC069CD8E7F}" type="datetimeFigureOut">
               <a:rPr lang="en-US" smtClean="0"/>
-              <a:t>10/2/2025</a:t>
+              <a:t>9/28/2026</a:t>
             </a:fld>
             <a:endParaRPr lang="en-US"/>
           </a:p>
@@ -1075,7 +1075,7 @@
           <a:p>
             <a:fld id="{241EB5C9-1307-BA42-ABA2-0BC069CD8E7F}" type="datetimeFigureOut">
               <a:rPr lang="en-US" smtClean="0"/>
-              <a:t>10/2/2025</a:t>
+              <a:t>9/28/2026</a:t>
             </a:fld>
             <a:endParaRPr lang="en-US"/>
           </a:p>
@@ -1253,7 +1253,7 @@
           <a:p>
             <a:fld id="{241EB5C9-1307-BA42-ABA2-0BC069CD8E7F}" type="datetimeFigureOut">
               <a:rPr lang="en-US" smtClean="0"/>
-              <a:t>10/2/2025</a:t>
+              <a:t>9/28/2026</a:t>
             </a:fld>
             <a:endParaRPr lang="en-US"/>
           </a:p>
@@ -1421,7 +1421,7 @@
           <a:p>
             <a:fld id="{241EB5C9-1307-BA42-ABA2-0BC069CD8E7F}" type="datetimeFigureOut">
               <a:rPr lang="en-US" smtClean="0"/>
-              <a:t>10/2/2025</a:t>
+              <a:t>9/28/2026</a:t>
             </a:fld>
             <a:endParaRPr lang="en-US"/>
           </a:p>
@@ -1666,7 +1666,7 @@
           <a:p>
             <a:fld id="{241EB5C9-1307-BA42-ABA2-0BC069CD8E7F}" type="datetimeFigureOut">
               <a:rPr lang="en-US" smtClean="0"/>
-              <a:t>10/2/2025</a:t>
+              <a:t>9/28/2026</a:t>
             </a:fld>
             <a:endParaRPr lang="en-US"/>
           </a:p>
@@ -1951,7 +1951,7 @@
           <a:p>
             <a:fld id="{241EB5C9-1307-BA42-ABA2-0BC069CD8E7F}" type="datetimeFigureOut">
               <a:rPr lang="en-US" smtClean="0"/>
-              <a:t>10/2/2025</a:t>
+              <a:t>9/28/2026</a:t>
             </a:fld>
             <a:endParaRPr lang="en-US"/>
           </a:p>
@@ -2370,7 +2370,7 @@
           <a:p>
             <a:fld id="{241EB5C9-1307-BA42-ABA2-0BC069CD8E7F}" type="datetimeFigureOut">
               <a:rPr lang="en-US" smtClean="0"/>
-              <a:t>10/2/2025</a:t>
+              <a:t>9/28/2026</a:t>
             </a:fld>
             <a:endParaRPr lang="en-US"/>
           </a:p>
@@ -2487,7 +2487,7 @@
           <a:p>
             <a:fld id="{241EB5C9-1307-BA42-ABA2-0BC069CD8E7F}" type="datetimeFigureOut">
               <a:rPr lang="en-US" smtClean="0"/>
-              <a:t>10/2/2025</a:t>
+              <a:t>9/28/2026</a:t>
             </a:fld>
             <a:endParaRPr lang="en-US"/>
           </a:p>
@@ -2582,7 +2582,7 @@
           <a:p>
             <a:fld id="{241EB5C9-1307-BA42-ABA2-0BC069CD8E7F}" type="datetimeFigureOut">
               <a:rPr lang="en-US" smtClean="0"/>
-              <a:t>10/2/2025</a:t>
+              <a:t>9/28/2026</a:t>
             </a:fld>
             <a:endParaRPr lang="en-US"/>
           </a:p>
@@ -2857,7 +2857,7 @@
           <a:p>
             <a:fld id="{241EB5C9-1307-BA42-ABA2-0BC069CD8E7F}" type="datetimeFigureOut">
               <a:rPr lang="en-US" smtClean="0"/>
-              <a:t>10/2/2025</a:t>
+              <a:t>9/28/2026</a:t>
             </a:fld>
             <a:endParaRPr lang="en-US"/>
           </a:p>
@@ -3109,7 +3109,7 @@
           <a:p>
             <a:fld id="{241EB5C9-1307-BA42-ABA2-0BC069CD8E7F}" type="datetimeFigureOut">
               <a:rPr lang="en-US" smtClean="0"/>
-              <a:t>10/2/2025</a:t>
+              <a:t>9/28/2026</a:t>
             </a:fld>
             <a:endParaRPr lang="en-US"/>
           </a:p>
@@ -3320,7 +3320,7 @@
           <a:p>
             <a:fld id="{241EB5C9-1307-BA42-ABA2-0BC069CD8E7F}" type="datetimeFigureOut">
               <a:rPr lang="en-US" smtClean="0"/>
-              <a:t>10/2/2025</a:t>
+              <a:t>9/28/2026</a:t>
             </a:fld>
             <a:endParaRPr lang="en-US"/>
           </a:p>
@@ -3866,7 +3866,15 @@
             <a:pPr algn="ctr"/>
             <a:r>
               <a:rPr lang="en-US" sz="1100" dirty="0"/>
-              <a:t>Copyright 2018, 2019, 2020, 2021, 2022, 2023 2024, Stephen F Elston. All rights reserved</a:t>
+              <a:t>Copyright 2018, 2019, 2020, 2021, 2022, 2023 </a:t>
+            </a:r>
+            <a:r>
+              <a:rPr lang="en-US" sz="1100"/>
+              <a:t>2024, 2026 </a:t>
+            </a:r>
+            <a:r>
+              <a:rPr lang="en-US" sz="1100" dirty="0"/>
+              <a:t>Stephen F Elston. All rights reserved</a:t>
             </a:r>
             <a:r>
               <a:rPr lang="en-US" dirty="0"/>
@@ -5287,7 +5295,7 @@
                         <m:sSub>
                           <m:sSubPr>
                             <m:ctrlPr>
-                              <a:rPr lang="ar-AE" i="1">
+                              <a:rPr lang="ar-AE">
                                 <a:latin typeface="Cambria Math" panose="02040503050406030204" pitchFamily="18" charset="0"/>
                               </a:rPr>
                             </m:ctrlPr>
@@ -5318,7 +5326,7 @@
                         <m:sSub>
                           <m:sSubPr>
                             <m:ctrlPr>
-                              <a:rPr lang="ar-AE" i="1">
+                              <a:rPr lang="ar-AE">
                                 <a:latin typeface="Cambria Math" panose="02040503050406030204" pitchFamily="18" charset="0"/>
                               </a:rPr>
                             </m:ctrlPr>
@@ -5349,7 +5357,7 @@
                         <m:sSub>
                           <m:sSubPr>
                             <m:ctrlPr>
-                              <a:rPr lang="ar-AE" i="1">
+                              <a:rPr lang="ar-AE">
                                 <a:latin typeface="Cambria Math" panose="02040503050406030204" pitchFamily="18" charset="0"/>
                               </a:rPr>
                             </m:ctrlPr>
@@ -5433,7 +5441,7 @@
                     <m:sSub>
                       <m:sSubPr>
                         <m:ctrlPr>
-                          <a:rPr lang="ar-AE" i="1">
+                          <a:rPr lang="ar-AE">
                             <a:latin typeface="Cambria Math" panose="02040503050406030204" pitchFamily="18" charset="0"/>
                           </a:rPr>
                         </m:ctrlPr>
@@ -5471,10 +5479,7 @@
                 </a:pPr>
                 <a14:m>
                   <m:oMathPara xmlns:m="http://schemas.openxmlformats.org/officeDocument/2006/math">
-                    <m:oMathParaPr>
-                      <m:jc m:val="centerGroup"/>
-                    </m:oMathParaPr>
-                    <m:oMath xmlns:m="http://schemas.openxmlformats.org/officeDocument/2006/math">
+                    <m:oMath>
                       <m:d>
                         <m:dPr>
                           <m:begChr m:val="["/>
@@ -5489,7 +5494,7 @@
                           <m:sSub>
                             <m:sSubPr>
                               <m:ctrlPr>
-                                <a:rPr lang="ar-AE" i="1">
+                                <a:rPr lang="ar-AE" b="0" i="1" smtClean="0">
                                   <a:latin typeface="Cambria Math" panose="02040503050406030204" pitchFamily="18" charset="0"/>
                                 </a:rPr>
                               </m:ctrlPr>
@@ -5520,7 +5525,7 @@
                           <m:sSub>
                             <m:sSubPr>
                               <m:ctrlPr>
-                                <a:rPr lang="ar-AE" i="1">
+                                <a:rPr lang="en-US" b="0" i="1" smtClean="0">
                                   <a:latin typeface="Cambria Math" panose="02040503050406030204" pitchFamily="18" charset="0"/>
                                 </a:rPr>
                               </m:ctrlPr>
@@ -5551,7 +5556,7 @@
                           <m:sSub>
                             <m:sSubPr>
                               <m:ctrlPr>
-                                <a:rPr lang="ar-AE" i="1">
+                                <a:rPr lang="en-US" b="0" i="1" smtClean="0">
                                   <a:latin typeface="Cambria Math" panose="02040503050406030204" pitchFamily="18" charset="0"/>
                                 </a:rPr>
                               </m:ctrlPr>
@@ -5595,7 +5600,7 @@
                           <m:sSub>
                             <m:sSubPr>
                               <m:ctrlPr>
-                                <a:rPr lang="ar-AE" i="1">
+                                <a:rPr lang="ar-AE">
                                   <a:latin typeface="Cambria Math" panose="02040503050406030204" pitchFamily="18" charset="0"/>
                                 </a:rPr>
                               </m:ctrlPr>
@@ -5626,7 +5631,7 @@
                           <m:sSub>
                             <m:sSubPr>
                               <m:ctrlPr>
-                                <a:rPr lang="ar-AE" i="1">
+                                <a:rPr lang="ar-AE">
                                   <a:latin typeface="Cambria Math" panose="02040503050406030204" pitchFamily="18" charset="0"/>
                                 </a:rPr>
                               </m:ctrlPr>
@@ -5657,7 +5662,7 @@
                           <m:sSub>
                             <m:sSubPr>
                               <m:ctrlPr>
-                                <a:rPr lang="ar-AE" i="1">
+                                <a:rPr lang="ar-AE">
                                   <a:latin typeface="Cambria Math" panose="02040503050406030204" pitchFamily="18" charset="0"/>
                                 </a:rPr>
                               </m:ctrlPr>
@@ -5717,13 +5722,7 @@
                       <a:rPr lang="en-US">
                         <a:latin typeface="Cambria Math" panose="02040503050406030204" pitchFamily="18" charset="0"/>
                       </a:rPr>
-                      <m:t>−</m:t>
-                    </m:r>
-                    <m:r>
-                      <a:rPr lang="en-US">
-                        <a:latin typeface="Cambria Math" panose="02040503050406030204" pitchFamily="18" charset="0"/>
-                      </a:rPr>
-                      <m:t>1</m:t>
+                      <m:t>−1</m:t>
                     </m:r>
                   </m:oMath>
                 </a14:m>
@@ -5746,7 +5745,7 @@
                         <m:begChr m:val="["/>
                         <m:endChr m:val="]"/>
                         <m:ctrlPr>
-                          <a:rPr lang="ar-AE" i="1">
+                          <a:rPr lang="en-US" b="0" i="0" smtClean="0">
                             <a:latin typeface="Cambria Math" panose="02040503050406030204" pitchFamily="18" charset="0"/>
                           </a:rPr>
                         </m:ctrlPr>
@@ -5767,7 +5766,7 @@
                         <m:sSub>
                           <m:sSubPr>
                             <m:ctrlPr>
-                              <a:rPr lang="ar-AE" i="1">
+                              <a:rPr lang="ar-AE">
                                 <a:latin typeface="Cambria Math" panose="02040503050406030204" pitchFamily="18" charset="0"/>
                               </a:rPr>
                             </m:ctrlPr>
@@ -5798,7 +5797,7 @@
                         <m:sSub>
                           <m:sSubPr>
                             <m:ctrlPr>
-                              <a:rPr lang="ar-AE" i="1">
+                              <a:rPr lang="ar-AE">
                                 <a:latin typeface="Cambria Math" panose="02040503050406030204" pitchFamily="18" charset="0"/>
                               </a:rPr>
                             </m:ctrlPr>
@@ -5845,7 +5844,7 @@
                     <m:sSub>
                       <m:sSubPr>
                         <m:ctrlPr>
-                          <a:rPr lang="ar-AE" i="1">
+                          <a:rPr lang="ar-AE">
                             <a:latin typeface="Cambria Math" panose="02040503050406030204" pitchFamily="18" charset="0"/>
                           </a:rPr>
                         </m:ctrlPr>
@@ -6234,8 +6233,8 @@
           </a:p>
         </p:txBody>
       </p:sp>
-      <mc:AlternateContent xmlns:mc="http://schemas.openxmlformats.org/markup-compatibility/2006">
-        <mc:Choice xmlns:a14="http://schemas.microsoft.com/office/drawing/2010/main" Requires="a14">
+      <mc:AlternateContent xmlns:mc="http://schemas.openxmlformats.org/markup-compatibility/2006" xmlns:a14="http://schemas.microsoft.com/office/drawing/2010/main">
+        <mc:Choice Requires="a14">
           <p:sp>
             <p:nvSpPr>
               <p:cNvPr id="3" name="Content Placeholder 2">
@@ -6300,7 +6299,7 @@
                     <m:sSub>
                       <m:sSubPr>
                         <m:ctrlPr>
-                          <a:rPr lang="ar-AE" i="1">
+                          <a:rPr lang="ar-AE">
                             <a:latin typeface="Cambria Math" panose="02040503050406030204" pitchFamily="18" charset="0"/>
                           </a:rPr>
                         </m:ctrlPr>
@@ -6357,7 +6356,7 @@
                     <m:oMathParaPr>
                       <m:jc m:val="center"/>
                     </m:oMathParaPr>
-                    <m:oMath xmlns:m="http://schemas.openxmlformats.org/officeDocument/2006/math">
+                    <m:oMath>
                       <m:d>
                         <m:dPr>
                           <m:begChr m:val="["/>
@@ -6400,7 +6399,7 @@
                                 <m:sSub>
                                   <m:sSubPr>
                                     <m:ctrlPr>
-                                      <a:rPr lang="ar-AE" i="1">
+                                      <a:rPr lang="ar-AE">
                                         <a:latin typeface="Cambria Math" panose="02040503050406030204" pitchFamily="18" charset="0"/>
                                       </a:rPr>
                                     </m:ctrlPr>
@@ -6439,7 +6438,7 @@
                                 <m:sSub>
                                   <m:sSubPr>
                                     <m:ctrlPr>
-                                      <a:rPr lang="ar-AE" i="1">
+                                      <a:rPr lang="ar-AE">
                                         <a:latin typeface="Cambria Math" panose="02040503050406030204" pitchFamily="18" charset="0"/>
                                       </a:rPr>
                                     </m:ctrlPr>
@@ -6504,7 +6503,7 @@
                                 <m:sSub>
                                   <m:sSubPr>
                                     <m:ctrlPr>
-                                      <a:rPr lang="ar-AE" i="1" smtClean="0">
+                                      <a:rPr lang="en-US" b="0" i="1" smtClean="0">
                                         <a:latin typeface="Cambria Math" panose="02040503050406030204" pitchFamily="18" charset="0"/>
                                       </a:rPr>
                                     </m:ctrlPr>
@@ -6533,7 +6532,7 @@
                                 <m:sSub>
                                   <m:sSubPr>
                                     <m:ctrlPr>
-                                      <a:rPr lang="ar-AE" i="1" smtClean="0">
+                                      <a:rPr lang="en-US" b="0" i="1" smtClean="0">
                                         <a:latin typeface="Cambria Math" panose="02040503050406030204" pitchFamily="18" charset="0"/>
                                       </a:rPr>
                                     </m:ctrlPr>
@@ -6564,7 +6563,7 @@
                                 <m:sSub>
                                   <m:sSubPr>
                                     <m:ctrlPr>
-                                      <a:rPr lang="ar-AE" i="1">
+                                      <a:rPr lang="en-US" b="0" i="1" smtClean="0">
                                         <a:latin typeface="Cambria Math" panose="02040503050406030204" pitchFamily="18" charset="0"/>
                                       </a:rPr>
                                     </m:ctrlPr>
@@ -6603,7 +6602,7 @@
                                 <m:sSub>
                                   <m:sSubPr>
                                     <m:ctrlPr>
-                                      <a:rPr lang="ar-AE" i="1" smtClean="0">
+                                      <a:rPr lang="en-US" b="0" i="1" smtClean="0">
                                         <a:latin typeface="Cambria Math" panose="02040503050406030204" pitchFamily="18" charset="0"/>
                                       </a:rPr>
                                     </m:ctrlPr>
@@ -6634,7 +6633,7 @@
                                 <m:sSub>
                                   <m:sSubPr>
                                     <m:ctrlPr>
-                                      <a:rPr lang="ar-AE" i="1">
+                                      <a:rPr lang="en-US" b="0" i="1" smtClean="0">
                                         <a:latin typeface="Cambria Math" panose="02040503050406030204" pitchFamily="18" charset="0"/>
                                       </a:rPr>
                                     </m:ctrlPr>
@@ -6669,7 +6668,7 @@
             </p:txBody>
           </p:sp>
         </mc:Choice>
-        <mc:Fallback>
+        <mc:Fallback xmlns="">
           <p:sp>
             <p:nvSpPr>
               <p:cNvPr id="3" name="Content Placeholder 2">
@@ -8298,7 +8297,7 @@
                         <m:sSub>
                           <m:sSubPr>
                             <m:ctrlPr>
-                              <a:rPr lang="ar-AE" i="1">
+                              <a:rPr lang="ar-AE">
                                 <a:latin typeface="Cambria Math" panose="02040503050406030204" pitchFamily="18" charset="0"/>
                               </a:rPr>
                             </m:ctrlPr>
@@ -8329,7 +8328,7 @@
                         <m:sSub>
                           <m:sSubPr>
                             <m:ctrlPr>
-                              <a:rPr lang="ar-AE" i="1">
+                              <a:rPr lang="ar-AE">
                                 <a:latin typeface="Cambria Math" panose="02040503050406030204" pitchFamily="18" charset="0"/>
                               </a:rPr>
                             </m:ctrlPr>
@@ -8360,7 +8359,7 @@
                         <m:sSub>
                           <m:sSubPr>
                             <m:ctrlPr>
-                              <a:rPr lang="ar-AE" i="1">
+                              <a:rPr lang="ar-AE">
                                 <a:latin typeface="Cambria Math" panose="02040503050406030204" pitchFamily="18" charset="0"/>
                               </a:rPr>
                             </m:ctrlPr>
@@ -8410,7 +8409,7 @@
                         <m:sSub>
                           <m:sSubPr>
                             <m:ctrlPr>
-                              <a:rPr lang="ar-AE" i="1">
+                              <a:rPr lang="ar-AE">
                                 <a:latin typeface="Cambria Math" panose="02040503050406030204" pitchFamily="18" charset="0"/>
                               </a:rPr>
                             </m:ctrlPr>
@@ -8441,7 +8440,7 @@
                         <m:sSub>
                           <m:sSubPr>
                             <m:ctrlPr>
-                              <a:rPr lang="ar-AE" i="1">
+                              <a:rPr lang="ar-AE">
                                 <a:latin typeface="Cambria Math" panose="02040503050406030204" pitchFamily="18" charset="0"/>
                               </a:rPr>
                             </m:ctrlPr>
@@ -8472,7 +8471,7 @@
                         <m:sSub>
                           <m:sSubPr>
                             <m:ctrlPr>
-                              <a:rPr lang="ar-AE" i="1">
+                              <a:rPr lang="ar-AE">
                                 <a:latin typeface="Cambria Math" panose="02040503050406030204" pitchFamily="18" charset="0"/>
                               </a:rPr>
                             </m:ctrlPr>
@@ -8524,7 +8523,7 @@
                     <m:oMathParaPr>
                       <m:jc m:val="center"/>
                     </m:oMathParaPr>
-                    <m:oMath xmlns:m="http://schemas.openxmlformats.org/officeDocument/2006/math">
+                    <m:oMath>
                       <m:d>
                         <m:dPr>
                           <m:begChr m:val="["/>
@@ -8557,7 +8556,7 @@
                                 <m:sSub>
                                   <m:sSubPr>
                                     <m:ctrlPr>
-                                      <a:rPr lang="ar-AE" i="1">
+                                      <a:rPr lang="ar-AE">
                                         <a:latin typeface="Cambria Math" panose="02040503050406030204" pitchFamily="18" charset="0"/>
                                       </a:rPr>
                                     </m:ctrlPr>
@@ -8586,7 +8585,7 @@
                                 <m:sSub>
                                   <m:sSubPr>
                                     <m:ctrlPr>
-                                      <a:rPr lang="ar-AE" i="1">
+                                      <a:rPr lang="ar-AE">
                                         <a:latin typeface="Cambria Math" panose="02040503050406030204" pitchFamily="18" charset="0"/>
                                       </a:rPr>
                                     </m:ctrlPr>
@@ -8625,7 +8624,7 @@
                                 <m:sSub>
                                   <m:sSubPr>
                                     <m:ctrlPr>
-                                      <a:rPr lang="ar-AE" i="1">
+                                      <a:rPr lang="ar-AE">
                                         <a:latin typeface="Cambria Math" panose="02040503050406030204" pitchFamily="18" charset="0"/>
                                       </a:rPr>
                                     </m:ctrlPr>
@@ -8690,7 +8689,7 @@
                                 <m:sSub>
                                   <m:sSubPr>
                                     <m:ctrlPr>
-                                      <a:rPr lang="ar-AE" i="1">
+                                      <a:rPr lang="ar-AE">
                                         <a:latin typeface="Cambria Math" panose="02040503050406030204" pitchFamily="18" charset="0"/>
                                       </a:rPr>
                                     </m:ctrlPr>
@@ -8719,7 +8718,7 @@
                                 <m:sSub>
                                   <m:sSubPr>
                                     <m:ctrlPr>
-                                      <a:rPr lang="ar-AE" i="1">
+                                      <a:rPr lang="ar-AE">
                                         <a:latin typeface="Cambria Math" panose="02040503050406030204" pitchFamily="18" charset="0"/>
                                       </a:rPr>
                                     </m:ctrlPr>
@@ -8758,7 +8757,7 @@
                                 <m:sSub>
                                   <m:sSubPr>
                                     <m:ctrlPr>
-                                      <a:rPr lang="ar-AE" i="1">
+                                      <a:rPr lang="ar-AE">
                                         <a:latin typeface="Cambria Math" panose="02040503050406030204" pitchFamily="18" charset="0"/>
                                       </a:rPr>
                                     </m:ctrlPr>
@@ -8807,7 +8806,7 @@
                         <m:begChr m:val="["/>
                         <m:endChr m:val="]"/>
                         <m:ctrlPr>
-                          <a:rPr lang="ar-AE" i="1">
+                          <a:rPr lang="en-US" b="0" i="0" smtClean="0">
                             <a:latin typeface="Cambria Math" panose="02040503050406030204" pitchFamily="18" charset="0"/>
                           </a:rPr>
                         </m:ctrlPr>
@@ -8828,7 +8827,7 @@
                         <m:sSub>
                           <m:sSubPr>
                             <m:ctrlPr>
-                              <a:rPr lang="ar-AE" i="1">
+                              <a:rPr lang="ar-AE">
                                 <a:latin typeface="Cambria Math" panose="02040503050406030204" pitchFamily="18" charset="0"/>
                               </a:rPr>
                             </m:ctrlPr>
@@ -8859,7 +8858,7 @@
                         <m:sSub>
                           <m:sSubPr>
                             <m:ctrlPr>
-                              <a:rPr lang="ar-AE" i="1">
+                              <a:rPr lang="ar-AE">
                                 <a:latin typeface="Cambria Math" panose="02040503050406030204" pitchFamily="18" charset="0"/>
                               </a:rPr>
                             </m:ctrlPr>
@@ -8890,7 +8889,7 @@
                         <m:sSub>
                           <m:sSubPr>
                             <m:ctrlPr>
-                              <a:rPr lang="ar-AE" i="1">
+                              <a:rPr lang="ar-AE">
                                 <a:latin typeface="Cambria Math" panose="02040503050406030204" pitchFamily="18" charset="0"/>
                               </a:rPr>
                             </m:ctrlPr>
@@ -8930,7 +8929,7 @@
                     <m:oMathParaPr>
                       <m:jc m:val="center"/>
                     </m:oMathParaPr>
-                    <m:oMath xmlns:m="http://schemas.openxmlformats.org/officeDocument/2006/math">
+                    <m:oMath>
                       <m:d>
                         <m:dPr>
                           <m:begChr m:val="["/>
@@ -8963,7 +8962,7 @@
                                 <m:sSub>
                                   <m:sSubPr>
                                     <m:ctrlPr>
-                                      <a:rPr lang="ar-AE" i="1">
+                                      <a:rPr lang="ar-AE">
                                         <a:latin typeface="Cambria Math" panose="02040503050406030204" pitchFamily="18" charset="0"/>
                                       </a:rPr>
                                     </m:ctrlPr>
@@ -8992,7 +8991,7 @@
                                 <m:sSub>
                                   <m:sSubPr>
                                     <m:ctrlPr>
-                                      <a:rPr lang="ar-AE" i="1">
+                                      <a:rPr lang="ar-AE">
                                         <a:latin typeface="Cambria Math" panose="02040503050406030204" pitchFamily="18" charset="0"/>
                                       </a:rPr>
                                     </m:ctrlPr>
@@ -9031,7 +9030,7 @@
                                 <m:sSub>
                                   <m:sSubPr>
                                     <m:ctrlPr>
-                                      <a:rPr lang="ar-AE" i="1">
+                                      <a:rPr lang="ar-AE">
                                         <a:latin typeface="Cambria Math" panose="02040503050406030204" pitchFamily="18" charset="0"/>
                                       </a:rPr>
                                     </m:ctrlPr>
@@ -9096,7 +9095,7 @@
                                 <m:sSub>
                                   <m:sSubPr>
                                     <m:ctrlPr>
-                                      <a:rPr lang="ar-AE" i="1">
+                                      <a:rPr lang="ar-AE">
                                         <a:latin typeface="Cambria Math" panose="02040503050406030204" pitchFamily="18" charset="0"/>
                                       </a:rPr>
                                     </m:ctrlPr>
@@ -9125,7 +9124,7 @@
                                 <m:sSub>
                                   <m:sSubPr>
                                     <m:ctrlPr>
-                                      <a:rPr lang="ar-AE" i="1">
+                                      <a:rPr lang="ar-AE">
                                         <a:latin typeface="Cambria Math" panose="02040503050406030204" pitchFamily="18" charset="0"/>
                                       </a:rPr>
                                     </m:ctrlPr>
@@ -9156,7 +9155,7 @@
                                 <m:sSub>
                                   <m:sSubPr>
                                     <m:ctrlPr>
-                                      <a:rPr lang="ar-AE" i="1">
+                                      <a:rPr lang="ar-AE">
                                         <a:latin typeface="Cambria Math" panose="02040503050406030204" pitchFamily="18" charset="0"/>
                                       </a:rPr>
                                     </m:ctrlPr>
@@ -9195,7 +9194,7 @@
                                 <m:sSub>
                                   <m:sSubPr>
                                     <m:ctrlPr>
-                                      <a:rPr lang="ar-AE" i="1">
+                                      <a:rPr lang="ar-AE">
                                         <a:latin typeface="Cambria Math" panose="02040503050406030204" pitchFamily="18" charset="0"/>
                                       </a:rPr>
                                     </m:ctrlPr>
@@ -9226,7 +9225,7 @@
                                 <m:sSub>
                                   <m:sSubPr>
                                     <m:ctrlPr>
-                                      <a:rPr lang="ar-AE" i="1">
+                                      <a:rPr lang="ar-AE">
                                         <a:latin typeface="Cambria Math" panose="02040503050406030204" pitchFamily="18" charset="0"/>
                                       </a:rPr>
                                     </m:ctrlPr>
@@ -15038,7 +15037,7 @@
                         <m:begChr m:val="["/>
                         <m:endChr m:val="]"/>
                         <m:ctrlPr>
-                          <a:rPr lang="ar-AE" i="1">
+                          <a:rPr lang="ar-AE">
                             <a:latin typeface="Cambria Math" panose="02040503050406030204" pitchFamily="18" charset="0"/>
                           </a:rPr>
                         </m:ctrlPr>
@@ -15048,19 +15047,7 @@
                           <a:rPr lang="ar-AE">
                             <a:latin typeface="Cambria Math" panose="02040503050406030204" pitchFamily="18" charset="0"/>
                           </a:rPr>
-                          <m:t>0</m:t>
-                        </m:r>
-                        <m:r>
-                          <a:rPr lang="ar-AE">
-                            <a:latin typeface="Cambria Math" panose="02040503050406030204" pitchFamily="18" charset="0"/>
-                          </a:rPr>
-                          <m:t>,</m:t>
-                        </m:r>
-                        <m:r>
-                          <a:rPr lang="ar-AE">
-                            <a:latin typeface="Cambria Math" panose="02040503050406030204" pitchFamily="18" charset="0"/>
-                          </a:rPr>
-                          <m:t>1</m:t>
+                          <m:t>0,1</m:t>
                         </m:r>
                       </m:e>
                     </m:d>
@@ -15085,7 +15072,7 @@
                     <m:d>
                       <m:dPr>
                         <m:ctrlPr>
-                          <a:rPr lang="ar-AE" i="1">
+                          <a:rPr lang="ar-AE">
                             <a:latin typeface="Cambria Math" panose="02040503050406030204" pitchFamily="18" charset="0"/>
                           </a:rPr>
                         </m:ctrlPr>
@@ -15152,7 +15139,7 @@
                     <m:d>
                       <m:dPr>
                         <m:ctrlPr>
-                          <a:rPr lang="ar-AE" i="1">
+                          <a:rPr lang="ar-AE">
                             <a:latin typeface="Cambria Math" panose="02040503050406030204" pitchFamily="18" charset="0"/>
                           </a:rPr>
                         </m:ctrlPr>
@@ -15249,7 +15236,7 @@
                         <m:sSub>
                           <m:sSubPr>
                             <m:ctrlPr>
-                              <a:rPr lang="ar-AE" i="1">
+                              <a:rPr lang="ar-AE">
                                 <a:latin typeface="Cambria Math" panose="02040503050406030204" pitchFamily="18" charset="0"/>
                               </a:rPr>
                             </m:ctrlPr>
@@ -15280,7 +15267,7 @@
                         <m:sSub>
                           <m:sSubPr>
                             <m:ctrlPr>
-                              <a:rPr lang="ar-AE" i="1">
+                              <a:rPr lang="ar-AE">
                                 <a:latin typeface="Cambria Math" panose="02040503050406030204" pitchFamily="18" charset="0"/>
                               </a:rPr>
                             </m:ctrlPr>
@@ -15311,7 +15298,7 @@
                         <m:sSub>
                           <m:sSubPr>
                             <m:ctrlPr>
-                              <a:rPr lang="ar-AE" i="1">
+                              <a:rPr lang="ar-AE">
                                 <a:latin typeface="Cambria Math" panose="02040503050406030204" pitchFamily="18" charset="0"/>
                               </a:rPr>
                             </m:ctrlPr>
@@ -15397,7 +15384,7 @@
                         <m:sSub>
                           <m:sSubPr>
                             <m:ctrlPr>
-                              <a:rPr lang="ar-AE" i="1">
+                              <a:rPr lang="ar-AE">
                                 <a:latin typeface="Cambria Math" panose="02040503050406030204" pitchFamily="18" charset="0"/>
                               </a:rPr>
                             </m:ctrlPr>
@@ -15428,7 +15415,7 @@
                         <m:sSub>
                           <m:sSubPr>
                             <m:ctrlPr>
-                              <a:rPr lang="ar-AE" i="1">
+                              <a:rPr lang="ar-AE">
                                 <a:latin typeface="Cambria Math" panose="02040503050406030204" pitchFamily="18" charset="0"/>
                               </a:rPr>
                             </m:ctrlPr>
@@ -15459,7 +15446,7 @@
                         <m:sSub>
                           <m:sSubPr>
                             <m:ctrlPr>
-                              <a:rPr lang="ar-AE" i="1">
+                              <a:rPr lang="ar-AE">
                                 <a:latin typeface="Cambria Math" panose="02040503050406030204" pitchFamily="18" charset="0"/>
                               </a:rPr>
                             </m:ctrlPr>
@@ -15515,7 +15502,7 @@
                         <m:sSub>
                           <m:sSubPr>
                             <m:ctrlPr>
-                              <a:rPr lang="ar-AE" i="1">
+                              <a:rPr lang="ar-AE">
                                 <a:latin typeface="Cambria Math" panose="02040503050406030204" pitchFamily="18" charset="0"/>
                               </a:rPr>
                             </m:ctrlPr>
@@ -15544,25 +15531,7 @@
                           <a:rPr lang="en-US" b="0" i="1" smtClean="0">
                             <a:latin typeface="Cambria Math" panose="02040503050406030204" pitchFamily="18" charset="0"/>
                           </a:rPr>
-                          <m:t>=</m:t>
-                        </m:r>
-                        <m:r>
-                          <a:rPr lang="en-US" b="0" i="1" smtClean="0">
-                            <a:latin typeface="Cambria Math" panose="02040503050406030204" pitchFamily="18" charset="0"/>
-                          </a:rPr>
-                          <m:t>1</m:t>
-                        </m:r>
-                        <m:r>
-                          <a:rPr lang="en-US" b="0" i="1" smtClean="0">
-                            <a:latin typeface="Cambria Math" panose="02040503050406030204" pitchFamily="18" charset="0"/>
-                          </a:rPr>
-                          <m:t>.</m:t>
-                        </m:r>
-                        <m:r>
-                          <a:rPr lang="en-US" b="0" i="1" smtClean="0">
-                            <a:latin typeface="Cambria Math" panose="02040503050406030204" pitchFamily="18" charset="0"/>
-                          </a:rPr>
-                          <m:t>0</m:t>
+                          <m:t>=1.0</m:t>
                         </m:r>
                       </m:e>
                     </m:nary>
@@ -16567,7 +16536,7 @@
                     <m:d>
                       <m:dPr>
                         <m:ctrlPr>
-                          <a:rPr lang="ar-AE" i="1">
+                          <a:rPr lang="ar-AE">
                             <a:latin typeface="Cambria Math" panose="02040503050406030204" pitchFamily="18" charset="0"/>
                           </a:rPr>
                         </m:ctrlPr>
@@ -16593,7 +16562,7 @@
                             <m:sSub>
                               <m:sSubPr>
                                 <m:ctrlPr>
-                                  <a:rPr lang="ar-AE" i="1">
+                                  <a:rPr lang="ar-AE">
                                     <a:latin typeface="Cambria Math" panose="02040503050406030204" pitchFamily="18" charset="0"/>
                                   </a:rPr>
                                 </m:ctrlPr>
@@ -16624,7 +16593,7 @@
                             <m:sSub>
                               <m:sSubPr>
                                 <m:ctrlPr>
-                                  <a:rPr lang="ar-AE" i="1">
+                                  <a:rPr lang="ar-AE">
                                     <a:latin typeface="Cambria Math" panose="02040503050406030204" pitchFamily="18" charset="0"/>
                                   </a:rPr>
                                 </m:ctrlPr>
@@ -16688,7 +16657,7 @@
                         <m:sSub>
                           <m:sSubPr>
                             <m:ctrlPr>
-                              <a:rPr lang="ar-AE" i="1">
+                              <a:rPr lang="ar-AE">
                                 <a:latin typeface="Cambria Math" panose="02040503050406030204" pitchFamily="18" charset="0"/>
                               </a:rPr>
                             </m:ctrlPr>
@@ -16719,7 +16688,7 @@
                         <m:sSub>
                           <m:sSubPr>
                             <m:ctrlPr>
-                              <a:rPr lang="ar-AE" i="1">
+                              <a:rPr lang="ar-AE">
                                 <a:latin typeface="Cambria Math" panose="02040503050406030204" pitchFamily="18" charset="0"/>
                               </a:rPr>
                             </m:ctrlPr>
@@ -16754,7 +16723,7 @@
                     <m:sSub>
                       <m:sSubPr>
                         <m:ctrlPr>
-                          <a:rPr lang="ar-AE" i="1">
+                          <a:rPr lang="ar-AE">
                             <a:latin typeface="Cambria Math" panose="02040503050406030204" pitchFamily="18" charset="0"/>
                           </a:rPr>
                         </m:ctrlPr>
@@ -16787,7 +16756,7 @@
                     <m:sSub>
                       <m:sSubPr>
                         <m:ctrlPr>
-                          <a:rPr lang="ar-AE" i="1">
+                          <a:rPr lang="ar-AE">
                             <a:latin typeface="Cambria Math" panose="02040503050406030204" pitchFamily="18" charset="0"/>
                           </a:rPr>
                         </m:ctrlPr>
@@ -16874,7 +16843,7 @@
                       <m:accPr>
                         <m:chr m:val="̂"/>
                         <m:ctrlPr>
-                          <a:rPr i="1">
+                          <a:rPr>
                             <a:latin typeface="Cambria Math" panose="02040503050406030204" pitchFamily="18" charset="0"/>
                           </a:rPr>
                         </m:ctrlPr>
@@ -16897,7 +16866,7 @@
                     <m:sSub>
                       <m:sSubPr>
                         <m:ctrlPr>
-                          <a:rPr i="1">
+                          <a:rPr>
                             <a:latin typeface="Cambria Math" panose="02040503050406030204" pitchFamily="18" charset="0"/>
                           </a:rPr>
                         </m:ctrlPr>
@@ -16931,6 +16900,7 @@
                         <m:ctrlPr>
                           <a:rPr lang="en-US" i="1" smtClean="0">
                             <a:latin typeface="Cambria Math" panose="02040503050406030204" pitchFamily="18" charset="0"/>
+                            <a:ea typeface="Cambria Math" panose="02040503050406030204" pitchFamily="18" charset="0"/>
                           </a:rPr>
                         </m:ctrlPr>
                       </m:accPr>
@@ -16947,7 +16917,7 @@
                     <m:sSub>
                       <m:sSubPr>
                         <m:ctrlPr>
-                          <a:rPr lang="ar-AE" i="1">
+                          <a:rPr lang="ar-AE">
                             <a:latin typeface="Cambria Math" panose="02040503050406030204" pitchFamily="18" charset="0"/>
                           </a:rPr>
                         </m:ctrlPr>
@@ -16983,6 +16953,7 @@
                         <m:ctrlPr>
                           <a:rPr lang="en-US" i="1">
                             <a:latin typeface="Cambria Math" panose="02040503050406030204" pitchFamily="18" charset="0"/>
+                            <a:ea typeface="Cambria Math" panose="02040503050406030204" pitchFamily="18" charset="0"/>
                           </a:rPr>
                         </m:ctrlPr>
                       </m:accPr>
@@ -17013,7 +16984,7 @@
                     <m:oMathParaPr>
                       <m:jc m:val="center"/>
                     </m:oMathParaPr>
-                    <m:oMath xmlns:m="http://schemas.openxmlformats.org/officeDocument/2006/math">
+                    <m:oMath>
                       <m:r>
                         <a:rPr>
                           <a:latin typeface="Cambria Math" panose="02040503050406030204" pitchFamily="18" charset="0"/>
@@ -17023,7 +16994,7 @@
                       <m:d>
                         <m:dPr>
                           <m:ctrlPr>
-                            <a:rPr i="1">
+                            <a:rPr>
                               <a:latin typeface="Cambria Math" panose="02040503050406030204" pitchFamily="18" charset="0"/>
                             </a:rPr>
                           </m:ctrlPr>
@@ -17049,7 +17020,7 @@
                               <m:sSub>
                                 <m:sSubPr>
                                   <m:ctrlPr>
-                                    <a:rPr i="1">
+                                    <a:rPr>
                                       <a:latin typeface="Cambria Math" panose="02040503050406030204" pitchFamily="18" charset="0"/>
                                     </a:rPr>
                                   </m:ctrlPr>
@@ -17080,7 +17051,7 @@
                               <m:sSub>
                                 <m:sSubPr>
                                   <m:ctrlPr>
-                                    <a:rPr i="1">
+                                    <a:rPr>
                                       <a:latin typeface="Cambria Math" panose="02040503050406030204" pitchFamily="18" charset="0"/>
                                     </a:rPr>
                                   </m:ctrlPr>
@@ -17116,7 +17087,7 @@
                         <m:accPr>
                           <m:chr m:val="̂"/>
                           <m:ctrlPr>
-                            <a:rPr i="1">
+                            <a:rPr>
                               <a:latin typeface="Cambria Math" panose="02040503050406030204" pitchFamily="18" charset="0"/>
                             </a:rPr>
                           </m:ctrlPr>
@@ -17139,7 +17110,7 @@
                       <m:sSub>
                         <m:sSubPr>
                           <m:ctrlPr>
-                            <a:rPr i="1">
+                            <a:rPr>
                               <a:latin typeface="Cambria Math" panose="02040503050406030204" pitchFamily="18" charset="0"/>
                             </a:rPr>
                           </m:ctrlPr>
@@ -17173,6 +17144,7 @@
                           <m:ctrlPr>
                             <a:rPr lang="en-US" i="1">
                               <a:latin typeface="Cambria Math" panose="02040503050406030204" pitchFamily="18" charset="0"/>
+                              <a:ea typeface="Cambria Math" panose="02040503050406030204" pitchFamily="18" charset="0"/>
                             </a:rPr>
                           </m:ctrlPr>
                         </m:accPr>
@@ -17189,7 +17161,7 @@
                       <m:sSub>
                         <m:sSubPr>
                           <m:ctrlPr>
-                            <a:rPr lang="ar-AE" i="1">
+                            <a:rPr lang="ar-AE">
                               <a:latin typeface="Cambria Math" panose="02040503050406030204" pitchFamily="18" charset="0"/>
                             </a:rPr>
                           </m:ctrlPr>
@@ -17240,7 +17212,7 @@
                     <m:oMathParaPr>
                       <m:jc m:val="center"/>
                     </m:oMathParaPr>
-                    <m:oMath xmlns:m="http://schemas.openxmlformats.org/officeDocument/2006/math">
+                    <m:oMath>
                       <m:r>
                         <a:rPr>
                           <a:latin typeface="Cambria Math" panose="02040503050406030204" pitchFamily="18" charset="0"/>
@@ -17261,7 +17233,7 @@
                           <m:sSub>
                             <m:sSubPr>
                               <m:ctrlPr>
-                                <a:rPr i="1">
+                                <a:rPr>
                                   <a:latin typeface="Cambria Math" panose="02040503050406030204" pitchFamily="18" charset="0"/>
                                 </a:rPr>
                               </m:ctrlPr>
@@ -17292,7 +17264,7 @@
                           <m:sSub>
                             <m:sSubPr>
                               <m:ctrlPr>
-                                <a:rPr i="1">
+                                <a:rPr>
                                   <a:latin typeface="Cambria Math" panose="02040503050406030204" pitchFamily="18" charset="0"/>
                                 </a:rPr>
                               </m:ctrlPr>
@@ -17325,7 +17297,7 @@
                       <m:sSup>
                         <m:sSupPr>
                           <m:ctrlPr>
-                            <a:rPr i="1">
+                            <a:rPr>
                               <a:latin typeface="Cambria Math" panose="02040503050406030204" pitchFamily="18" charset="0"/>
                             </a:rPr>
                           </m:ctrlPr>
@@ -17343,13 +17315,7 @@
                             <a:rPr>
                               <a:latin typeface="Cambria Math" panose="02040503050406030204" pitchFamily="18" charset="0"/>
                             </a:rPr>
-                            <m:t>−</m:t>
-                          </m:r>
-                          <m:r>
-                            <a:rPr>
-                              <a:latin typeface="Cambria Math" panose="02040503050406030204" pitchFamily="18" charset="0"/>
-                            </a:rPr>
-                            <m:t>1</m:t>
+                            <m:t>−1</m:t>
                           </m:r>
                         </m:sup>
                       </m:sSup>
@@ -17366,7 +17332,7 @@
                             <m:accPr>
                               <m:chr m:val="̂"/>
                               <m:ctrlPr>
-                                <a:rPr i="1">
+                                <a:rPr>
                                   <a:latin typeface="Cambria Math" panose="02040503050406030204" pitchFamily="18" charset="0"/>
                                 </a:rPr>
                               </m:ctrlPr>
@@ -17391,7 +17357,7 @@
                       <m:sSup>
                         <m:sSupPr>
                           <m:ctrlPr>
-                            <a:rPr i="1">
+                            <a:rPr>
                               <a:latin typeface="Cambria Math" panose="02040503050406030204" pitchFamily="18" charset="0"/>
                             </a:rPr>
                           </m:ctrlPr>
@@ -17409,13 +17375,7 @@
                             <a:rPr>
                               <a:latin typeface="Cambria Math" panose="02040503050406030204" pitchFamily="18" charset="0"/>
                             </a:rPr>
-                            <m:t>−</m:t>
-                          </m:r>
-                          <m:r>
-                            <a:rPr>
-                              <a:latin typeface="Cambria Math" panose="02040503050406030204" pitchFamily="18" charset="0"/>
-                            </a:rPr>
-                            <m:t>1</m:t>
+                            <m:t>−1</m:t>
                           </m:r>
                         </m:sup>
                       </m:sSup>
@@ -17431,7 +17391,7 @@
                           <m:sSub>
                             <m:sSubPr>
                               <m:ctrlPr>
-                                <a:rPr i="1">
+                                <a:rPr>
                                   <a:latin typeface="Cambria Math" panose="02040503050406030204" pitchFamily="18" charset="0"/>
                                 </a:rPr>
                               </m:ctrlPr>
@@ -17465,6 +17425,7 @@
                               <m:ctrlPr>
                                 <a:rPr lang="en-US" i="1">
                                   <a:latin typeface="Cambria Math" panose="02040503050406030204" pitchFamily="18" charset="0"/>
+                                  <a:ea typeface="Cambria Math" panose="02040503050406030204" pitchFamily="18" charset="0"/>
                                 </a:rPr>
                               </m:ctrlPr>
                             </m:accPr>
@@ -17481,7 +17442,7 @@
                           <m:sSub>
                             <m:sSubPr>
                               <m:ctrlPr>
-                                <a:rPr lang="ar-AE" i="1">
+                                <a:rPr lang="ar-AE">
                                   <a:latin typeface="Cambria Math" panose="02040503050406030204" pitchFamily="18" charset="0"/>
                                 </a:rPr>
                               </m:ctrlPr>
@@ -17880,11 +17841,11 @@
                     <m:oMathParaPr>
                       <m:jc m:val="center"/>
                     </m:oMathParaPr>
-                    <m:oMath xmlns:m="http://schemas.openxmlformats.org/officeDocument/2006/math">
+                    <m:oMath>
                       <m:sSub>
                         <m:sSubPr>
                           <m:ctrlPr>
-                            <a:rPr i="1">
+                            <a:rPr>
                               <a:latin typeface="Cambria Math" panose="02040503050406030204" pitchFamily="18" charset="0"/>
                             </a:rPr>
                           </m:ctrlPr>
@@ -17918,6 +17879,7 @@
                           <m:ctrlPr>
                             <a:rPr lang="en-US" i="1">
                               <a:latin typeface="Cambria Math" panose="02040503050406030204" pitchFamily="18" charset="0"/>
+                              <a:ea typeface="Cambria Math" panose="02040503050406030204" pitchFamily="18" charset="0"/>
                             </a:rPr>
                           </m:ctrlPr>
                         </m:accPr>
@@ -17961,7 +17923,7 @@
                           <m:sSub>
                             <m:sSubPr>
                               <m:ctrlPr>
-                                <a:rPr i="1">
+                                <a:rPr>
                                   <a:latin typeface="Cambria Math" panose="02040503050406030204" pitchFamily="18" charset="0"/>
                                 </a:rPr>
                               </m:ctrlPr>
@@ -17995,6 +17957,7 @@
                               <m:ctrlPr>
                                 <a:rPr lang="en-US" i="1">
                                   <a:latin typeface="Cambria Math" panose="02040503050406030204" pitchFamily="18" charset="0"/>
+                                  <a:ea typeface="Cambria Math" panose="02040503050406030204" pitchFamily="18" charset="0"/>
                                 </a:rPr>
                               </m:ctrlPr>
                             </m:accPr>
@@ -18424,10 +18387,7 @@
                           <a:pPr/>
                           <a14:m>
                             <m:oMathPara xmlns:m="http://schemas.openxmlformats.org/officeDocument/2006/math">
-                              <m:oMathParaPr>
-                                <m:jc m:val="centerGroup"/>
-                              </m:oMathParaPr>
-                              <m:oMath xmlns:m="http://schemas.openxmlformats.org/officeDocument/2006/math">
+                              <m:oMath>
                                 <m:r>
                                   <a:rPr lang="en-US" sz="1600" b="0" i="1" smtClean="0">
                                     <a:latin typeface="Cambria Math" panose="02040503050406030204" pitchFamily="18" charset="0"/>
@@ -18488,10 +18448,7 @@
                           </a:pPr>
                           <a14:m>
                             <m:oMathPara xmlns:m="http://schemas.openxmlformats.org/officeDocument/2006/math">
-                              <m:oMathParaPr>
-                                <m:jc m:val="centerGroup"/>
-                              </m:oMathParaPr>
-                              <m:oMath xmlns:m="http://schemas.openxmlformats.org/officeDocument/2006/math">
+                              <m:oMath>
                                 <m:r>
                                   <a:rPr lang="en-US" sz="1600" i="1" smtClean="0">
                                     <a:latin typeface="Cambria Math" panose="02040503050406030204" pitchFamily="18" charset="0"/>
@@ -18575,10 +18532,7 @@
                           </a:pPr>
                           <a14:m>
                             <m:oMathPara xmlns:m="http://schemas.openxmlformats.org/officeDocument/2006/math">
-                              <m:oMathParaPr>
-                                <m:jc m:val="centerGroup"/>
-                              </m:oMathParaPr>
-                              <m:oMath xmlns:m="http://schemas.openxmlformats.org/officeDocument/2006/math">
+                              <m:oMath>
                                 <m:r>
                                   <a:rPr lang="en-US" sz="1600" b="0" i="1" smtClean="0">
                                     <a:latin typeface="Cambria Math" panose="02040503050406030204" pitchFamily="18" charset="0"/>
@@ -18644,10 +18598,7 @@
                           <a:pPr/>
                           <a14:m>
                             <m:oMathPara xmlns:m="http://schemas.openxmlformats.org/officeDocument/2006/math">
-                              <m:oMathParaPr>
-                                <m:jc m:val="centerGroup"/>
-                              </m:oMathParaPr>
-                              <m:oMath xmlns:m="http://schemas.openxmlformats.org/officeDocument/2006/math">
+                              <m:oMath>
                                 <m:r>
                                   <a:rPr lang="en-US" sz="1600" i="1" smtClean="0">
                                     <a:latin typeface="Cambria Math" panose="02040503050406030204" pitchFamily="18" charset="0"/>
@@ -18750,10 +18701,7 @@
                           <a:pPr/>
                           <a14:m>
                             <m:oMathPara xmlns:m="http://schemas.openxmlformats.org/officeDocument/2006/math">
-                              <m:oMathParaPr>
-                                <m:jc m:val="centerGroup"/>
-                              </m:oMathParaPr>
-                              <m:oMath xmlns:m="http://schemas.openxmlformats.org/officeDocument/2006/math">
+                              <m:oMath>
                                 <m:r>
                                   <a:rPr lang="en-US" sz="1600" b="0" i="1" smtClean="0">
                                     <a:latin typeface="Cambria Math" panose="02040503050406030204" pitchFamily="18" charset="0"/>
@@ -18844,10 +18792,7 @@
                           <a:pPr/>
                           <a14:m>
                             <m:oMathPara xmlns:m="http://schemas.openxmlformats.org/officeDocument/2006/math">
-                              <m:oMathParaPr>
-                                <m:jc m:val="centerGroup"/>
-                              </m:oMathParaPr>
-                              <m:oMath xmlns:m="http://schemas.openxmlformats.org/officeDocument/2006/math">
+                              <m:oMath>
                                 <m:r>
                                   <a:rPr lang="en-US" sz="1600" i="1" smtClean="0">
                                     <a:latin typeface="Cambria Math" panose="02040503050406030204" pitchFamily="18" charset="0"/>
@@ -18982,10 +18927,7 @@
                           <a:pPr/>
                           <a14:m>
                             <m:oMathPara xmlns:m="http://schemas.openxmlformats.org/officeDocument/2006/math">
-                              <m:oMathParaPr>
-                                <m:jc m:val="centerGroup"/>
-                              </m:oMathParaPr>
-                              <m:oMath xmlns:m="http://schemas.openxmlformats.org/officeDocument/2006/math">
+                              <m:oMath>
                                 <m:r>
                                   <a:rPr lang="en-US" sz="1600" b="0" i="1" smtClean="0">
                                     <a:latin typeface="Cambria Math" panose="02040503050406030204" pitchFamily="18" charset="0"/>
@@ -19083,10 +19025,7 @@
                           <a:pPr/>
                           <a14:m>
                             <m:oMathPara xmlns:m="http://schemas.openxmlformats.org/officeDocument/2006/math">
-                              <m:oMathParaPr>
-                                <m:jc m:val="centerGroup"/>
-                              </m:oMathParaPr>
-                              <m:oMath xmlns:m="http://schemas.openxmlformats.org/officeDocument/2006/math">
+                              <m:oMath>
                                 <m:r>
                                   <a:rPr lang="en-US" sz="1600" i="1" smtClean="0">
                                     <a:latin typeface="Cambria Math" panose="02040503050406030204" pitchFamily="18" charset="0"/>
@@ -19204,10 +19143,7 @@
                           <a:pPr/>
                           <a14:m>
                             <m:oMathPara xmlns:m="http://schemas.openxmlformats.org/officeDocument/2006/math">
-                              <m:oMathParaPr>
-                                <m:jc m:val="centerGroup"/>
-                              </m:oMathParaPr>
-                              <m:oMath xmlns:m="http://schemas.openxmlformats.org/officeDocument/2006/math">
+                              <m:oMath>
                                 <m:r>
                                   <a:rPr lang="en-US" sz="1600" b="0" i="1" smtClean="0">
                                     <a:latin typeface="Cambria Math" panose="02040503050406030204" pitchFamily="18" charset="0"/>
@@ -19305,10 +19241,7 @@
                           <a:pPr/>
                           <a14:m>
                             <m:oMathPara xmlns:m="http://schemas.openxmlformats.org/officeDocument/2006/math">
-                              <m:oMathParaPr>
-                                <m:jc m:val="centerGroup"/>
-                              </m:oMathParaPr>
-                              <m:oMath xmlns:m="http://schemas.openxmlformats.org/officeDocument/2006/math">
+                              <m:oMath>
                                 <m:r>
                                   <a:rPr lang="en-US" sz="1600" i="1" smtClean="0">
                                     <a:latin typeface="Cambria Math" panose="02040503050406030204" pitchFamily="18" charset="0"/>
@@ -19426,10 +19359,7 @@
                           <a:pPr/>
                           <a14:m>
                             <m:oMathPara xmlns:m="http://schemas.openxmlformats.org/officeDocument/2006/math">
-                              <m:oMathParaPr>
-                                <m:jc m:val="centerGroup"/>
-                              </m:oMathParaPr>
-                              <m:oMath xmlns:m="http://schemas.openxmlformats.org/officeDocument/2006/math">
+                              <m:oMath>
                                 <m:r>
                                   <a:rPr lang="en-US" sz="1600" b="0" i="1" smtClean="0">
                                     <a:latin typeface="Cambria Math" panose="02040503050406030204" pitchFamily="18" charset="0"/>
@@ -19492,10 +19422,7 @@
                           <a:pPr/>
                           <a14:m>
                             <m:oMathPara xmlns:m="http://schemas.openxmlformats.org/officeDocument/2006/math">
-                              <m:oMathParaPr>
-                                <m:jc m:val="centerGroup"/>
-                              </m:oMathParaPr>
-                              <m:oMath xmlns:m="http://schemas.openxmlformats.org/officeDocument/2006/math">
+                              <m:oMath>
                                 <m:r>
                                   <a:rPr lang="en-US" sz="1600" i="1" smtClean="0">
                                     <a:latin typeface="Cambria Math" panose="02040503050406030204" pitchFamily="18" charset="0"/>
@@ -19522,7 +19449,6 @@
                                     <m:ctrlPr>
                                       <a:rPr lang="en-US" sz="1600" b="0" i="1" smtClean="0">
                                         <a:latin typeface="Cambria Math" panose="02040503050406030204" pitchFamily="18" charset="0"/>
-                                        <a:ea typeface="Cambria Math" panose="02040503050406030204" pitchFamily="18" charset="0"/>
                                       </a:rPr>
                                     </m:ctrlPr>
                                   </m:dPr>
@@ -19594,10 +19520,7 @@
                           </a:pPr>
                           <a14:m>
                             <m:oMathPara xmlns:m="http://schemas.openxmlformats.org/officeDocument/2006/math">
-                              <m:oMathParaPr>
-                                <m:jc m:val="centerGroup"/>
-                              </m:oMathParaPr>
-                              <m:oMath xmlns:m="http://schemas.openxmlformats.org/officeDocument/2006/math">
+                              <m:oMath>
                                 <m:r>
                                   <a:rPr lang="en-US" sz="1600" b="0" i="1" smtClean="0">
                                     <a:latin typeface="Cambria Math" panose="02040503050406030204" pitchFamily="18" charset="0"/>
@@ -19666,10 +19589,7 @@
                           <a:pPr/>
                           <a14:m>
                             <m:oMathPara xmlns:m="http://schemas.openxmlformats.org/officeDocument/2006/math">
-                              <m:oMathParaPr>
-                                <m:jc m:val="centerGroup"/>
-                              </m:oMathParaPr>
-                              <m:oMath xmlns:m="http://schemas.openxmlformats.org/officeDocument/2006/math">
+                              <m:oMath>
                                 <m:r>
                                   <a:rPr lang="en-US" sz="1600" i="1" smtClean="0">
                                     <a:latin typeface="Cambria Math" panose="02040503050406030204" pitchFamily="18" charset="0"/>
@@ -21116,7 +21036,7 @@
                     <m:sSub>
                       <m:sSubPr>
                         <m:ctrlPr>
-                          <a:rPr lang="ar-AE" i="1">
+                          <a:rPr lang="en-US" b="0" i="1" smtClean="0">
                             <a:latin typeface="Cambria Math" panose="02040503050406030204" pitchFamily="18" charset="0"/>
                           </a:rPr>
                         </m:ctrlPr>
@@ -21160,13 +21080,7 @@
                       <a:rPr lang="ar-AE">
                         <a:latin typeface="Cambria Math" panose="02040503050406030204" pitchFamily="18" charset="0"/>
                       </a:rPr>
-                      <m:t>=</m:t>
-                    </m:r>
-                    <m:r>
-                      <a:rPr lang="ar-AE">
-                        <a:latin typeface="Cambria Math" panose="02040503050406030204" pitchFamily="18" charset="0"/>
-                      </a:rPr>
-                      <m:t>1</m:t>
+                      <m:t>=1</m:t>
                     </m:r>
                   </m:oMath>
                 </a14:m>
@@ -21183,7 +21097,7 @@
                     <m:sSub>
                       <m:sSubPr>
                         <m:ctrlPr>
-                          <a:rPr lang="ar-AE" i="1">
+                          <a:rPr lang="ar-AE">
                             <a:latin typeface="Cambria Math" panose="02040503050406030204" pitchFamily="18" charset="0"/>
                           </a:rPr>
                         </m:ctrlPr>
@@ -21220,7 +21134,7 @@
                     <m:sSub>
                       <m:sSubPr>
                         <m:ctrlPr>
-                          <a:rPr lang="ar-AE" i="1">
+                          <a:rPr lang="ar-AE">
                             <a:latin typeface="Cambria Math" panose="02040503050406030204" pitchFamily="18" charset="0"/>
                           </a:rPr>
                         </m:ctrlPr>
@@ -21260,6 +21174,7 @@
                         <m:ctrlPr>
                           <a:rPr lang="ar-AE" i="1">
                             <a:latin typeface="Cambria Math" panose="02040503050406030204" pitchFamily="18" charset="0"/>
+                            <a:ea typeface="Cambria Math" panose="02040503050406030204" pitchFamily="18" charset="0"/>
                           </a:rPr>
                         </m:ctrlPr>
                       </m:accPr>
@@ -21288,7 +21203,7 @@
                     <m:sSub>
                       <m:sSubPr>
                         <m:ctrlPr>
-                          <a:rPr lang="ar-AE" i="1">
+                          <a:rPr lang="ar-AE">
                             <a:latin typeface="Cambria Math" panose="02040503050406030204" pitchFamily="18" charset="0"/>
                           </a:rPr>
                         </m:ctrlPr>
@@ -21321,7 +21236,7 @@
                         <m:begChr m:val="["/>
                         <m:endChr m:val="]"/>
                         <m:ctrlPr>
-                          <a:rPr lang="ar-AE" i="1">
+                          <a:rPr lang="ar-AE">
                             <a:latin typeface="Cambria Math" panose="02040503050406030204" pitchFamily="18" charset="0"/>
                           </a:rPr>
                         </m:ctrlPr>
@@ -21331,19 +21246,7 @@
                           <a:rPr lang="ar-AE">
                             <a:latin typeface="Cambria Math" panose="02040503050406030204" pitchFamily="18" charset="0"/>
                           </a:rPr>
-                          <m:t>0</m:t>
-                        </m:r>
-                        <m:r>
-                          <a:rPr lang="ar-AE">
-                            <a:latin typeface="Cambria Math" panose="02040503050406030204" pitchFamily="18" charset="0"/>
-                          </a:rPr>
-                          <m:t>,</m:t>
-                        </m:r>
-                        <m:r>
-                          <a:rPr lang="ar-AE">
-                            <a:latin typeface="Cambria Math" panose="02040503050406030204" pitchFamily="18" charset="0"/>
-                          </a:rPr>
-                          <m:t>1</m:t>
+                          <m:t>0,1</m:t>
                         </m:r>
                       </m:e>
                     </m:d>
@@ -21371,7 +21274,7 @@
                         <m:sSub>
                           <m:sSubPr>
                             <m:ctrlPr>
-                              <a:rPr lang="ar-AE" i="1">
+                              <a:rPr lang="ar-AE">
                                 <a:latin typeface="Cambria Math" panose="02040503050406030204" pitchFamily="18" charset="0"/>
                               </a:rPr>
                             </m:ctrlPr>
@@ -21415,7 +21318,7 @@
                     <m:oMathParaPr>
                       <m:jc m:val="center"/>
                     </m:oMathParaPr>
-                    <m:oMath xmlns:m="http://schemas.openxmlformats.org/officeDocument/2006/math">
+                    <m:oMath>
                       <m:r>
                         <m:rPr>
                           <m:sty m:val="p"/>
@@ -21458,7 +21361,7 @@
                       <m:f>
                         <m:fPr>
                           <m:ctrlPr>
-                            <a:rPr lang="ar-AE" i="1">
+                            <a:rPr lang="en-US" b="0" i="1" smtClean="0">
                               <a:latin typeface="Cambria Math" panose="02040503050406030204" pitchFamily="18" charset="0"/>
                             </a:rPr>
                           </m:ctrlPr>
@@ -21486,13 +21389,7 @@
                             <a:rPr lang="en-US" b="0" i="1" smtClean="0">
                               <a:latin typeface="Cambria Math" panose="02040503050406030204" pitchFamily="18" charset="0"/>
                             </a:rPr>
-                            <m:t> </m:t>
-                          </m:r>
-                          <m:r>
-                            <a:rPr lang="en-US" b="0" i="1" smtClean="0">
-                              <a:latin typeface="Cambria Math" panose="02040503050406030204" pitchFamily="18" charset="0"/>
-                            </a:rPr>
-                            <m:t>1</m:t>
+                            <m:t> 1</m:t>
                           </m:r>
                         </m:num>
                         <m:den>
@@ -21518,13 +21415,7 @@
                             <a:rPr lang="en-US" b="0" i="1" smtClean="0">
                               <a:latin typeface="Cambria Math" panose="02040503050406030204" pitchFamily="18" charset="0"/>
                             </a:rPr>
-                            <m:t> </m:t>
-                          </m:r>
-                          <m:r>
-                            <a:rPr lang="en-US" b="0" i="1" smtClean="0">
-                              <a:latin typeface="Cambria Math" panose="02040503050406030204" pitchFamily="18" charset="0"/>
-                            </a:rPr>
-                            <m:t>0</m:t>
+                            <m:t> 0</m:t>
                           </m:r>
                         </m:den>
                       </m:f>
@@ -21546,7 +21437,7 @@
                           <m:sSub>
                             <m:sSubPr>
                               <m:ctrlPr>
-                                <a:rPr lang="ar-AE" i="1">
+                                <a:rPr lang="ar-AE">
                                   <a:latin typeface="Cambria Math" panose="02040503050406030204" pitchFamily="18" charset="0"/>
                                 </a:rPr>
                               </m:ctrlPr>
@@ -21580,7 +21471,7 @@
                               <m:sSub>
                                 <m:sSubPr>
                                   <m:ctrlPr>
-                                    <a:rPr lang="ar-AE" i="1">
+                                    <a:rPr lang="ar-AE">
                                       <a:latin typeface="Cambria Math" panose="02040503050406030204" pitchFamily="18" charset="0"/>
                                     </a:rPr>
                                   </m:ctrlPr>
@@ -21610,18 +21501,12 @@
                             <a:rPr lang="ar-AE">
                               <a:latin typeface="Cambria Math" panose="02040503050406030204" pitchFamily="18" charset="0"/>
                             </a:rPr>
-                            <m:t>1</m:t>
-                          </m:r>
-                          <m:r>
-                            <a:rPr lang="ar-AE">
-                              <a:latin typeface="Cambria Math" panose="02040503050406030204" pitchFamily="18" charset="0"/>
-                            </a:rPr>
-                            <m:t>−</m:t>
+                            <m:t>1−</m:t>
                           </m:r>
                           <m:sSub>
                             <m:sSubPr>
                               <m:ctrlPr>
-                                <a:rPr lang="ar-AE" i="1">
+                                <a:rPr lang="ar-AE">
                                   <a:latin typeface="Cambria Math" panose="02040503050406030204" pitchFamily="18" charset="0"/>
                                 </a:rPr>
                               </m:ctrlPr>
@@ -21655,7 +21540,7 @@
                               <m:sSub>
                                 <m:sSubPr>
                                   <m:ctrlPr>
-                                    <a:rPr lang="ar-AE" i="1">
+                                    <a:rPr lang="ar-AE">
                                       <a:latin typeface="Cambria Math" panose="02040503050406030204" pitchFamily="18" charset="0"/>
                                     </a:rPr>
                                   </m:ctrlPr>
@@ -22548,7 +22433,7 @@
                     <m:sSub>
                       <m:sSubPr>
                         <m:ctrlPr>
-                          <a:rPr lang="ar-AE" i="1">
+                          <a:rPr lang="en-US" b="0" i="0" smtClean="0">
                             <a:latin typeface="Cambria Math" panose="02040503050406030204" pitchFamily="18" charset="0"/>
                           </a:rPr>
                         </m:ctrlPr>
@@ -22595,13 +22480,7 @@
                       <a:rPr lang="ar-AE">
                         <a:latin typeface="Cambria Math" panose="02040503050406030204" pitchFamily="18" charset="0"/>
                       </a:rPr>
-                      <m:t>=</m:t>
-                    </m:r>
-                    <m:r>
-                      <a:rPr lang="ar-AE">
-                        <a:latin typeface="Cambria Math" panose="02040503050406030204" pitchFamily="18" charset="0"/>
-                      </a:rPr>
-                      <m:t>1</m:t>
+                      <m:t>=1</m:t>
                     </m:r>
                   </m:oMath>
                 </a14:m>
@@ -22614,7 +22493,7 @@
                     <m:sSub>
                       <m:sSubPr>
                         <m:ctrlPr>
-                          <a:rPr lang="ar-AE" i="1">
+                          <a:rPr lang="ar-AE">
                             <a:latin typeface="Cambria Math" panose="02040503050406030204" pitchFamily="18" charset="0"/>
                           </a:rPr>
                         </m:ctrlPr>
@@ -22651,7 +22530,7 @@
                     <m:sSub>
                       <m:sSubPr>
                         <m:ctrlPr>
-                          <a:rPr lang="ar-AE" i="1">
+                          <a:rPr lang="ar-AE">
                             <a:latin typeface="Cambria Math" panose="02040503050406030204" pitchFamily="18" charset="0"/>
                           </a:rPr>
                         </m:ctrlPr>
@@ -22691,6 +22570,7 @@
                         <m:ctrlPr>
                           <a:rPr lang="ar-AE" i="1">
                             <a:latin typeface="Cambria Math" panose="02040503050406030204" pitchFamily="18" charset="0"/>
+                            <a:ea typeface="Cambria Math" panose="02040503050406030204" pitchFamily="18" charset="0"/>
                           </a:rPr>
                         </m:ctrlPr>
                       </m:accPr>
@@ -22719,7 +22599,7 @@
                     <m:sSub>
                       <m:sSubPr>
                         <m:ctrlPr>
-                          <a:rPr lang="ar-AE" i="1">
+                          <a:rPr lang="ar-AE">
                             <a:latin typeface="Cambria Math" panose="02040503050406030204" pitchFamily="18" charset="0"/>
                           </a:rPr>
                         </m:ctrlPr>
@@ -22752,7 +22632,7 @@
                         <m:begChr m:val="["/>
                         <m:endChr m:val="]"/>
                         <m:ctrlPr>
-                          <a:rPr lang="ar-AE" i="1">
+                          <a:rPr lang="ar-AE">
                             <a:latin typeface="Cambria Math" panose="02040503050406030204" pitchFamily="18" charset="0"/>
                           </a:rPr>
                         </m:ctrlPr>
@@ -22762,19 +22642,7 @@
                           <a:rPr lang="ar-AE">
                             <a:latin typeface="Cambria Math" panose="02040503050406030204" pitchFamily="18" charset="0"/>
                           </a:rPr>
-                          <m:t>0</m:t>
-                        </m:r>
-                        <m:r>
-                          <a:rPr lang="ar-AE">
-                            <a:latin typeface="Cambria Math" panose="02040503050406030204" pitchFamily="18" charset="0"/>
-                          </a:rPr>
-                          <m:t>,</m:t>
-                        </m:r>
-                        <m:r>
-                          <a:rPr lang="ar-AE">
-                            <a:latin typeface="Cambria Math" panose="02040503050406030204" pitchFamily="18" charset="0"/>
-                          </a:rPr>
-                          <m:t>1</m:t>
+                          <m:t>0,1</m:t>
                         </m:r>
                       </m:e>
                     </m:d>
@@ -22802,7 +22670,7 @@
                         <m:sSub>
                           <m:sSubPr>
                             <m:ctrlPr>
-                              <a:rPr lang="ar-AE" i="1">
+                              <a:rPr lang="ar-AE">
                                 <a:latin typeface="Cambria Math" panose="02040503050406030204" pitchFamily="18" charset="0"/>
                               </a:rPr>
                             </m:ctrlPr>
@@ -22854,7 +22722,7 @@
                     <m:oMathParaPr>
                       <m:jc m:val="center"/>
                     </m:oMathParaPr>
-                    <m:oMath xmlns:m="http://schemas.openxmlformats.org/officeDocument/2006/math">
+                    <m:oMath>
                       <m:r>
                         <a:rPr lang="en-US">
                           <a:latin typeface="Cambria Math" panose="02040503050406030204" pitchFamily="18" charset="0"/>
@@ -22864,7 +22732,7 @@
                       <m:d>
                         <m:dPr>
                           <m:ctrlPr>
-                            <a:rPr lang="ar-AE" i="1">
+                            <a:rPr lang="ar-AE">
                               <a:latin typeface="Cambria Math" panose="02040503050406030204" pitchFamily="18" charset="0"/>
                             </a:rPr>
                           </m:ctrlPr>
@@ -22890,7 +22758,7 @@
                               <m:sSub>
                                 <m:sSubPr>
                                   <m:ctrlPr>
-                                    <a:rPr lang="ar-AE" i="1">
+                                    <a:rPr lang="ar-AE">
                                       <a:latin typeface="Cambria Math" panose="02040503050406030204" pitchFamily="18" charset="0"/>
                                     </a:rPr>
                                   </m:ctrlPr>
@@ -22921,7 +22789,7 @@
                               <m:sSub>
                                 <m:sSubPr>
                                   <m:ctrlPr>
-                                    <a:rPr lang="ar-AE" i="1">
+                                    <a:rPr lang="ar-AE">
                                       <a:latin typeface="Cambria Math" panose="02040503050406030204" pitchFamily="18" charset="0"/>
                                     </a:rPr>
                                   </m:ctrlPr>
@@ -22971,7 +22839,7 @@
                           <m:sSub>
                             <m:sSubPr>
                               <m:ctrlPr>
-                                <a:rPr lang="ar-AE" i="1">
+                                <a:rPr lang="ar-AE">
                                   <a:latin typeface="Cambria Math" panose="02040503050406030204" pitchFamily="18" charset="0"/>
                                 </a:rPr>
                               </m:ctrlPr>
@@ -23005,7 +22873,7 @@
                               <m:sSub>
                                 <m:sSubPr>
                                   <m:ctrlPr>
-                                    <a:rPr lang="ar-AE" i="1">
+                                    <a:rPr lang="ar-AE">
                                       <a:latin typeface="Cambria Math" panose="02040503050406030204" pitchFamily="18" charset="0"/>
                                     </a:rPr>
                                   </m:ctrlPr>
@@ -23064,7 +22932,7 @@
                               <m:sSub>
                                 <m:sSubPr>
                                   <m:ctrlPr>
-                                    <a:rPr lang="ar-AE" i="1">
+                                    <a:rPr lang="ar-AE">
                                       <a:latin typeface="Cambria Math" panose="02040503050406030204" pitchFamily="18" charset="0"/>
                                     </a:rPr>
                                   </m:ctrlPr>
@@ -23098,7 +22966,7 @@
                                   <m:sSub>
                                     <m:sSubPr>
                                       <m:ctrlPr>
-                                        <a:rPr lang="ar-AE" i="1">
+                                        <a:rPr lang="ar-AE">
                                           <a:latin typeface="Cambria Math" panose="02040503050406030204" pitchFamily="18" charset="0"/>
                                         </a:rPr>
                                       </m:ctrlPr>
@@ -23128,18 +22996,12 @@
                                 <a:rPr lang="ar-AE">
                                   <a:latin typeface="Cambria Math" panose="02040503050406030204" pitchFamily="18" charset="0"/>
                                 </a:rPr>
-                                <m:t>1</m:t>
-                              </m:r>
-                              <m:r>
-                                <a:rPr lang="ar-AE">
-                                  <a:latin typeface="Cambria Math" panose="02040503050406030204" pitchFamily="18" charset="0"/>
-                                </a:rPr>
-                                <m:t>−</m:t>
+                                <m:t>1−</m:t>
                               </m:r>
                               <m:sSub>
                                 <m:sSubPr>
                                   <m:ctrlPr>
-                                    <a:rPr lang="ar-AE" i="1">
+                                    <a:rPr lang="ar-AE">
                                       <a:latin typeface="Cambria Math" panose="02040503050406030204" pitchFamily="18" charset="0"/>
                                     </a:rPr>
                                   </m:ctrlPr>
@@ -23173,7 +23035,7 @@
                                   <m:sSub>
                                     <m:sSubPr>
                                       <m:ctrlPr>
-                                        <a:rPr lang="ar-AE" i="1">
+                                        <a:rPr lang="ar-AE">
                                           <a:latin typeface="Cambria Math" panose="02040503050406030204" pitchFamily="18" charset="0"/>
                                         </a:rPr>
                                       </m:ctrlPr>
@@ -23210,7 +23072,7 @@
                       <m:sSub>
                         <m:sSubPr>
                           <m:ctrlPr>
-                            <a:rPr lang="ar-AE" i="1">
+                            <a:rPr lang="ar-AE">
                               <a:latin typeface="Cambria Math" panose="02040503050406030204" pitchFamily="18" charset="0"/>
                             </a:rPr>
                           </m:ctrlPr>
@@ -23241,7 +23103,7 @@
                       <m:sSub>
                         <m:sSubPr>
                           <m:ctrlPr>
-                            <a:rPr lang="ar-AE" i="1">
+                            <a:rPr lang="en-US" i="1">
                               <a:latin typeface="Cambria Math" panose="02040503050406030204" pitchFamily="18" charset="0"/>
                             </a:rPr>
                           </m:ctrlPr>
@@ -23253,6 +23115,7 @@
                               <m:ctrlPr>
                                 <a:rPr lang="en-US" i="1">
                                   <a:latin typeface="Cambria Math" panose="02040503050406030204" pitchFamily="18" charset="0"/>
+                                  <a:ea typeface="Cambria Math" panose="02040503050406030204" pitchFamily="18" charset="0"/>
                                 </a:rPr>
                               </m:ctrlPr>
                             </m:accPr>
@@ -23553,10 +23416,7 @@
                 </a:pPr>
                 <a14:m>
                   <m:oMathPara xmlns:m="http://schemas.openxmlformats.org/officeDocument/2006/math">
-                    <m:oMathParaPr>
-                      <m:jc m:val="centerGroup"/>
-                    </m:oMathParaPr>
-                    <m:oMath xmlns:m="http://schemas.openxmlformats.org/officeDocument/2006/math">
+                    <m:oMath>
                       <m:r>
                         <a:rPr lang="en-US">
                           <a:latin typeface="Cambria Math" panose="02040503050406030204" pitchFamily="18" charset="0"/>
@@ -23575,7 +23435,7 @@
                           <m:sSub>
                             <m:sSubPr>
                               <m:ctrlPr>
-                                <a:rPr lang="ar-AE" i="1">
+                                <a:rPr lang="en-US" b="0" i="1" smtClean="0">
                                   <a:latin typeface="Cambria Math" panose="02040503050406030204" pitchFamily="18" charset="0"/>
                                 </a:rPr>
                               </m:ctrlPr>
@@ -23623,7 +23483,7 @@
                           <m:sSub>
                             <m:sSubPr>
                               <m:ctrlPr>
-                                <a:rPr lang="ar-AE" i="1">
+                                <a:rPr lang="ar-AE">
                                   <a:latin typeface="Cambria Math" panose="02040503050406030204" pitchFamily="18" charset="0"/>
                                 </a:rPr>
                               </m:ctrlPr>
@@ -23656,7 +23516,7 @@
                       <m:sSup>
                         <m:sSupPr>
                           <m:ctrlPr>
-                            <a:rPr lang="ar-AE" i="1">
+                            <a:rPr lang="ar-AE">
                               <a:latin typeface="Cambria Math" panose="02040503050406030204" pitchFamily="18" charset="0"/>
                             </a:rPr>
                           </m:ctrlPr>
@@ -23674,13 +23534,7 @@
                             <a:rPr lang="ar-AE">
                               <a:latin typeface="Cambria Math" panose="02040503050406030204" pitchFamily="18" charset="0"/>
                             </a:rPr>
-                            <m:t>−</m:t>
-                          </m:r>
-                          <m:r>
-                            <a:rPr lang="ar-AE">
-                              <a:latin typeface="Cambria Math" panose="02040503050406030204" pitchFamily="18" charset="0"/>
-                            </a:rPr>
-                            <m:t>1</m:t>
+                            <m:t>−1</m:t>
                           </m:r>
                         </m:sup>
                       </m:sSup>
@@ -23696,7 +23550,7 @@
                           <m:sSub>
                             <m:sSubPr>
                               <m:ctrlPr>
-                                <a:rPr lang="ar-AE" i="1">
+                                <a:rPr lang="ar-AE">
                                   <a:latin typeface="Cambria Math" panose="02040503050406030204" pitchFamily="18" charset="0"/>
                                 </a:rPr>
                               </m:ctrlPr>
@@ -23730,6 +23584,7 @@
                               <m:ctrlPr>
                                 <a:rPr lang="ar-AE" i="1">
                                   <a:latin typeface="Cambria Math" panose="02040503050406030204" pitchFamily="18" charset="0"/>
+                                  <a:ea typeface="Cambria Math" panose="02040503050406030204" pitchFamily="18" charset="0"/>
                                 </a:rPr>
                               </m:ctrlPr>
                             </m:accPr>
@@ -23746,7 +23601,7 @@
                           <m:sSub>
                             <m:sSubPr>
                               <m:ctrlPr>
-                                <a:rPr lang="ar-AE" i="1" smtClean="0">
+                                <a:rPr lang="en-US" b="0" i="1" smtClean="0">
                                   <a:latin typeface="Cambria Math" panose="02040503050406030204" pitchFamily="18" charset="0"/>
                                   <a:ea typeface="Cambria Math" panose="02040503050406030204" pitchFamily="18" charset="0"/>
                                 </a:rPr>
@@ -23791,10 +23646,7 @@
                 </a:pPr>
                 <a14:m>
                   <m:oMathPara xmlns:m="http://schemas.openxmlformats.org/officeDocument/2006/math">
-                    <m:oMathParaPr>
-                      <m:jc m:val="centerGroup"/>
-                    </m:oMathParaPr>
-                    <m:oMath xmlns:m="http://schemas.openxmlformats.org/officeDocument/2006/math">
+                    <m:oMath>
                       <m:r>
                         <a:rPr lang="en-US">
                           <a:latin typeface="Cambria Math" panose="02040503050406030204" pitchFamily="18" charset="0"/>
@@ -23815,7 +23667,7 @@
                           <m:sSub>
                             <m:sSubPr>
                               <m:ctrlPr>
-                                <a:rPr lang="ar-AE" i="1">
+                                <a:rPr lang="ar-AE">
                                   <a:latin typeface="Cambria Math" panose="02040503050406030204" pitchFamily="18" charset="0"/>
                                 </a:rPr>
                               </m:ctrlPr>
@@ -23846,7 +23698,7 @@
                           <m:sSub>
                             <m:sSubPr>
                               <m:ctrlPr>
-                                <a:rPr lang="ar-AE" i="1">
+                                <a:rPr lang="ar-AE">
                                   <a:latin typeface="Cambria Math" panose="02040503050406030204" pitchFamily="18" charset="0"/>
                                 </a:rPr>
                               </m:ctrlPr>
@@ -23901,14 +23753,7 @@
                               <a:latin typeface="Cambria Math" panose="02040503050406030204" pitchFamily="18" charset="0"/>
                               <a:ea typeface="Cambria Math" panose="02040503050406030204" pitchFamily="18" charset="0"/>
                             </a:rPr>
-                            <m:t>1</m:t>
-                          </m:r>
-                          <m:r>
-                            <a:rPr lang="ar-AE" sz="2400" b="0" i="1" smtClean="0">
-                              <a:latin typeface="Cambria Math" panose="02040503050406030204" pitchFamily="18" charset="0"/>
-                              <a:ea typeface="Cambria Math" panose="02040503050406030204" pitchFamily="18" charset="0"/>
-                            </a:rPr>
-                            <m:t>+</m:t>
+                            <m:t>1+</m:t>
                           </m:r>
                           <m:r>
                             <a:rPr lang="ar-AE" sz="2400" b="0" i="1" smtClean="0">
@@ -23927,9 +23772,8 @@
                           <m:d>
                             <m:dPr>
                               <m:ctrlPr>
-                                <a:rPr lang="ar-AE" sz="2400" b="0" i="1" smtClean="0">
+                                <a:rPr lang="ar-AE" i="1">
                                   <a:latin typeface="Cambria Math" panose="02040503050406030204" pitchFamily="18" charset="0"/>
-                                  <a:ea typeface="Cambria Math" panose="02040503050406030204" pitchFamily="18" charset="0"/>
                                 </a:rPr>
                               </m:ctrlPr>
                             </m:dPr>
@@ -23937,7 +23781,7 @@
                               <m:sSub>
                                 <m:sSubPr>
                                   <m:ctrlPr>
-                                    <a:rPr lang="ar-AE" i="1">
+                                    <a:rPr lang="ar-AE">
                                       <a:latin typeface="Cambria Math" panose="02040503050406030204" pitchFamily="18" charset="0"/>
                                     </a:rPr>
                                   </m:ctrlPr>
@@ -23971,6 +23815,7 @@
                                   <m:ctrlPr>
                                     <a:rPr lang="ar-AE" i="1">
                                       <a:latin typeface="Cambria Math" panose="02040503050406030204" pitchFamily="18" charset="0"/>
+                                      <a:ea typeface="Cambria Math" panose="02040503050406030204" pitchFamily="18" charset="0"/>
                                     </a:rPr>
                                   </m:ctrlPr>
                                 </m:accPr>
@@ -23987,7 +23832,7 @@
                               <m:sSub>
                                 <m:sSubPr>
                                   <m:ctrlPr>
-                                    <a:rPr lang="ar-AE" i="1">
+                                    <a:rPr lang="en-US" i="1">
                                       <a:latin typeface="Cambria Math" panose="02040503050406030204" pitchFamily="18" charset="0"/>
                                       <a:ea typeface="Cambria Math" panose="02040503050406030204" pitchFamily="18" charset="0"/>
                                     </a:rPr>
@@ -24344,7 +24189,7 @@
                     <m:oMathParaPr>
                       <m:jc m:val="center"/>
                     </m:oMathParaPr>
-                    <m:oMath xmlns:m="http://schemas.openxmlformats.org/officeDocument/2006/math">
+                    <m:oMath>
                       <m:r>
                         <a:rPr lang="en-US" sz="1600">
                           <a:latin typeface="Cambria Math" panose="02040503050406030204" pitchFamily="18" charset="0"/>
@@ -24365,7 +24210,7 @@
                           <m:sSub>
                             <m:sSubPr>
                               <m:ctrlPr>
-                                <a:rPr lang="ar-AE" sz="1600" i="1">
+                                <a:rPr lang="ar-AE" sz="1600">
                                   <a:latin typeface="Cambria Math" panose="02040503050406030204" pitchFamily="18" charset="0"/>
                                 </a:rPr>
                               </m:ctrlPr>
@@ -24396,7 +24241,7 @@
                           <m:sSub>
                             <m:sSubPr>
                               <m:ctrlPr>
-                                <a:rPr lang="ar-AE" sz="1600" i="1">
+                                <a:rPr lang="ar-AE" sz="1600">
                                   <a:latin typeface="Cambria Math" panose="02040503050406030204" pitchFamily="18" charset="0"/>
                                 </a:rPr>
                               </m:ctrlPr>
@@ -24451,14 +24296,7 @@
                               <a:latin typeface="Cambria Math" panose="02040503050406030204" pitchFamily="18" charset="0"/>
                               <a:ea typeface="Cambria Math" panose="02040503050406030204" pitchFamily="18" charset="0"/>
                             </a:rPr>
-                            <m:t>1</m:t>
-                          </m:r>
-                          <m:r>
-                            <a:rPr lang="ar-AE" sz="1600" i="1">
-                              <a:latin typeface="Cambria Math" panose="02040503050406030204" pitchFamily="18" charset="0"/>
-                              <a:ea typeface="Cambria Math" panose="02040503050406030204" pitchFamily="18" charset="0"/>
-                            </a:rPr>
-                            <m:t>+</m:t>
+                            <m:t>1+</m:t>
                           </m:r>
                           <m:r>
                             <a:rPr lang="ar-AE" sz="1600" i="1">
@@ -24479,7 +24317,6 @@
                               <m:ctrlPr>
                                 <a:rPr lang="ar-AE" sz="1600" i="1">
                                   <a:latin typeface="Cambria Math" panose="02040503050406030204" pitchFamily="18" charset="0"/>
-                                  <a:ea typeface="Cambria Math" panose="02040503050406030204" pitchFamily="18" charset="0"/>
                                 </a:rPr>
                               </m:ctrlPr>
                             </m:dPr>
@@ -24487,7 +24324,7 @@
                               <m:sSub>
                                 <m:sSubPr>
                                   <m:ctrlPr>
-                                    <a:rPr lang="ar-AE" sz="1600" i="1">
+                                    <a:rPr lang="ar-AE" sz="1600">
                                       <a:latin typeface="Cambria Math" panose="02040503050406030204" pitchFamily="18" charset="0"/>
                                     </a:rPr>
                                   </m:ctrlPr>
@@ -24521,6 +24358,7 @@
                                   <m:ctrlPr>
                                     <a:rPr lang="ar-AE" sz="1600" i="1">
                                       <a:latin typeface="Cambria Math" panose="02040503050406030204" pitchFamily="18" charset="0"/>
+                                      <a:ea typeface="Cambria Math" panose="02040503050406030204" pitchFamily="18" charset="0"/>
                                     </a:rPr>
                                   </m:ctrlPr>
                                 </m:accPr>
@@ -24537,7 +24375,7 @@
                               <m:sSub>
                                 <m:sSubPr>
                                   <m:ctrlPr>
-                                    <a:rPr lang="ar-AE" sz="1600" i="1">
+                                    <a:rPr lang="en-US" sz="1600" i="1">
                                       <a:latin typeface="Cambria Math" panose="02040503050406030204" pitchFamily="18" charset="0"/>
                                       <a:ea typeface="Cambria Math" panose="02040503050406030204" pitchFamily="18" charset="0"/>
                                     </a:rPr>
@@ -24867,10 +24705,7 @@
                 <a:pPr/>
                 <a14:m>
                   <m:oMathPara xmlns:m="http://schemas.openxmlformats.org/officeDocument/2006/math">
-                    <m:oMathParaPr>
-                      <m:jc m:val="centerGroup"/>
-                    </m:oMathParaPr>
-                    <m:oMath xmlns:m="http://schemas.openxmlformats.org/officeDocument/2006/math">
+                    <m:oMath>
                       <m:r>
                         <a:rPr lang="en-US" sz="1400" b="0" i="1" smtClean="0">
                           <a:latin typeface="Cambria Math" panose="02040503050406030204" pitchFamily="18" charset="0"/>
@@ -25363,7 +25198,7 @@
                     <m:oMathParaPr>
                       <m:jc m:val="center"/>
                     </m:oMathParaPr>
-                    <m:oMath xmlns:m="http://schemas.openxmlformats.org/officeDocument/2006/math">
+                    <m:oMath>
                       <m:r>
                         <a:rPr lang="en-US" sz="1800">
                           <a:latin typeface="Cambria Math" panose="02040503050406030204" pitchFamily="18" charset="0"/>
@@ -25384,7 +25219,7 @@
                           <m:sSub>
                             <m:sSubPr>
                               <m:ctrlPr>
-                                <a:rPr lang="ar-AE" sz="1800" i="1">
+                                <a:rPr lang="ar-AE" sz="1800">
                                   <a:latin typeface="Cambria Math" panose="02040503050406030204" pitchFamily="18" charset="0"/>
                                 </a:rPr>
                               </m:ctrlPr>
@@ -25415,7 +25250,7 @@
                           <m:sSub>
                             <m:sSubPr>
                               <m:ctrlPr>
-                                <a:rPr lang="ar-AE" sz="1800" i="1">
+                                <a:rPr lang="ar-AE" sz="1800">
                                   <a:latin typeface="Cambria Math" panose="02040503050406030204" pitchFamily="18" charset="0"/>
                                 </a:rPr>
                               </m:ctrlPr>
@@ -25470,14 +25305,7 @@
                               <a:latin typeface="Cambria Math" panose="02040503050406030204" pitchFamily="18" charset="0"/>
                               <a:ea typeface="Cambria Math" panose="02040503050406030204" pitchFamily="18" charset="0"/>
                             </a:rPr>
-                            <m:t>1</m:t>
-                          </m:r>
-                          <m:r>
-                            <a:rPr lang="ar-AE" sz="1800" i="1">
-                              <a:latin typeface="Cambria Math" panose="02040503050406030204" pitchFamily="18" charset="0"/>
-                              <a:ea typeface="Cambria Math" panose="02040503050406030204" pitchFamily="18" charset="0"/>
-                            </a:rPr>
-                            <m:t>+</m:t>
+                            <m:t>1+</m:t>
                           </m:r>
                           <m:r>
                             <a:rPr lang="ar-AE" sz="1800" i="1">
@@ -25498,7 +25326,6 @@
                               <m:ctrlPr>
                                 <a:rPr lang="ar-AE" sz="1800" i="1">
                                   <a:latin typeface="Cambria Math" panose="02040503050406030204" pitchFamily="18" charset="0"/>
-                                  <a:ea typeface="Cambria Math" panose="02040503050406030204" pitchFamily="18" charset="0"/>
                                 </a:rPr>
                               </m:ctrlPr>
                             </m:dPr>
@@ -25506,7 +25333,7 @@
                               <m:sSub>
                                 <m:sSubPr>
                                   <m:ctrlPr>
-                                    <a:rPr lang="ar-AE" sz="1800" i="1">
+                                    <a:rPr lang="ar-AE" sz="1800">
                                       <a:latin typeface="Cambria Math" panose="02040503050406030204" pitchFamily="18" charset="0"/>
                                     </a:rPr>
                                   </m:ctrlPr>
@@ -25540,6 +25367,7 @@
                                   <m:ctrlPr>
                                     <a:rPr lang="ar-AE" sz="1800" i="1">
                                       <a:latin typeface="Cambria Math" panose="02040503050406030204" pitchFamily="18" charset="0"/>
+                                      <a:ea typeface="Cambria Math" panose="02040503050406030204" pitchFamily="18" charset="0"/>
                                     </a:rPr>
                                   </m:ctrlPr>
                                 </m:accPr>
@@ -25556,7 +25384,7 @@
                               <m:sSub>
                                 <m:sSubPr>
                                   <m:ctrlPr>
-                                    <a:rPr lang="ar-AE" sz="1800" i="1">
+                                    <a:rPr lang="en-US" sz="1800" i="1">
                                       <a:latin typeface="Cambria Math" panose="02040503050406030204" pitchFamily="18" charset="0"/>
                                       <a:ea typeface="Cambria Math" panose="02040503050406030204" pitchFamily="18" charset="0"/>
                                     </a:rPr>
@@ -25645,7 +25473,7 @@
                         <m:begChr m:val="{"/>
                         <m:endChr m:val="}"/>
                         <m:ctrlPr>
-                          <a:rPr lang="en-US" sz="1800" i="1" smtClean="0">
+                          <a:rPr lang="en-US" sz="1800" b="0" i="1" smtClean="0">
                             <a:latin typeface="Cambria Math" panose="02040503050406030204" pitchFamily="18" charset="0"/>
                           </a:rPr>
                         </m:ctrlPr>
@@ -25655,19 +25483,7 @@
                           <a:rPr lang="en-US" sz="1800" b="0" i="1" smtClean="0">
                             <a:latin typeface="Cambria Math" panose="02040503050406030204" pitchFamily="18" charset="0"/>
                           </a:rPr>
-                          <m:t>0</m:t>
-                        </m:r>
-                        <m:r>
-                          <a:rPr lang="en-US" sz="1800" b="0" i="1" smtClean="0">
-                            <a:latin typeface="Cambria Math" panose="02040503050406030204" pitchFamily="18" charset="0"/>
-                          </a:rPr>
-                          <m:t>,</m:t>
-                        </m:r>
-                        <m:r>
-                          <a:rPr lang="en-US" sz="1800" b="0" i="1" smtClean="0">
-                            <a:latin typeface="Cambria Math" panose="02040503050406030204" pitchFamily="18" charset="0"/>
-                          </a:rPr>
-                          <m:t>1</m:t>
+                          <m:t>0,1</m:t>
                         </m:r>
                       </m:e>
                     </m:d>
@@ -25682,14 +25498,11 @@
                 <a:pPr lvl="0"/>
                 <a14:m>
                   <m:oMathPara xmlns:m="http://schemas.openxmlformats.org/officeDocument/2006/math">
-                    <m:oMathParaPr>
-                      <m:jc m:val="centerGroup"/>
-                    </m:oMathParaPr>
-                    <m:oMath xmlns:m="http://schemas.openxmlformats.org/officeDocument/2006/math">
+                    <m:oMath>
                       <m:sSub>
                         <m:sSubPr>
                           <m:ctrlPr>
-                            <a:rPr lang="ar-AE" sz="1800" i="1">
+                            <a:rPr lang="ar-AE" sz="1800">
                               <a:latin typeface="Cambria Math" panose="02040503050406030204" pitchFamily="18" charset="0"/>
                             </a:rPr>
                           </m:ctrlPr>
@@ -25723,7 +25536,7 @@
                           <m:begChr m:val="{"/>
                           <m:endChr m:val=""/>
                           <m:ctrlPr>
-                            <a:rPr lang="en-US" sz="1800" i="1" smtClean="0">
+                            <a:rPr lang="en-US" sz="1800" i="1">
                               <a:latin typeface="Cambria Math" panose="02040503050406030204" pitchFamily="18" charset="0"/>
                             </a:rPr>
                           </m:ctrlPr>
@@ -25794,7 +25607,7 @@
                                     <m:sSub>
                                       <m:sSubPr>
                                         <m:ctrlPr>
-                                          <a:rPr lang="ar-AE" sz="1800" i="1">
+                                          <a:rPr lang="ar-AE" sz="1800">
                                             <a:latin typeface="Cambria Math" panose="02040503050406030204" pitchFamily="18" charset="0"/>
                                           </a:rPr>
                                         </m:ctrlPr>
@@ -25825,7 +25638,7 @@
                                     <m:sSub>
                                       <m:sSubPr>
                                         <m:ctrlPr>
-                                          <a:rPr lang="ar-AE" sz="1800" i="1">
+                                          <a:rPr lang="ar-AE" sz="1800">
                                             <a:latin typeface="Cambria Math" panose="02040503050406030204" pitchFamily="18" charset="0"/>
                                           </a:rPr>
                                         </m:ctrlPr>
@@ -25859,31 +25672,7 @@
                                   <a:rPr lang="en-US" sz="1800" b="0" i="1" smtClean="0">
                                     <a:latin typeface="Cambria Math" panose="02040503050406030204" pitchFamily="18" charset="0"/>
                                   </a:rPr>
-                                  <m:t>𝑡</m:t>
-                                </m:r>
-                                <m:r>
-                                  <a:rPr lang="en-US" sz="1800" b="0" i="1" smtClean="0">
-                                    <a:latin typeface="Cambria Math" panose="02040503050406030204" pitchFamily="18" charset="0"/>
-                                  </a:rPr>
-                                  <m:t>h</m:t>
-                                </m:r>
-                                <m:r>
-                                  <a:rPr lang="en-US" sz="1800" b="0" i="1" smtClean="0">
-                                    <a:latin typeface="Cambria Math" panose="02040503050406030204" pitchFamily="18" charset="0"/>
-                                  </a:rPr>
-                                  <m:t>𝑟𝑒𝑠</m:t>
-                                </m:r>
-                                <m:r>
-                                  <a:rPr lang="en-US" sz="1800" b="0" i="1" smtClean="0">
-                                    <a:latin typeface="Cambria Math" panose="02040503050406030204" pitchFamily="18" charset="0"/>
-                                  </a:rPr>
-                                  <m:t>h</m:t>
-                                </m:r>
-                                <m:r>
-                                  <a:rPr lang="en-US" sz="1800" b="0" i="1" smtClean="0">
-                                    <a:latin typeface="Cambria Math" panose="02040503050406030204" pitchFamily="18" charset="0"/>
-                                  </a:rPr>
-                                  <m:t>𝑜𝑙𝑑</m:t>
+                                  <m:t>𝑡ℎ𝑟𝑒𝑠ℎ𝑜𝑙𝑑</m:t>
                                 </m:r>
                               </m:e>
                             </m:mr>
@@ -25933,7 +25722,7 @@
                                     <m:sSub>
                                       <m:sSubPr>
                                         <m:ctrlPr>
-                                          <a:rPr lang="ar-AE" sz="1800" i="1">
+                                          <a:rPr lang="ar-AE" sz="1800">
                                             <a:latin typeface="Cambria Math" panose="02040503050406030204" pitchFamily="18" charset="0"/>
                                           </a:rPr>
                                         </m:ctrlPr>
@@ -25964,7 +25753,7 @@
                                     <m:sSub>
                                       <m:sSubPr>
                                         <m:ctrlPr>
-                                          <a:rPr lang="ar-AE" sz="1800" i="1">
+                                          <a:rPr lang="ar-AE" sz="1800">
                                             <a:latin typeface="Cambria Math" panose="02040503050406030204" pitchFamily="18" charset="0"/>
                                           </a:rPr>
                                         </m:ctrlPr>
@@ -25998,31 +25787,7 @@
                                   <a:rPr lang="en-US" sz="1800" b="0" i="1" smtClean="0">
                                     <a:latin typeface="Cambria Math" panose="02040503050406030204" pitchFamily="18" charset="0"/>
                                   </a:rPr>
-                                  <m:t>𝑡</m:t>
-                                </m:r>
-                                <m:r>
-                                  <a:rPr lang="en-US" sz="1800" b="0" i="1" smtClean="0">
-                                    <a:latin typeface="Cambria Math" panose="02040503050406030204" pitchFamily="18" charset="0"/>
-                                  </a:rPr>
-                                  <m:t>h</m:t>
-                                </m:r>
-                                <m:r>
-                                  <a:rPr lang="en-US" sz="1800" b="0" i="1" smtClean="0">
-                                    <a:latin typeface="Cambria Math" panose="02040503050406030204" pitchFamily="18" charset="0"/>
-                                  </a:rPr>
-                                  <m:t>𝑟𝑒𝑠</m:t>
-                                </m:r>
-                                <m:r>
-                                  <a:rPr lang="en-US" sz="1800" b="0" i="1" smtClean="0">
-                                    <a:latin typeface="Cambria Math" panose="02040503050406030204" pitchFamily="18" charset="0"/>
-                                  </a:rPr>
-                                  <m:t>h</m:t>
-                                </m:r>
-                                <m:r>
-                                  <a:rPr lang="en-US" sz="1800" b="0" i="1" smtClean="0">
-                                    <a:latin typeface="Cambria Math" panose="02040503050406030204" pitchFamily="18" charset="0"/>
-                                  </a:rPr>
-                                  <m:t>𝑜𝑙𝑑</m:t>
+                                  <m:t>𝑡ℎ𝑟𝑒𝑠ℎ𝑜𝑙𝑑</m:t>
                                 </m:r>
                               </m:e>
                             </m:mr>
@@ -26161,10 +25926,7 @@
                 <a:pPr/>
                 <a14:m>
                   <m:oMathPara xmlns:m="http://schemas.openxmlformats.org/officeDocument/2006/math">
-                    <m:oMathParaPr>
-                      <m:jc m:val="centerGroup"/>
-                    </m:oMathParaPr>
-                    <m:oMath xmlns:m="http://schemas.openxmlformats.org/officeDocument/2006/math">
+                    <m:oMath>
                       <m:r>
                         <a:rPr lang="en-US" sz="1400" b="0" i="1" smtClean="0">
                           <a:latin typeface="Cambria Math" panose="02040503050406030204" pitchFamily="18" charset="0"/>
@@ -28432,30 +28194,13 @@
                 </a:pPr>
                 <a14:m>
                   <m:oMathPara xmlns:m="http://schemas.openxmlformats.org/officeDocument/2006/math">
-                    <m:oMathParaPr>
-                      <m:jc m:val="centerGroup"/>
-                    </m:oMathParaPr>
-                    <m:oMath xmlns:m="http://schemas.openxmlformats.org/officeDocument/2006/math">
+                    <m:oMath>
                       <m:r>
                         <a:rPr lang="en-US" b="0" i="1" smtClean="0">
                           <a:latin typeface="Cambria Math" panose="02040503050406030204" pitchFamily="18" charset="0"/>
                           <a:ea typeface="Cambria Math" panose="02040503050406030204" pitchFamily="18" charset="0"/>
                         </a:rPr>
-                        <m:t>h</m:t>
-                      </m:r>
-                      <m:r>
-                        <a:rPr lang="en-US" b="0" i="1" smtClean="0">
-                          <a:latin typeface="Cambria Math" panose="02040503050406030204" pitchFamily="18" charset="0"/>
-                          <a:ea typeface="Cambria Math" panose="02040503050406030204" pitchFamily="18" charset="0"/>
-                        </a:rPr>
-                        <m:t>𝑖𝑔</m:t>
-                      </m:r>
-                      <m:r>
-                        <a:rPr lang="en-US" b="0" i="1" smtClean="0">
-                          <a:latin typeface="Cambria Math" panose="02040503050406030204" pitchFamily="18" charset="0"/>
-                          <a:ea typeface="Cambria Math" panose="02040503050406030204" pitchFamily="18" charset="0"/>
-                        </a:rPr>
-                        <m:t>h</m:t>
+                        <m:t>ℎ𝑖𝑔ℎ</m:t>
                       </m:r>
                       <m:r>
                         <a:rPr lang="en-US" i="1">
@@ -28502,10 +28247,7 @@
                 </a:pPr>
                 <a14:m>
                   <m:oMathPara xmlns:m="http://schemas.openxmlformats.org/officeDocument/2006/math">
-                    <m:oMathParaPr>
-                      <m:jc m:val="centerGroup"/>
-                    </m:oMathParaPr>
-                    <m:oMath xmlns:m="http://schemas.openxmlformats.org/officeDocument/2006/math">
+                    <m:oMath>
                       <m:r>
                         <a:rPr lang="en-US" b="0" i="1" smtClean="0">
                           <a:latin typeface="Cambria Math" panose="02040503050406030204" pitchFamily="18" charset="0"/>
@@ -31680,7 +31422,7 @@
                     <m:sSup>
                       <m:sSupPr>
                         <m:ctrlPr>
-                          <a:rPr lang="ar-AE" i="1">
+                          <a:rPr lang="ar-AE">
                             <a:latin typeface="Cambria Math" panose="02040503050406030204" pitchFamily="18" charset="0"/>
                           </a:rPr>
                         </m:ctrlPr>
@@ -32153,7 +31895,7 @@
                     <m:d>
                       <m:dPr>
                         <m:ctrlPr>
-                          <a:rPr lang="ar-AE" i="1">
+                          <a:rPr lang="ar-AE">
                             <a:latin typeface="Cambria Math" panose="02040503050406030204" pitchFamily="18" charset="0"/>
                           </a:rPr>
                         </m:ctrlPr>
@@ -32215,7 +31957,7 @@
                         <m:sSub>
                           <m:sSubPr>
                             <m:ctrlPr>
-                              <a:rPr lang="ar-AE" i="1">
+                              <a:rPr lang="ar-AE">
                                 <a:latin typeface="Cambria Math" panose="02040503050406030204" pitchFamily="18" charset="0"/>
                               </a:rPr>
                             </m:ctrlPr>
@@ -32254,7 +31996,7 @@
                     <m:sSub>
                       <m:sSubPr>
                         <m:ctrlPr>
-                          <a:rPr lang="ar-AE" i="1">
+                          <a:rPr lang="ar-AE">
                             <a:latin typeface="Cambria Math" panose="02040503050406030204" pitchFamily="18" charset="0"/>
                           </a:rPr>
                         </m:ctrlPr>
@@ -32306,7 +32048,7 @@
                         <m:sSub>
                           <m:sSubPr>
                             <m:ctrlPr>
-                              <a:rPr lang="ar-AE" i="1">
+                              <a:rPr lang="ar-AE">
                                 <a:latin typeface="Cambria Math" panose="02040503050406030204" pitchFamily="18" charset="0"/>
                               </a:rPr>
                             </m:ctrlPr>
@@ -32374,7 +32116,7 @@
                     <m:d>
                       <m:dPr>
                         <m:ctrlPr>
-                          <a:rPr lang="ar-AE" i="1">
+                          <a:rPr lang="ar-AE">
                             <a:latin typeface="Cambria Math" panose="02040503050406030204" pitchFamily="18" charset="0"/>
                           </a:rPr>
                         </m:ctrlPr>
@@ -32389,7 +32131,7 @@
                         <m:d>
                           <m:dPr>
                             <m:ctrlPr>
-                              <a:rPr lang="ar-AE" i="1">
+                              <a:rPr lang="ar-AE">
                                 <a:latin typeface="Cambria Math" panose="02040503050406030204" pitchFamily="18" charset="0"/>
                               </a:rPr>
                             </m:ctrlPr>
@@ -32874,15 +32616,13 @@
                 </a:pPr>
                 <a14:m>
                   <m:oMathPara xmlns:m="http://schemas.openxmlformats.org/officeDocument/2006/math">
-                    <m:oMathParaPr>
-                      <m:jc m:val="centerGroup"/>
-                    </m:oMathParaPr>
-                    <m:oMath xmlns:m="http://schemas.openxmlformats.org/officeDocument/2006/math">
+                    <m:oMath>
                       <m:sSub>
                         <m:sSubPr>
                           <m:ctrlPr>
                             <a:rPr lang="ar-AE" i="1" smtClean="0">
                               <a:latin typeface="Cambria Math" panose="02040503050406030204" pitchFamily="18" charset="0"/>
+                              <a:ea typeface="Cambria Math" panose="02040503050406030204" pitchFamily="18" charset="0"/>
                             </a:rPr>
                           </m:ctrlPr>
                         </m:sSubPr>
@@ -32914,19 +32654,7 @@
                         <a:rPr lang="en-US" b="0" i="1" smtClean="0">
                           <a:latin typeface="Cambria Math" panose="02040503050406030204" pitchFamily="18" charset="0"/>
                         </a:rPr>
-                        <m:t>=</m:t>
-                      </m:r>
-                      <m:r>
-                        <a:rPr lang="en-US" b="0" i="1" smtClean="0">
-                          <a:latin typeface="Cambria Math" panose="02040503050406030204" pitchFamily="18" charset="0"/>
-                        </a:rPr>
-                        <m:t>2</m:t>
-                      </m:r>
-                      <m:r>
-                        <a:rPr lang="en-US" b="0" i="1" smtClean="0">
-                          <a:latin typeface="Cambria Math" panose="02040503050406030204" pitchFamily="18" charset="0"/>
-                        </a:rPr>
-                        <m:t> </m:t>
+                        <m:t>=2 </m:t>
                       </m:r>
                       <m:r>
                         <a:rPr lang="en-US" b="0" i="1" smtClean="0">
@@ -32946,7 +32674,7 @@
                           <m:f>
                             <m:fPr>
                               <m:ctrlPr>
-                                <a:rPr lang="en-US" b="0" i="1" smtClean="0">
+                                <a:rPr lang="ar-AE">
                                   <a:latin typeface="Cambria Math" panose="02040503050406030204" pitchFamily="18" charset="0"/>
                                 </a:rPr>
                               </m:ctrlPr>
@@ -32961,7 +32689,7 @@
                               <m:d>
                                 <m:dPr>
                                   <m:ctrlPr>
-                                    <a:rPr lang="ar-AE" i="1">
+                                    <a:rPr lang="ar-AE">
                                       <a:latin typeface="Cambria Math" panose="02040503050406030204" pitchFamily="18" charset="0"/>
                                     </a:rPr>
                                   </m:ctrlPr>
@@ -32982,7 +32710,7 @@
                                   <m:sSub>
                                     <m:sSubPr>
                                       <m:ctrlPr>
-                                        <a:rPr lang="ar-AE" i="1">
+                                        <a:rPr lang="ar-AE">
                                           <a:latin typeface="Cambria Math" panose="02040503050406030204" pitchFamily="18" charset="0"/>
                                         </a:rPr>
                                       </m:ctrlPr>
@@ -33017,7 +32745,7 @@
                               <m:d>
                                 <m:dPr>
                                   <m:ctrlPr>
-                                    <a:rPr lang="ar-AE" i="1">
+                                    <a:rPr lang="ar-AE">
                                       <a:latin typeface="Cambria Math" panose="02040503050406030204" pitchFamily="18" charset="0"/>
                                     </a:rPr>
                                   </m:ctrlPr>
@@ -33033,18 +32761,12 @@
                                     <a:rPr lang="ar-AE">
                                       <a:latin typeface="Cambria Math" panose="02040503050406030204" pitchFamily="18" charset="0"/>
                                     </a:rPr>
-                                    <m:t>,</m:t>
-                                  </m:r>
-                                  <m:r>
-                                    <a:rPr lang="ar-AE" i="1">
-                                      <a:latin typeface="Cambria Math" panose="02040503050406030204" pitchFamily="18" charset="0"/>
-                                    </a:rPr>
-                                    <m:t> </m:t>
+                                    <m:t>, </m:t>
                                   </m:r>
                                   <m:sSub>
                                     <m:sSubPr>
                                       <m:ctrlPr>
-                                        <a:rPr lang="ar-AE" i="1">
+                                        <a:rPr lang="ar-AE">
                                           <a:latin typeface="Cambria Math" panose="02040503050406030204" pitchFamily="18" charset="0"/>
                                         </a:rPr>
                                       </m:ctrlPr>
@@ -33092,6 +32814,7 @@
                         <m:ctrlPr>
                           <a:rPr lang="ar-AE" i="1" smtClean="0">
                             <a:latin typeface="Cambria Math" panose="02040503050406030204" pitchFamily="18" charset="0"/>
+                            <a:ea typeface="Cambria Math" panose="02040503050406030204" pitchFamily="18" charset="0"/>
                           </a:rPr>
                         </m:ctrlPr>
                       </m:sSubPr>
@@ -33132,6 +32855,7 @@
                         <m:ctrlPr>
                           <a:rPr lang="en-US" i="1" smtClean="0">
                             <a:latin typeface="Cambria Math" panose="02040503050406030204" pitchFamily="18" charset="0"/>
+                            <a:ea typeface="Cambria Math" panose="02040503050406030204" pitchFamily="18" charset="0"/>
                           </a:rPr>
                         </m:ctrlPr>
                       </m:sSupPr>
@@ -33181,7 +32905,7 @@
                     <m:oMathParaPr>
                       <m:jc m:val="center"/>
                     </m:oMathParaPr>
-                    <m:oMath xmlns:m="http://schemas.openxmlformats.org/officeDocument/2006/math">
+                    <m:oMath>
                       <m:r>
                         <a:rPr lang="ar-AE">
                           <a:latin typeface="Cambria Math" panose="02040503050406030204" pitchFamily="18" charset="0"/>
@@ -33191,7 +32915,7 @@
                       <m:d>
                         <m:dPr>
                           <m:ctrlPr>
-                            <a:rPr lang="ar-AE" i="1">
+                            <a:rPr lang="ar-AE">
                               <a:latin typeface="Cambria Math" panose="02040503050406030204" pitchFamily="18" charset="0"/>
                             </a:rPr>
                           </m:ctrlPr>
@@ -33206,7 +32930,7 @@
                           <m:d>
                             <m:dPr>
                               <m:ctrlPr>
-                                <a:rPr lang="ar-AE" i="1">
+                                <a:rPr lang="ar-AE">
                                   <a:latin typeface="Cambria Math" panose="02040503050406030204" pitchFamily="18" charset="0"/>
                                 </a:rPr>
                               </m:ctrlPr>
@@ -33238,18 +32962,12 @@
                         <a:rPr lang="ar-AE">
                           <a:latin typeface="Cambria Math" panose="02040503050406030204" pitchFamily="18" charset="0"/>
                         </a:rPr>
-                        <m:t>=</m:t>
-                      </m:r>
-                      <m:r>
-                        <a:rPr lang="ar-AE">
-                          <a:latin typeface="Cambria Math" panose="02040503050406030204" pitchFamily="18" charset="0"/>
-                        </a:rPr>
-                        <m:t>2</m:t>
+                        <m:t>=2</m:t>
                       </m:r>
                       <m:d>
                         <m:dPr>
                           <m:ctrlPr>
-                            <a:rPr lang="ar-AE" i="1">
+                            <a:rPr lang="ar-AE">
                               <a:latin typeface="Cambria Math" panose="02040503050406030204" pitchFamily="18" charset="0"/>
                             </a:rPr>
                           </m:ctrlPr>
@@ -33264,7 +32982,7 @@
                           <m:d>
                             <m:dPr>
                               <m:ctrlPr>
-                                <a:rPr lang="ar-AE" i="1">
+                                <a:rPr lang="ar-AE">
                                   <a:latin typeface="Cambria Math" panose="02040503050406030204" pitchFamily="18" charset="0"/>
                                 </a:rPr>
                               </m:ctrlPr>
@@ -33279,7 +32997,7 @@
                               <m:d>
                                 <m:dPr>
                                   <m:ctrlPr>
-                                    <a:rPr lang="ar-AE" i="1">
+                                    <a:rPr lang="ar-AE">
                                       <a:latin typeface="Cambria Math" panose="02040503050406030204" pitchFamily="18" charset="0"/>
                                     </a:rPr>
                                   </m:ctrlPr>
@@ -33300,7 +33018,7 @@
                                   <m:sSub>
                                     <m:sSubPr>
                                       <m:ctrlPr>
-                                        <a:rPr lang="ar-AE" i="1">
+                                        <a:rPr lang="ar-AE">
                                           <a:latin typeface="Cambria Math" panose="02040503050406030204" pitchFamily="18" charset="0"/>
                                         </a:rPr>
                                       </m:ctrlPr>
@@ -33341,7 +33059,7 @@
                           <m:d>
                             <m:dPr>
                               <m:ctrlPr>
-                                <a:rPr lang="ar-AE" i="1">
+                                <a:rPr lang="ar-AE">
                                   <a:latin typeface="Cambria Math" panose="02040503050406030204" pitchFamily="18" charset="0"/>
                                 </a:rPr>
                               </m:ctrlPr>
@@ -33356,7 +33074,7 @@
                               <m:d>
                                 <m:dPr>
                                   <m:ctrlPr>
-                                    <a:rPr lang="ar-AE" i="1">
+                                    <a:rPr lang="ar-AE">
                                       <a:latin typeface="Cambria Math" panose="02040503050406030204" pitchFamily="18" charset="0"/>
                                     </a:rPr>
                                   </m:ctrlPr>
@@ -33377,7 +33095,7 @@
                                   <m:sSub>
                                     <m:sSubPr>
                                       <m:ctrlPr>
-                                        <a:rPr lang="ar-AE" i="1">
+                                        <a:rPr lang="ar-AE">
                                           <a:latin typeface="Cambria Math" panose="02040503050406030204" pitchFamily="18" charset="0"/>
                                         </a:rPr>
                                       </m:ctrlPr>
@@ -33829,13 +33547,7 @@
                       <a:rPr lang="en-US" b="0" i="1" smtClean="0">
                         <a:latin typeface="Cambria Math" panose="02040503050406030204" pitchFamily="18" charset="0"/>
                       </a:rPr>
-                      <m:t>−</m:t>
-                    </m:r>
-                    <m:r>
-                      <a:rPr lang="en-US" b="0" i="1" smtClean="0">
-                        <a:latin typeface="Cambria Math" panose="02040503050406030204" pitchFamily="18" charset="0"/>
-                      </a:rPr>
-                      <m:t>2</m:t>
+                      <m:t>−2</m:t>
                     </m:r>
                     <m:r>
                       <a:rPr lang="en-US" b="0" i="1" smtClean="0">
@@ -33857,6 +33569,7 @@
                         <m:ctrlPr>
                           <a:rPr lang="en-US" i="1" smtClean="0">
                             <a:latin typeface="Cambria Math" panose="02040503050406030204" pitchFamily="18" charset="0"/>
+                            <a:ea typeface="Cambria Math" panose="02040503050406030204" pitchFamily="18" charset="0"/>
                           </a:rPr>
                         </m:ctrlPr>
                       </m:sSupPr>
@@ -33917,7 +33630,7 @@
                         <m:begChr m:val="["/>
                         <m:endChr m:val="]"/>
                         <m:ctrlPr>
-                          <a:rPr lang="ar-AE" i="1">
+                          <a:rPr lang="ar-AE">
                             <a:latin typeface="Cambria Math" panose="02040503050406030204" pitchFamily="18" charset="0"/>
                           </a:rPr>
                         </m:ctrlPr>
@@ -33927,19 +33640,7 @@
                           <a:rPr lang="ar-AE">
                             <a:latin typeface="Cambria Math" panose="02040503050406030204" pitchFamily="18" charset="0"/>
                           </a:rPr>
-                          <m:t>0</m:t>
-                        </m:r>
-                        <m:r>
-                          <a:rPr lang="ar-AE">
-                            <a:latin typeface="Cambria Math" panose="02040503050406030204" pitchFamily="18" charset="0"/>
-                          </a:rPr>
-                          <m:t>,</m:t>
-                        </m:r>
-                        <m:r>
-                          <a:rPr lang="ar-AE">
-                            <a:latin typeface="Cambria Math" panose="02040503050406030204" pitchFamily="18" charset="0"/>
-                          </a:rPr>
-                          <m:t>1</m:t>
+                          <m:t>0,1</m:t>
                         </m:r>
                       </m:e>
                     </m:d>
@@ -34452,7 +34153,7 @@
                     <m:sSup>
                       <m:sSupPr>
                         <m:ctrlPr>
-                          <a:rPr i="1">
+                          <a:rPr>
                             <a:latin typeface="Cambria Math" panose="02040503050406030204" pitchFamily="18" charset="0"/>
                           </a:rPr>
                         </m:ctrlPr>
@@ -34515,7 +34216,7 @@
                     <m:sSup>
                       <m:sSupPr>
                         <m:ctrlPr>
-                          <a:rPr i="1">
+                          <a:rPr>
                             <a:latin typeface="Cambria Math" panose="02040503050406030204" pitchFamily="18" charset="0"/>
                           </a:rPr>
                         </m:ctrlPr>
@@ -34568,7 +34269,7 @@
                     <m:sSup>
                       <m:sSupPr>
                         <m:ctrlPr>
-                          <a:rPr i="1">
+                          <a:rPr>
                             <a:latin typeface="Cambria Math" panose="02040503050406030204" pitchFamily="18" charset="0"/>
                           </a:rPr>
                         </m:ctrlPr>
@@ -34984,7 +34685,7 @@
                     <m:d>
                       <m:dPr>
                         <m:ctrlPr>
-                          <a:rPr lang="ar-AE" i="1">
+                          <a:rPr lang="ar-AE">
                             <a:latin typeface="Cambria Math" panose="02040503050406030204" pitchFamily="18" charset="0"/>
                           </a:rPr>
                         </m:ctrlPr>
@@ -35005,7 +34706,7 @@
                         <m:sSub>
                           <m:sSubPr>
                             <m:ctrlPr>
-                              <a:rPr lang="ar-AE" i="1">
+                              <a:rPr lang="ar-AE">
                                 <a:latin typeface="Cambria Math" panose="02040503050406030204" pitchFamily="18" charset="0"/>
                               </a:rPr>
                             </m:ctrlPr>
@@ -35049,11 +34750,11 @@
                     <m:oMathParaPr>
                       <m:jc m:val="center"/>
                     </m:oMathParaPr>
-                    <m:oMath xmlns:m="http://schemas.openxmlformats.org/officeDocument/2006/math">
+                    <m:oMath>
                       <m:sSub>
                         <m:sSubPr>
                           <m:ctrlPr>
-                            <a:rPr lang="ar-AE" i="1">
+                            <a:rPr lang="ar-AE">
                               <a:latin typeface="Cambria Math" panose="02040503050406030204" pitchFamily="18" charset="0"/>
                             </a:rPr>
                           </m:ctrlPr>
@@ -35078,7 +34779,7 @@
                       <m:d>
                         <m:dPr>
                           <m:ctrlPr>
-                            <a:rPr lang="ar-AE" i="1">
+                            <a:rPr lang="ar-AE">
                               <a:latin typeface="Cambria Math" panose="02040503050406030204" pitchFamily="18" charset="0"/>
                             </a:rPr>
                           </m:ctrlPr>
@@ -35093,7 +34794,7 @@
                           <m:d>
                             <m:dPr>
                               <m:ctrlPr>
-                                <a:rPr lang="ar-AE" i="1">
+                                <a:rPr lang="ar-AE">
                                   <a:latin typeface="Cambria Math" panose="02040503050406030204" pitchFamily="18" charset="0"/>
                                 </a:rPr>
                               </m:ctrlPr>
@@ -35142,7 +34843,7 @@
                       <m:d>
                         <m:dPr>
                           <m:ctrlPr>
-                            <a:rPr lang="ar-AE" i="1">
+                            <a:rPr lang="ar-AE">
                               <a:latin typeface="Cambria Math" panose="02040503050406030204" pitchFamily="18" charset="0"/>
                             </a:rPr>
                           </m:ctrlPr>
@@ -35157,7 +34858,7 @@
                           <m:d>
                             <m:dPr>
                               <m:ctrlPr>
-                                <a:rPr lang="ar-AE" i="1">
+                                <a:rPr lang="ar-AE">
                                   <a:latin typeface="Cambria Math" panose="02040503050406030204" pitchFamily="18" charset="0"/>
                                 </a:rPr>
                               </m:ctrlPr>
@@ -35172,7 +34873,7 @@
                               <m:d>
                                 <m:dPr>
                                   <m:ctrlPr>
-                                    <a:rPr lang="ar-AE" i="1">
+                                    <a:rPr lang="ar-AE">
                                       <a:latin typeface="Cambria Math" panose="02040503050406030204" pitchFamily="18" charset="0"/>
                                     </a:rPr>
                                   </m:ctrlPr>
@@ -35215,7 +34916,7 @@
                           <m:d>
                             <m:dPr>
                               <m:ctrlPr>
-                                <a:rPr lang="ar-AE" i="1">
+                                <a:rPr lang="ar-AE">
                                   <a:latin typeface="Cambria Math" panose="02040503050406030204" pitchFamily="18" charset="0"/>
                                 </a:rPr>
                               </m:ctrlPr>
@@ -35230,7 +34931,7 @@
                               <m:d>
                                 <m:dPr>
                                   <m:ctrlPr>
-                                    <a:rPr lang="ar-AE" i="1">
+                                    <a:rPr lang="ar-AE">
                                       <a:latin typeface="Cambria Math" panose="02040503050406030204" pitchFamily="18" charset="0"/>
                                     </a:rPr>
                                   </m:ctrlPr>
@@ -35251,7 +34952,7 @@
                                   <m:sSub>
                                     <m:sSubPr>
                                       <m:ctrlPr>
-                                        <a:rPr lang="ar-AE" i="1">
+                                        <a:rPr lang="ar-AE">
                                           <a:latin typeface="Cambria Math" panose="02040503050406030204" pitchFamily="18" charset="0"/>
                                         </a:rPr>
                                       </m:ctrlPr>
@@ -35325,13 +35026,7 @@
                       <a:rPr lang="en-US">
                         <a:latin typeface="Cambria Math" panose="02040503050406030204" pitchFamily="18" charset="0"/>
                       </a:rPr>
-                      <m:t>2</m:t>
-                    </m:r>
-                    <m:r>
-                      <a:rPr lang="en-US">
-                        <a:latin typeface="Cambria Math" panose="02040503050406030204" pitchFamily="18" charset="0"/>
-                      </a:rPr>
-                      <m:t> </m:t>
+                      <m:t>2 </m:t>
                     </m:r>
                     <m:r>
                       <a:rPr lang="en-US">
@@ -35342,7 +35037,7 @@
                     <m:d>
                       <m:dPr>
                         <m:ctrlPr>
-                          <a:rPr lang="ar-AE" i="1">
+                          <a:rPr lang="ar-AE">
                             <a:latin typeface="Cambria Math" panose="02040503050406030204" pitchFamily="18" charset="0"/>
                           </a:rPr>
                         </m:ctrlPr>
@@ -35357,7 +35052,7 @@
                         <m:d>
                           <m:dPr>
                             <m:ctrlPr>
-                              <a:rPr lang="ar-AE" i="1">
+                              <a:rPr lang="ar-AE">
                                 <a:latin typeface="Cambria Math" panose="02040503050406030204" pitchFamily="18" charset="0"/>
                               </a:rPr>
                             </m:ctrlPr>
@@ -36365,7 +36060,7 @@
                     <m:sSub>
                       <m:sSubPr>
                         <m:ctrlPr>
-                          <a:rPr i="1">
+                          <a:rPr>
                             <a:latin typeface="Cambria Math" panose="02040503050406030204" pitchFamily="18" charset="0"/>
                           </a:rPr>
                         </m:ctrlPr>
@@ -36398,7 +36093,7 @@
                     <m:sSub>
                       <m:sSubPr>
                         <m:ctrlPr>
-                          <a:rPr i="1">
+                          <a:rPr>
                             <a:latin typeface="Cambria Math" panose="02040503050406030204" pitchFamily="18" charset="0"/>
                           </a:rPr>
                         </m:ctrlPr>
@@ -36436,7 +36131,7 @@
                     <m:oMathParaPr>
                       <m:jc m:val="center"/>
                     </m:oMathParaPr>
-                    <m:oMath xmlns:m="http://schemas.openxmlformats.org/officeDocument/2006/math">
+                    <m:oMath>
                       <m:d>
                         <m:dPr>
                           <m:begChr m:val="["/>
@@ -36469,7 +36164,7 @@
                                 <m:sSub>
                                   <m:sSubPr>
                                     <m:ctrlPr>
-                                      <a:rPr i="1">
+                                      <a:rPr>
                                         <a:latin typeface="Cambria Math" panose="02040503050406030204" pitchFamily="18" charset="0"/>
                                       </a:rPr>
                                     </m:ctrlPr>
@@ -36498,7 +36193,7 @@
                                 <m:sSub>
                                   <m:sSubPr>
                                     <m:ctrlPr>
-                                      <a:rPr i="1">
+                                      <a:rPr>
                                         <a:latin typeface="Cambria Math" panose="02040503050406030204" pitchFamily="18" charset="0"/>
                                       </a:rPr>
                                     </m:ctrlPr>
@@ -36527,7 +36222,7 @@
                                 <m:sSub>
                                   <m:sSubPr>
                                     <m:ctrlPr>
-                                      <a:rPr i="1">
+                                      <a:rPr>
                                         <a:latin typeface="Cambria Math" panose="02040503050406030204" pitchFamily="18" charset="0"/>
                                       </a:rPr>
                                     </m:ctrlPr>
@@ -36566,7 +36261,7 @@
                                 <m:sSub>
                                   <m:sSubPr>
                                     <m:ctrlPr>
-                                      <a:rPr i="1">
+                                      <a:rPr>
                                         <a:latin typeface="Cambria Math" panose="02040503050406030204" pitchFamily="18" charset="0"/>
                                       </a:rPr>
                                     </m:ctrlPr>
@@ -36632,43 +36327,7 @@
                                   <a:rPr>
                                     <a:latin typeface="Cambria Math" panose="02040503050406030204" pitchFamily="18" charset="0"/>
                                   </a:rPr>
-                                  <m:t>1</m:t>
-                                </m:r>
-                                <m:r>
-                                  <a:rPr>
-                                    <a:latin typeface="Cambria Math" panose="02040503050406030204" pitchFamily="18" charset="0"/>
-                                  </a:rPr>
-                                  <m:t>,</m:t>
-                                </m:r>
-                                <m:r>
-                                  <a:rPr>
-                                    <a:latin typeface="Cambria Math" panose="02040503050406030204" pitchFamily="18" charset="0"/>
-                                  </a:rPr>
-                                  <m:t>0</m:t>
-                                </m:r>
-                                <m:r>
-                                  <a:rPr>
-                                    <a:latin typeface="Cambria Math" panose="02040503050406030204" pitchFamily="18" charset="0"/>
-                                  </a:rPr>
-                                  <m:t>,</m:t>
-                                </m:r>
-                                <m:r>
-                                  <a:rPr>
-                                    <a:latin typeface="Cambria Math" panose="02040503050406030204" pitchFamily="18" charset="0"/>
-                                  </a:rPr>
-                                  <m:t>0</m:t>
-                                </m:r>
-                                <m:r>
-                                  <a:rPr>
-                                    <a:latin typeface="Cambria Math" panose="02040503050406030204" pitchFamily="18" charset="0"/>
-                                  </a:rPr>
-                                  <m:t>,…,</m:t>
-                                </m:r>
-                                <m:r>
-                                  <a:rPr>
-                                    <a:latin typeface="Cambria Math" panose="02040503050406030204" pitchFamily="18" charset="0"/>
-                                  </a:rPr>
-                                  <m:t>0</m:t>
+                                  <m:t>1,0,0,…,0</m:t>
                                 </m:r>
                               </m:e>
                             </m:mr>
@@ -36678,43 +36337,7 @@
                                   <a:rPr>
                                     <a:latin typeface="Cambria Math" panose="02040503050406030204" pitchFamily="18" charset="0"/>
                                   </a:rPr>
-                                  <m:t>0</m:t>
-                                </m:r>
-                                <m:r>
-                                  <a:rPr>
-                                    <a:latin typeface="Cambria Math" panose="02040503050406030204" pitchFamily="18" charset="0"/>
-                                  </a:rPr>
-                                  <m:t>,</m:t>
-                                </m:r>
-                                <m:r>
-                                  <a:rPr>
-                                    <a:latin typeface="Cambria Math" panose="02040503050406030204" pitchFamily="18" charset="0"/>
-                                  </a:rPr>
-                                  <m:t>1</m:t>
-                                </m:r>
-                                <m:r>
-                                  <a:rPr>
-                                    <a:latin typeface="Cambria Math" panose="02040503050406030204" pitchFamily="18" charset="0"/>
-                                  </a:rPr>
-                                  <m:t>,</m:t>
-                                </m:r>
-                                <m:r>
-                                  <a:rPr>
-                                    <a:latin typeface="Cambria Math" panose="02040503050406030204" pitchFamily="18" charset="0"/>
-                                  </a:rPr>
-                                  <m:t>0</m:t>
-                                </m:r>
-                                <m:r>
-                                  <a:rPr>
-                                    <a:latin typeface="Cambria Math" panose="02040503050406030204" pitchFamily="18" charset="0"/>
-                                  </a:rPr>
-                                  <m:t>,…,</m:t>
-                                </m:r>
-                                <m:r>
-                                  <a:rPr>
-                                    <a:latin typeface="Cambria Math" panose="02040503050406030204" pitchFamily="18" charset="0"/>
-                                  </a:rPr>
-                                  <m:t>0</m:t>
+                                  <m:t>0,1,0,…,0</m:t>
                                 </m:r>
                               </m:e>
                             </m:mr>
@@ -36724,43 +36347,7 @@
                                   <a:rPr>
                                     <a:latin typeface="Cambria Math" panose="02040503050406030204" pitchFamily="18" charset="0"/>
                                   </a:rPr>
-                                  <m:t>0</m:t>
-                                </m:r>
-                                <m:r>
-                                  <a:rPr>
-                                    <a:latin typeface="Cambria Math" panose="02040503050406030204" pitchFamily="18" charset="0"/>
-                                  </a:rPr>
-                                  <m:t>,</m:t>
-                                </m:r>
-                                <m:r>
-                                  <a:rPr>
-                                    <a:latin typeface="Cambria Math" panose="02040503050406030204" pitchFamily="18" charset="0"/>
-                                  </a:rPr>
-                                  <m:t>0</m:t>
-                                </m:r>
-                                <m:r>
-                                  <a:rPr>
-                                    <a:latin typeface="Cambria Math" panose="02040503050406030204" pitchFamily="18" charset="0"/>
-                                  </a:rPr>
-                                  <m:t>,</m:t>
-                                </m:r>
-                                <m:r>
-                                  <a:rPr>
-                                    <a:latin typeface="Cambria Math" panose="02040503050406030204" pitchFamily="18" charset="0"/>
-                                  </a:rPr>
-                                  <m:t>1</m:t>
-                                </m:r>
-                                <m:r>
-                                  <a:rPr>
-                                    <a:latin typeface="Cambria Math" panose="02040503050406030204" pitchFamily="18" charset="0"/>
-                                  </a:rPr>
-                                  <m:t>,…,</m:t>
-                                </m:r>
-                                <m:r>
-                                  <a:rPr>
-                                    <a:latin typeface="Cambria Math" panose="02040503050406030204" pitchFamily="18" charset="0"/>
-                                  </a:rPr>
-                                  <m:t>0</m:t>
+                                  <m:t>0,0,1,…,0</m:t>
                                 </m:r>
                               </m:e>
                             </m:mr>
@@ -36780,43 +36367,7 @@
                                   <a:rPr>
                                     <a:latin typeface="Cambria Math" panose="02040503050406030204" pitchFamily="18" charset="0"/>
                                   </a:rPr>
-                                  <m:t>0</m:t>
-                                </m:r>
-                                <m:r>
-                                  <a:rPr>
-                                    <a:latin typeface="Cambria Math" panose="02040503050406030204" pitchFamily="18" charset="0"/>
-                                  </a:rPr>
-                                  <m:t>,</m:t>
-                                </m:r>
-                                <m:r>
-                                  <a:rPr>
-                                    <a:latin typeface="Cambria Math" panose="02040503050406030204" pitchFamily="18" charset="0"/>
-                                  </a:rPr>
-                                  <m:t>0</m:t>
-                                </m:r>
-                                <m:r>
-                                  <a:rPr>
-                                    <a:latin typeface="Cambria Math" panose="02040503050406030204" pitchFamily="18" charset="0"/>
-                                  </a:rPr>
-                                  <m:t>,</m:t>
-                                </m:r>
-                                <m:r>
-                                  <a:rPr>
-                                    <a:latin typeface="Cambria Math" panose="02040503050406030204" pitchFamily="18" charset="0"/>
-                                  </a:rPr>
-                                  <m:t>0</m:t>
-                                </m:r>
-                                <m:r>
-                                  <a:rPr>
-                                    <a:latin typeface="Cambria Math" panose="02040503050406030204" pitchFamily="18" charset="0"/>
-                                  </a:rPr>
-                                  <m:t>,…,</m:t>
-                                </m:r>
-                                <m:r>
-                                  <a:rPr>
-                                    <a:latin typeface="Cambria Math" panose="02040503050406030204" pitchFamily="18" charset="0"/>
-                                  </a:rPr>
-                                  <m:t>1</m:t>
+                                  <m:t>0,0,0,…,1</m:t>
                                 </m:r>
                               </m:e>
                             </m:mr>
@@ -36855,7 +36406,7 @@
                                 <m:sSub>
                                   <m:sSubPr>
                                     <m:ctrlPr>
-                                      <a:rPr i="1">
+                                      <a:rPr>
                                         <a:latin typeface="Cambria Math" panose="02040503050406030204" pitchFamily="18" charset="0"/>
                                       </a:rPr>
                                     </m:ctrlPr>
@@ -36884,7 +36435,7 @@
                                 <m:sSub>
                                   <m:sSubPr>
                                     <m:ctrlPr>
-                                      <a:rPr i="1">
+                                      <a:rPr>
                                         <a:latin typeface="Cambria Math" panose="02040503050406030204" pitchFamily="18" charset="0"/>
                                       </a:rPr>
                                     </m:ctrlPr>
@@ -36913,7 +36464,7 @@
                                 <m:sSub>
                                   <m:sSubPr>
                                     <m:ctrlPr>
-                                      <a:rPr i="1">
+                                      <a:rPr>
                                         <a:latin typeface="Cambria Math" panose="02040503050406030204" pitchFamily="18" charset="0"/>
                                       </a:rPr>
                                     </m:ctrlPr>
@@ -36952,7 +36503,7 @@
                                 <m:sSub>
                                   <m:sSubPr>
                                     <m:ctrlPr>
-                                      <a:rPr i="1">
+                                      <a:rPr>
                                         <a:latin typeface="Cambria Math" panose="02040503050406030204" pitchFamily="18" charset="0"/>
                                       </a:rPr>
                                     </m:ctrlPr>
@@ -37003,7 +36554,7 @@
                     <m:oMathParaPr>
                       <m:jc m:val="center"/>
                     </m:oMathParaPr>
-                    <m:oMath xmlns:m="http://schemas.openxmlformats.org/officeDocument/2006/math">
+                    <m:oMath>
                       <m:r>
                         <a:rPr>
                           <a:latin typeface="Cambria Math" panose="02040503050406030204" pitchFamily="18" charset="0"/>
@@ -37013,7 +36564,7 @@
                       <m:d>
                         <m:dPr>
                           <m:ctrlPr>
-                            <a:rPr i="1">
+                            <a:rPr>
                               <a:latin typeface="Cambria Math" panose="02040503050406030204" pitchFamily="18" charset="0"/>
                             </a:rPr>
                           </m:ctrlPr>
@@ -37048,7 +36599,7 @@
                       <m:f>
                         <m:fPr>
                           <m:ctrlPr>
-                            <a:rPr i="1">
+                            <a:rPr>
                               <a:latin typeface="Cambria Math" panose="02040503050406030204" pitchFamily="18" charset="0"/>
                             </a:rPr>
                           </m:ctrlPr>
@@ -37074,7 +36625,7 @@
                               <m:d>
                                 <m:dPr>
                                   <m:ctrlPr>
-                                    <a:rPr i="1">
+                                    <a:rPr>
                                       <a:latin typeface="Cambria Math" panose="02040503050406030204" pitchFamily="18" charset="0"/>
                                     </a:rPr>
                                   </m:ctrlPr>
@@ -37095,7 +36646,7 @@
                                   <m:sSup>
                                     <m:sSupPr>
                                       <m:ctrlPr>
-                                        <a:rPr i="1">
+                                        <a:rPr>
                                           <a:latin typeface="Cambria Math" panose="02040503050406030204" pitchFamily="18" charset="0"/>
                                         </a:rPr>
                                       </m:ctrlPr>
@@ -37131,13 +36682,7 @@
                                 <a:rPr>
                                   <a:latin typeface="Cambria Math" panose="02040503050406030204" pitchFamily="18" charset="0"/>
                                 </a:rPr>
-                                <m:t>/</m:t>
-                              </m:r>
-                              <m:r>
-                                <a:rPr>
-                                  <a:latin typeface="Cambria Math" panose="02040503050406030204" pitchFamily="18" charset="0"/>
-                                </a:rPr>
-                                <m:t>2</m:t>
+                                <m:t>/2</m:t>
                               </m:r>
                             </m:sup>
                           </m:sSup>
@@ -37154,7 +36699,7 @@
                           <m:begChr m:val="["/>
                           <m:endChr m:val="]"/>
                           <m:ctrlPr>
-                            <a:rPr i="1">
+                            <a:rPr>
                               <a:latin typeface="Cambria Math" panose="02040503050406030204" pitchFamily="18" charset="0"/>
                             </a:rPr>
                           </m:ctrlPr>
@@ -37169,7 +36714,7 @@
                           <m:f>
                             <m:fPr>
                               <m:ctrlPr>
-                                <a:rPr i="1">
+                                <a:rPr>
                                   <a:latin typeface="Cambria Math" panose="02040503050406030204" pitchFamily="18" charset="0"/>
                                 </a:rPr>
                               </m:ctrlPr>
@@ -37192,7 +36737,7 @@
                               <m:sSup>
                                 <m:sSupPr>
                                   <m:ctrlPr>
-                                    <a:rPr i="1">
+                                    <a:rPr>
                                       <a:latin typeface="Cambria Math" panose="02040503050406030204" pitchFamily="18" charset="0"/>
                                     </a:rPr>
                                   </m:ctrlPr>
@@ -37221,7 +36766,7 @@
                               <m:chr m:val="∑"/>
                               <m:limLoc m:val="undOvr"/>
                               <m:ctrlPr>
-                                <a:rPr i="1">
+                                <a:rPr>
                                   <a:latin typeface="Cambria Math" panose="02040503050406030204" pitchFamily="18" charset="0"/>
                                 </a:rPr>
                               </m:ctrlPr>
@@ -37237,13 +36782,7 @@
                                 <a:rPr>
                                   <a:latin typeface="Cambria Math" panose="02040503050406030204" pitchFamily="18" charset="0"/>
                                 </a:rPr>
-                                <m:t>=</m:t>
-                              </m:r>
-                              <m:r>
-                                <a:rPr>
-                                  <a:latin typeface="Cambria Math" panose="02040503050406030204" pitchFamily="18" charset="0"/>
-                                </a:rPr>
-                                <m:t>1</m:t>
+                                <m:t>=1</m:t>
                               </m:r>
                             </m:sub>
                             <m:sup>
@@ -37276,7 +36815,7 @@
                                       <m:sSub>
                                         <m:sSubPr>
                                           <m:ctrlPr>
-                                            <a:rPr i="1">
+                                            <a:rPr>
                                               <a:latin typeface="Cambria Math" panose="02040503050406030204" pitchFamily="18" charset="0"/>
                                             </a:rPr>
                                           </m:ctrlPr>
@@ -37307,7 +36846,7 @@
                                       <m:sSub>
                                         <m:sSubPr>
                                           <m:ctrlPr>
-                                            <a:rPr i="1">
+                                            <a:rPr>
                                               <a:latin typeface="Cambria Math" panose="02040503050406030204" pitchFamily="18" charset="0"/>
                                             </a:rPr>
                                           </m:ctrlPr>
@@ -37360,7 +36899,7 @@
                     <m:sSub>
                       <m:sSubPr>
                         <m:ctrlPr>
-                          <a:rPr i="1">
+                          <a:rPr>
                             <a:latin typeface="Cambria Math" panose="02040503050406030204" pitchFamily="18" charset="0"/>
                           </a:rPr>
                         </m:ctrlPr>
@@ -37391,7 +36930,7 @@
                     <m:sSub>
                       <m:sSubPr>
                         <m:ctrlPr>
-                          <a:rPr i="1">
+                          <a:rPr>
                             <a:latin typeface="Cambria Math" panose="02040503050406030204" pitchFamily="18" charset="0"/>
                           </a:rPr>
                         </m:ctrlPr>
@@ -37425,19 +36964,7 @@
                       <a:rPr>
                         <a:latin typeface="Cambria Math" panose="02040503050406030204" pitchFamily="18" charset="0"/>
                       </a:rPr>
-                      <m:t>1</m:t>
-                    </m:r>
-                    <m:r>
-                      <a:rPr>
-                        <a:latin typeface="Cambria Math" panose="02040503050406030204" pitchFamily="18" charset="0"/>
-                      </a:rPr>
-                      <m:t>.</m:t>
-                    </m:r>
-                    <m:r>
-                      <a:rPr>
-                        <a:latin typeface="Cambria Math" panose="02040503050406030204" pitchFamily="18" charset="0"/>
-                      </a:rPr>
-                      <m:t>0</m:t>
+                      <m:t>1.0</m:t>
                     </m:r>
                   </m:oMath>
                 </a14:m>
@@ -37451,19 +36978,7 @@
                       <a:rPr>
                         <a:latin typeface="Cambria Math" panose="02040503050406030204" pitchFamily="18" charset="0"/>
                       </a:rPr>
-                      <m:t>0</m:t>
-                    </m:r>
-                    <m:r>
-                      <a:rPr>
-                        <a:latin typeface="Cambria Math" panose="02040503050406030204" pitchFamily="18" charset="0"/>
-                      </a:rPr>
-                      <m:t>.</m:t>
-                    </m:r>
-                    <m:r>
-                      <a:rPr>
-                        <a:latin typeface="Cambria Math" panose="02040503050406030204" pitchFamily="18" charset="0"/>
-                      </a:rPr>
-                      <m:t>0</m:t>
+                      <m:t>0.0</m:t>
                     </m:r>
                   </m:oMath>
                 </a14:m>
@@ -37846,7 +37361,7 @@
                     <m:sSub>
                       <m:sSubPr>
                         <m:ctrlPr>
-                          <a:rPr i="1">
+                          <a:rPr>
                             <a:latin typeface="Cambria Math" panose="02040503050406030204" pitchFamily="18" charset="0"/>
                           </a:rPr>
                         </m:ctrlPr>
@@ -37884,11 +37399,11 @@
                     <m:oMathParaPr>
                       <m:jc m:val="center"/>
                     </m:oMathParaPr>
-                    <m:oMath xmlns:m="http://schemas.openxmlformats.org/officeDocument/2006/math">
+                    <m:oMath>
                       <m:sSub>
                         <m:sSubPr>
                           <m:ctrlPr>
-                            <a:rPr i="1">
+                            <a:rPr>
                               <a:latin typeface="Cambria Math" panose="02040503050406030204" pitchFamily="18" charset="0"/>
                             </a:rPr>
                           </m:ctrlPr>
@@ -37957,20 +37472,13 @@
                                   <m:rPr>
                                     <m:nor/>
                                   </m:rPr>
-                                  <a:rPr/>
-                                  <m:t>if</m:t>
-                                </m:r>
-                                <m:r>
-                                  <m:rPr>
-                                    <m:nor/>
-                                  </m:rPr>
-                                  <a:rPr/>
-                                  <m:t> </m:t>
+                                  <a:rPr i="0"/>
+                                  <m:t>if </m:t>
                                 </m:r>
                                 <m:sSub>
                                   <m:sSubPr>
                                     <m:ctrlPr>
-                                      <a:rPr i="1">
+                                      <a:rPr>
                                         <a:latin typeface="Cambria Math" panose="02040503050406030204" pitchFamily="18" charset="0"/>
                                       </a:rPr>
                                     </m:ctrlPr>
@@ -37996,13 +37504,7 @@
                                   <a:rPr>
                                     <a:latin typeface="Cambria Math" panose="02040503050406030204" pitchFamily="18" charset="0"/>
                                   </a:rPr>
-                                  <m:t>=</m:t>
-                                </m:r>
-                                <m:r>
-                                  <a:rPr>
-                                    <a:latin typeface="Cambria Math" panose="02040503050406030204" pitchFamily="18" charset="0"/>
-                                  </a:rPr>
-                                  <m:t>1</m:t>
+                                  <m:t>=1</m:t>
                                 </m:r>
                               </m:e>
                             </m:mr>
@@ -38020,20 +37522,13 @@
                                   <m:rPr>
                                     <m:nor/>
                                   </m:rPr>
-                                  <a:rPr/>
-                                  <m:t>if</m:t>
-                                </m:r>
-                                <m:r>
-                                  <m:rPr>
-                                    <m:nor/>
-                                  </m:rPr>
-                                  <a:rPr/>
-                                  <m:t> </m:t>
+                                  <a:rPr i="0"/>
+                                  <m:t>if </m:t>
                                 </m:r>
                                 <m:sSub>
                                   <m:sSubPr>
                                     <m:ctrlPr>
-                                      <a:rPr i="1">
+                                      <a:rPr>
                                         <a:latin typeface="Cambria Math" panose="02040503050406030204" pitchFamily="18" charset="0"/>
                                       </a:rPr>
                                     </m:ctrlPr>
@@ -38059,13 +37554,7 @@
                                   <a:rPr>
                                     <a:latin typeface="Cambria Math" panose="02040503050406030204" pitchFamily="18" charset="0"/>
                                   </a:rPr>
-                                  <m:t>=</m:t>
-                                </m:r>
-                                <m:r>
-                                  <a:rPr>
-                                    <a:latin typeface="Cambria Math" panose="02040503050406030204" pitchFamily="18" charset="0"/>
-                                  </a:rPr>
-                                  <m:t>0</m:t>
+                                  <m:t>=0</m:t>
                                 </m:r>
                               </m:e>
                             </m:mr>
@@ -38100,13 +37589,13 @@
                     <m:oMathParaPr>
                       <m:jc m:val="center"/>
                     </m:oMathParaPr>
-                    <m:oMath xmlns:m="http://schemas.openxmlformats.org/officeDocument/2006/math">
+                    <m:oMath>
                       <m:nary>
                         <m:naryPr>
                           <m:chr m:val="∏"/>
                           <m:limLoc m:val="undOvr"/>
                           <m:ctrlPr>
-                            <a:rPr i="1">
+                            <a:rPr>
                               <a:latin typeface="Cambria Math" panose="02040503050406030204" pitchFamily="18" charset="0"/>
                             </a:rPr>
                           </m:ctrlPr>
@@ -38122,13 +37611,7 @@
                             <a:rPr>
                               <a:latin typeface="Cambria Math" panose="02040503050406030204" pitchFamily="18" charset="0"/>
                             </a:rPr>
-                            <m:t>=</m:t>
-                          </m:r>
-                          <m:r>
-                            <a:rPr>
-                              <a:latin typeface="Cambria Math" panose="02040503050406030204" pitchFamily="18" charset="0"/>
-                            </a:rPr>
-                            <m:t>1</m:t>
+                            <m:t>=1</m:t>
                           </m:r>
                         </m:sub>
                         <m:sup>
@@ -38153,7 +37636,7 @@
                                 <m:accPr>
                                   <m:chr m:val="̂"/>
                                   <m:ctrlPr>
-                                    <a:rPr i="1">
+                                    <a:rPr>
                                       <a:latin typeface="Cambria Math" panose="02040503050406030204" pitchFamily="18" charset="0"/>
                                     </a:rPr>
                                   </m:ctrlPr>
@@ -38180,7 +37663,7 @@
                               <m:sSub>
                                 <m:sSubPr>
                                   <m:ctrlPr>
-                                    <a:rPr i="1">
+                                    <a:rPr>
                                       <a:latin typeface="Cambria Math" panose="02040503050406030204" pitchFamily="18" charset="0"/>
                                     </a:rPr>
                                   </m:ctrlPr>
@@ -38218,7 +37701,7 @@
                           <m:d>
                             <m:dPr>
                               <m:ctrlPr>
-                                <a:rPr i="1">
+                                <a:rPr>
                                   <a:latin typeface="Cambria Math" panose="02040503050406030204" pitchFamily="18" charset="0"/>
                                 </a:rPr>
                               </m:ctrlPr>
@@ -38228,13 +37711,7 @@
                                 <a:rPr>
                                   <a:latin typeface="Cambria Math" panose="02040503050406030204" pitchFamily="18" charset="0"/>
                                 </a:rPr>
-                                <m:t>1</m:t>
-                              </m:r>
-                              <m:r>
-                                <a:rPr>
-                                  <a:latin typeface="Cambria Math" panose="02040503050406030204" pitchFamily="18" charset="0"/>
-                                </a:rPr>
-                                <m:t>−</m:t>
+                                <m:t>1−</m:t>
                               </m:r>
                               <m:sSub>
                                 <m:sSubPr>
@@ -38249,7 +37726,7 @@
                                     <m:accPr>
                                       <m:chr m:val="̂"/>
                                       <m:ctrlPr>
-                                        <a:rPr i="1">
+                                        <a:rPr>
                                           <a:latin typeface="Cambria Math" panose="02040503050406030204" pitchFamily="18" charset="0"/>
                                         </a:rPr>
                                       </m:ctrlPr>
@@ -38281,18 +37758,12 @@
                             <a:rPr>
                               <a:latin typeface="Cambria Math" panose="02040503050406030204" pitchFamily="18" charset="0"/>
                             </a:rPr>
-                            <m:t>1</m:t>
-                          </m:r>
-                          <m:r>
-                            <a:rPr>
-                              <a:latin typeface="Cambria Math" panose="02040503050406030204" pitchFamily="18" charset="0"/>
-                            </a:rPr>
-                            <m:t>−</m:t>
+                            <m:t>1−</m:t>
                           </m:r>
                           <m:sSub>
                             <m:sSubPr>
                               <m:ctrlPr>
-                                <a:rPr i="1">
+                                <a:rPr>
                                   <a:latin typeface="Cambria Math" panose="02040503050406030204" pitchFamily="18" charset="0"/>
                                 </a:rPr>
                               </m:ctrlPr>
@@ -38325,7 +37796,7 @@
                       <m:sSup>
                         <m:sSupPr>
                           <m:ctrlPr>
-                            <a:rPr i="1">
+                            <a:rPr>
                               <a:latin typeface="Cambria Math" panose="02040503050406030204" pitchFamily="18" charset="0"/>
                             </a:rPr>
                           </m:ctrlPr>
@@ -38351,13 +37822,7 @@
                         <a:rPr>
                           <a:latin typeface="Cambria Math" panose="02040503050406030204" pitchFamily="18" charset="0"/>
                         </a:rPr>
-                        <m:t>=</m:t>
-                      </m:r>
-                      <m:r>
-                        <a:rPr>
-                          <a:latin typeface="Cambria Math" panose="02040503050406030204" pitchFamily="18" charset="0"/>
-                        </a:rPr>
-                        <m:t>1</m:t>
+                        <m:t>=1</m:t>
                       </m:r>
                     </m:oMath>
                   </m:oMathPara>
@@ -38380,7 +37845,7 @@
                     <m:d>
                       <m:dPr>
                         <m:ctrlPr>
-                          <a:rPr i="1">
+                          <a:rPr>
                             <a:latin typeface="Cambria Math" panose="02040503050406030204" pitchFamily="18" charset="0"/>
                           </a:rPr>
                         </m:ctrlPr>
@@ -38398,13 +37863,7 @@
                       <a:rPr>
                         <a:latin typeface="Cambria Math" panose="02040503050406030204" pitchFamily="18" charset="0"/>
                       </a:rPr>
-                      <m:t>=</m:t>
-                    </m:r>
-                    <m:r>
-                      <a:rPr>
-                        <a:latin typeface="Cambria Math" panose="02040503050406030204" pitchFamily="18" charset="0"/>
-                      </a:rPr>
-                      <m:t>0</m:t>
+                      <m:t>=0</m:t>
                     </m:r>
                   </m:oMath>
                 </a14:m>
@@ -38798,13 +38257,7 @@
                       <a:rPr lang="en-US">
                         <a:latin typeface="Cambria Math" panose="02040503050406030204" pitchFamily="18" charset="0"/>
                       </a:rPr>
-                      <m:t>≥</m:t>
-                    </m:r>
-                    <m:r>
-                      <a:rPr lang="en-US">
-                        <a:latin typeface="Cambria Math" panose="02040503050406030204" pitchFamily="18" charset="0"/>
-                      </a:rPr>
-                      <m:t>0</m:t>
+                      <m:t>≥0</m:t>
                     </m:r>
                   </m:oMath>
                 </a14:m>
@@ -38824,7 +38277,7 @@
                     <m:sSub>
                       <m:sSubPr>
                         <m:ctrlPr>
-                          <a:rPr lang="ar-AE" i="1">
+                          <a:rPr lang="ar-AE">
                             <a:latin typeface="Cambria Math" panose="02040503050406030204" pitchFamily="18" charset="0"/>
                           </a:rPr>
                         </m:ctrlPr>
@@ -38855,7 +38308,7 @@
                     <m:sSub>
                       <m:sSubPr>
                         <m:ctrlPr>
-                          <a:rPr lang="ar-AE" i="1">
+                          <a:rPr lang="ar-AE">
                             <a:latin typeface="Cambria Math" panose="02040503050406030204" pitchFamily="18" charset="0"/>
                           </a:rPr>
                         </m:ctrlPr>
@@ -38893,13 +38346,7 @@
                       <a:rPr lang="ar-AE">
                         <a:latin typeface="Cambria Math" panose="02040503050406030204" pitchFamily="18" charset="0"/>
                       </a:rPr>
-                      <m:t>=</m:t>
-                    </m:r>
-                    <m:r>
-                      <a:rPr lang="ar-AE">
-                        <a:latin typeface="Cambria Math" panose="02040503050406030204" pitchFamily="18" charset="0"/>
-                      </a:rPr>
-                      <m:t>0</m:t>
+                      <m:t>=0</m:t>
                     </m:r>
                   </m:oMath>
                 </a14:m>
@@ -38916,7 +38363,7 @@
                     <m:sSub>
                       <m:sSubPr>
                         <m:ctrlPr>
-                          <a:rPr lang="ar-AE" i="1">
+                          <a:rPr lang="ar-AE">
                             <a:latin typeface="Cambria Math" panose="02040503050406030204" pitchFamily="18" charset="0"/>
                           </a:rPr>
                         </m:ctrlPr>
@@ -38947,7 +38394,7 @@
                     <m:sSub>
                       <m:sSubPr>
                         <m:ctrlPr>
-                          <a:rPr lang="ar-AE" i="1">
+                          <a:rPr lang="ar-AE">
                             <a:latin typeface="Cambria Math" panose="02040503050406030204" pitchFamily="18" charset="0"/>
                           </a:rPr>
                         </m:ctrlPr>
@@ -38985,13 +38432,7 @@
                       <a:rPr lang="ar-AE">
                         <a:latin typeface="Cambria Math" panose="02040503050406030204" pitchFamily="18" charset="0"/>
                       </a:rPr>
-                      <m:t>&gt;</m:t>
-                    </m:r>
-                    <m:r>
-                      <a:rPr lang="ar-AE">
-                        <a:latin typeface="Cambria Math" panose="02040503050406030204" pitchFamily="18" charset="0"/>
-                      </a:rPr>
-                      <m:t>0</m:t>
+                      <m:t>&gt;0</m:t>
                     </m:r>
                   </m:oMath>
                 </a14:m>
@@ -39438,6 +38879,7 @@
                         <m:ctrlPr>
                           <a:rPr lang="en-US" i="1" smtClean="0">
                             <a:latin typeface="Cambria Math" panose="02040503050406030204" pitchFamily="18" charset="0"/>
+                            <a:ea typeface="Cambria Math" panose="02040503050406030204" pitchFamily="18" charset="0"/>
                           </a:rPr>
                         </m:ctrlPr>
                       </m:sSupPr>
@@ -40046,10 +39488,7 @@
                 </a:pPr>
                 <a14:m>
                   <m:oMathPara xmlns:m="http://schemas.openxmlformats.org/officeDocument/2006/math">
-                    <m:oMathParaPr>
-                      <m:jc m:val="centerGroup"/>
-                    </m:oMathParaPr>
-                    <m:oMath xmlns:m="http://schemas.openxmlformats.org/officeDocument/2006/math">
+                    <m:oMath>
                       <m:r>
                         <a:rPr lang="en-US" b="0" i="1" smtClean="0">
                           <a:latin typeface="Cambria Math" panose="02040503050406030204" pitchFamily="18" charset="0"/>
@@ -40093,6 +39532,7 @@
                               <m:ctrlPr>
                                 <a:rPr lang="en-US" b="0" i="1" smtClean="0">
                                   <a:latin typeface="Cambria Math" panose="02040503050406030204" pitchFamily="18" charset="0"/>
+                                  <a:ea typeface="Cambria Math" panose="02040503050406030204" pitchFamily="18" charset="0"/>
                                 </a:rPr>
                               </m:ctrlPr>
                             </m:sSupPr>
@@ -40710,7 +40150,7 @@
                     <m:sSub>
                       <m:sSubPr>
                         <m:ctrlPr>
-                          <a:rPr lang="ar-AE" i="1">
+                          <a:rPr lang="ar-AE">
                             <a:latin typeface="Cambria Math" panose="02040503050406030204" pitchFamily="18" charset="0"/>
                           </a:rPr>
                         </m:ctrlPr>
@@ -40747,7 +40187,7 @@
                     <m:sSub>
                       <m:sSubPr>
                         <m:ctrlPr>
-                          <a:rPr lang="ar-AE" i="1">
+                          <a:rPr lang="ar-AE">
                             <a:latin typeface="Cambria Math" panose="02040503050406030204" pitchFamily="18" charset="0"/>
                           </a:rPr>
                         </m:ctrlPr>
@@ -40784,7 +40224,7 @@
                     <m:sSub>
                       <m:sSubPr>
                         <m:ctrlPr>
-                          <a:rPr lang="ar-AE" i="1">
+                          <a:rPr lang="ar-AE">
                             <a:latin typeface="Cambria Math" panose="02040503050406030204" pitchFamily="18" charset="0"/>
                           </a:rPr>
                         </m:ctrlPr>
@@ -40840,7 +40280,7 @@
                     <m:oMathParaPr>
                       <m:jc m:val="center"/>
                     </m:oMathParaPr>
-                    <m:oMath xmlns:m="http://schemas.openxmlformats.org/officeDocument/2006/math">
+                    <m:oMath>
                       <m:r>
                         <a:rPr lang="en-US">
                           <a:latin typeface="Cambria Math" panose="02040503050406030204" pitchFamily="18" charset="0"/>
@@ -40852,7 +40292,7 @@
                           <m:begChr m:val="["/>
                           <m:endChr m:val="]"/>
                           <m:ctrlPr>
-                            <a:rPr lang="ar-AE" i="1">
+                            <a:rPr lang="ar-AE">
                               <a:latin typeface="Cambria Math" panose="02040503050406030204" pitchFamily="18" charset="0"/>
                             </a:rPr>
                           </m:ctrlPr>
@@ -40876,7 +40316,7 @@
                               <m:sSub>
                                 <m:sSubPr>
                                   <m:ctrlPr>
-                                    <a:rPr lang="ar-AE" i="1">
+                                    <a:rPr lang="ar-AE">
                                       <a:latin typeface="Cambria Math" panose="02040503050406030204" pitchFamily="18" charset="0"/>
                                     </a:rPr>
                                   </m:ctrlPr>
@@ -40907,7 +40347,7 @@
                               <m:sSub>
                                 <m:sSubPr>
                                   <m:ctrlPr>
-                                    <a:rPr lang="ar-AE" i="1">
+                                    <a:rPr lang="ar-AE">
                                       <a:latin typeface="Cambria Math" panose="02040503050406030204" pitchFamily="18" charset="0"/>
                                     </a:rPr>
                                   </m:ctrlPr>
@@ -40942,7 +40382,7 @@
                       <m:sSub>
                         <m:sSubPr>
                           <m:ctrlPr>
-                            <a:rPr lang="ar-AE" i="1">
+                            <a:rPr lang="ar-AE">
                               <a:latin typeface="Cambria Math" panose="02040503050406030204" pitchFamily="18" charset="0"/>
                             </a:rPr>
                           </m:ctrlPr>
@@ -40967,7 +40407,7 @@
                       <m:sSub>
                         <m:sSubPr>
                           <m:ctrlPr>
-                            <a:rPr lang="ar-AE" i="1">
+                            <a:rPr lang="ar-AE">
                               <a:latin typeface="Cambria Math" panose="02040503050406030204" pitchFamily="18" charset="0"/>
                             </a:rPr>
                           </m:ctrlPr>
@@ -41013,7 +40453,7 @@
                           <m:sSub>
                             <m:sSubPr>
                               <m:ctrlPr>
-                                <a:rPr lang="ar-AE" i="1">
+                                <a:rPr lang="ar-AE">
                                   <a:latin typeface="Cambria Math" panose="02040503050406030204" pitchFamily="18" charset="0"/>
                                 </a:rPr>
                               </m:ctrlPr>
@@ -41044,7 +40484,7 @@
                           <m:sSub>
                             <m:sSubPr>
                               <m:ctrlPr>
-                                <a:rPr lang="ar-AE" i="1">
+                                <a:rPr lang="ar-AE">
                                   <a:latin typeface="Cambria Math" panose="02040503050406030204" pitchFamily="18" charset="0"/>
                                 </a:rPr>
                               </m:ctrlPr>
@@ -41077,7 +40517,7 @@
                       <m:sSup>
                         <m:sSupPr>
                           <m:ctrlPr>
-                            <a:rPr lang="ar-AE" i="1">
+                            <a:rPr lang="ar-AE">
                               <a:latin typeface="Cambria Math" panose="02040503050406030204" pitchFamily="18" charset="0"/>
                             </a:rPr>
                           </m:ctrlPr>
@@ -41094,7 +40534,7 @@
                           <m:sSub>
                             <m:sSubPr>
                               <m:ctrlPr>
-                                <a:rPr lang="ar-AE" i="1">
+                                <a:rPr lang="ar-AE">
                                   <a:latin typeface="Cambria Math" panose="02040503050406030204" pitchFamily="18" charset="0"/>
                                 </a:rPr>
                               </m:ctrlPr>
@@ -41119,7 +40559,7 @@
                           <m:sSub>
                             <m:sSubPr>
                               <m:ctrlPr>
-                                <a:rPr lang="ar-AE" i="1">
+                                <a:rPr lang="ar-AE">
                                   <a:latin typeface="Cambria Math" panose="02040503050406030204" pitchFamily="18" charset="0"/>
                                 </a:rPr>
                               </m:ctrlPr>
@@ -41554,7 +40994,7 @@
                     <m:sSub>
                       <m:sSubPr>
                         <m:ctrlPr>
-                          <a:rPr i="1">
+                          <a:rPr>
                             <a:latin typeface="Cambria Math" panose="02040503050406030204" pitchFamily="18" charset="0"/>
                           </a:rPr>
                         </m:ctrlPr>
@@ -41610,7 +41050,7 @@
                       <m:accPr>
                         <m:chr m:val="⃗"/>
                         <m:ctrlPr>
-                          <a:rPr i="1">
+                          <a:rPr>
                             <a:latin typeface="Cambria Math" panose="02040503050406030204" pitchFamily="18" charset="0"/>
                           </a:rPr>
                         </m:ctrlPr>
@@ -41639,7 +41079,7 @@
                     <m:sSub>
                       <m:sSubPr>
                         <m:ctrlPr>
-                          <a:rPr i="1">
+                          <a:rPr>
                             <a:latin typeface="Cambria Math" panose="02040503050406030204" pitchFamily="18" charset="0"/>
                           </a:rPr>
                         </m:ctrlPr>
@@ -41686,7 +41126,7 @@
                     <m:sSub>
                       <m:sSubPr>
                         <m:ctrlPr>
-                          <a:rPr i="1">
+                          <a:rPr>
                             <a:latin typeface="Cambria Math" panose="02040503050406030204" pitchFamily="18" charset="0"/>
                           </a:rPr>
                         </m:ctrlPr>
@@ -41721,7 +41161,7 @@
                     <m:oMathParaPr>
                       <m:jc m:val="center"/>
                     </m:oMathParaPr>
-                    <m:oMath xmlns:m="http://schemas.openxmlformats.org/officeDocument/2006/math">
+                    <m:oMath>
                       <m:r>
                         <a:rPr>
                           <a:latin typeface="Cambria Math" panose="02040503050406030204" pitchFamily="18" charset="0"/>
@@ -41740,7 +41180,7 @@
                           <m:sSub>
                             <m:sSubPr>
                               <m:ctrlPr>
-                                <a:rPr i="1">
+                                <a:rPr>
                                   <a:latin typeface="Cambria Math" panose="02040503050406030204" pitchFamily="18" charset="0"/>
                                 </a:rPr>
                               </m:ctrlPr>
@@ -41773,7 +41213,7 @@
                       <m:sSub>
                         <m:sSubPr>
                           <m:ctrlPr>
-                            <a:rPr i="1">
+                            <a:rPr>
                               <a:latin typeface="Cambria Math" panose="02040503050406030204" pitchFamily="18" charset="0"/>
                             </a:rPr>
                           </m:ctrlPr>
@@ -41804,7 +41244,7 @@
                       <m:sSub>
                         <m:sSubPr>
                           <m:ctrlPr>
-                            <a:rPr i="1">
+                            <a:rPr>
                               <a:latin typeface="Cambria Math" panose="02040503050406030204" pitchFamily="18" charset="0"/>
                             </a:rPr>
                           </m:ctrlPr>
@@ -41830,7 +41270,7 @@
                         <m:accPr>
                           <m:chr m:val="⃗"/>
                           <m:ctrlPr>
-                            <a:rPr i="1">
+                            <a:rPr>
                               <a:latin typeface="Cambria Math" panose="02040503050406030204" pitchFamily="18" charset="0"/>
                             </a:rPr>
                           </m:ctrlPr>
@@ -41853,7 +41293,7 @@
                       <m:sSub>
                         <m:sSubPr>
                           <m:ctrlPr>
-                            <a:rPr i="1">
+                            <a:rPr>
                               <a:latin typeface="Cambria Math" panose="02040503050406030204" pitchFamily="18" charset="0"/>
                             </a:rPr>
                           </m:ctrlPr>
@@ -41884,7 +41324,7 @@
                       <m:sSup>
                         <m:sSupPr>
                           <m:ctrlPr>
-                            <a:rPr i="1">
+                            <a:rPr>
                               <a:latin typeface="Cambria Math" panose="02040503050406030204" pitchFamily="18" charset="0"/>
                             </a:rPr>
                           </m:ctrlPr>
@@ -41910,7 +41350,7 @@
                               <m:sSub>
                                 <m:sSubPr>
                                   <m:ctrlPr>
-                                    <a:rPr i="1">
+                                    <a:rPr>
                                       <a:latin typeface="Cambria Math" panose="02040503050406030204" pitchFamily="18" charset="0"/>
                                     </a:rPr>
                                   </m:ctrlPr>
@@ -41941,7 +41381,7 @@
                               <m:sSub>
                                 <m:sSubPr>
                                   <m:ctrlPr>
-                                    <a:rPr i="1">
+                                    <a:rPr>
                                       <a:latin typeface="Cambria Math" panose="02040503050406030204" pitchFamily="18" charset="0"/>
                                     </a:rPr>
                                   </m:ctrlPr>
@@ -41967,7 +41407,7 @@
                                 <m:accPr>
                                   <m:chr m:val="⃗"/>
                                   <m:ctrlPr>
-                                    <a:rPr i="1">
+                                    <a:rPr>
                                       <a:latin typeface="Cambria Math" panose="02040503050406030204" pitchFamily="18" charset="0"/>
                                     </a:rPr>
                                   </m:ctrlPr>
@@ -42355,7 +41795,7 @@
                         <m:begChr m:val="{"/>
                         <m:endChr m:val="}"/>
                         <m:ctrlPr>
-                          <a:rPr lang="ar-AE" sz="2000" i="1" smtClean="0">
+                          <a:rPr lang="ar-AE" sz="2000" b="0" i="1" smtClean="0">
                             <a:latin typeface="Cambria Math" panose="02040503050406030204" pitchFamily="18" charset="0"/>
                           </a:rPr>
                         </m:ctrlPr>
@@ -42876,10 +42316,7 @@
                 </a:pPr>
                 <a14:m>
                   <m:oMathPara xmlns:m="http://schemas.openxmlformats.org/officeDocument/2006/math">
-                    <m:oMathParaPr>
-                      <m:jc m:val="centerGroup"/>
-                    </m:oMathParaPr>
-                    <m:oMath xmlns:m="http://schemas.openxmlformats.org/officeDocument/2006/math">
+                    <m:oMath>
                       <m:r>
                         <a:rPr lang="en-US" sz="2400" b="0" i="1" smtClean="0">
                           <a:latin typeface="Cambria Math" panose="02040503050406030204" pitchFamily="18" charset="0"/>
@@ -44031,10 +43468,7 @@
                 <a:pPr lvl="0"/>
                 <a14:m>
                   <m:oMathPara xmlns:m="http://schemas.openxmlformats.org/officeDocument/2006/math">
-                    <m:oMathParaPr>
-                      <m:jc m:val="centerGroup"/>
-                    </m:oMathParaPr>
-                    <m:oMath xmlns:m="http://schemas.openxmlformats.org/officeDocument/2006/math">
+                    <m:oMath>
                       <m:r>
                         <a:rPr lang="en-US" sz="2000" b="0" i="1" smtClean="0">
                           <a:latin typeface="Cambria Math" panose="02040503050406030204" pitchFamily="18" charset="0"/>

--- a/LectureSlides/09_GeneralizingTheLinearModel.pptx
+++ b/LectureSlides/09_GeneralizingTheLinearModel.pptx
@@ -5,7 +5,7 @@
     <p:sldMasterId id="2147483648" r:id="rId1"/>
   </p:sldMasterIdLst>
   <p:notesMasterIdLst>
-    <p:notesMasterId r:id="rId64"/>
+    <p:notesMasterId r:id="rId68"/>
   </p:notesMasterIdLst>
   <p:sldIdLst>
     <p:sldId id="308" r:id="rId2"/>
@@ -68,8 +68,12 @@
     <p:sldId id="304" r:id="rId59"/>
     <p:sldId id="305" r:id="rId60"/>
     <p:sldId id="306" r:id="rId61"/>
-    <p:sldId id="327" r:id="rId62"/>
-    <p:sldId id="307" r:id="rId63"/>
+    <p:sldId id="338" r:id="rId62"/>
+    <p:sldId id="339" r:id="rId63"/>
+    <p:sldId id="340" r:id="rId64"/>
+    <p:sldId id="337" r:id="rId65"/>
+    <p:sldId id="327" r:id="rId66"/>
+    <p:sldId id="307" r:id="rId67"/>
   </p:sldIdLst>
   <p:sldSz cx="9144000" cy="5143500" type="screen16x9"/>
   <p:notesSz cx="6858000" cy="9144000"/>
@@ -269,7 +273,7 @@
           <a:p>
             <a:fld id="{35BCC803-D91A-40A8-8BFC-49FB40BF6589}" type="datetimeFigureOut">
               <a:rPr lang="en-US" smtClean="0"/>
-              <a:t>9/28/2026</a:t>
+              <a:t>9/29/2026</a:t>
             </a:fld>
             <a:endParaRPr lang="en-US"/>
           </a:p>
@@ -625,7 +629,7 @@
           <a:p>
             <a:fld id="{979D3DEE-884F-4AC4-B40C-E4221C7984B1}" type="slidenum">
               <a:rPr lang="en-US" smtClean="0"/>
-              <a:t>61</a:t>
+              <a:t>65</a:t>
             </a:fld>
             <a:endParaRPr lang="en-US"/>
           </a:p>
@@ -709,7 +713,7 @@
           <a:p>
             <a:fld id="{979D3DEE-884F-4AC4-B40C-E4221C7984B1}" type="slidenum">
               <a:rPr lang="en-US" smtClean="0"/>
-              <a:t>62</a:t>
+              <a:t>66</a:t>
             </a:fld>
             <a:endParaRPr lang="en-US"/>
           </a:p>
@@ -907,7 +911,7 @@
           <a:p>
             <a:fld id="{241EB5C9-1307-BA42-ABA2-0BC069CD8E7F}" type="datetimeFigureOut">
               <a:rPr lang="en-US" smtClean="0"/>
-              <a:t>9/28/2026</a:t>
+              <a:t>9/29/2026</a:t>
             </a:fld>
             <a:endParaRPr lang="en-US"/>
           </a:p>
@@ -1075,7 +1079,7 @@
           <a:p>
             <a:fld id="{241EB5C9-1307-BA42-ABA2-0BC069CD8E7F}" type="datetimeFigureOut">
               <a:rPr lang="en-US" smtClean="0"/>
-              <a:t>9/28/2026</a:t>
+              <a:t>9/29/2026</a:t>
             </a:fld>
             <a:endParaRPr lang="en-US"/>
           </a:p>
@@ -1253,7 +1257,7 @@
           <a:p>
             <a:fld id="{241EB5C9-1307-BA42-ABA2-0BC069CD8E7F}" type="datetimeFigureOut">
               <a:rPr lang="en-US" smtClean="0"/>
-              <a:t>9/28/2026</a:t>
+              <a:t>9/29/2026</a:t>
             </a:fld>
             <a:endParaRPr lang="en-US"/>
           </a:p>
@@ -1421,7 +1425,7 @@
           <a:p>
             <a:fld id="{241EB5C9-1307-BA42-ABA2-0BC069CD8E7F}" type="datetimeFigureOut">
               <a:rPr lang="en-US" smtClean="0"/>
-              <a:t>9/28/2026</a:t>
+              <a:t>9/29/2026</a:t>
             </a:fld>
             <a:endParaRPr lang="en-US"/>
           </a:p>
@@ -1666,7 +1670,7 @@
           <a:p>
             <a:fld id="{241EB5C9-1307-BA42-ABA2-0BC069CD8E7F}" type="datetimeFigureOut">
               <a:rPr lang="en-US" smtClean="0"/>
-              <a:t>9/28/2026</a:t>
+              <a:t>9/29/2026</a:t>
             </a:fld>
             <a:endParaRPr lang="en-US"/>
           </a:p>
@@ -1951,7 +1955,7 @@
           <a:p>
             <a:fld id="{241EB5C9-1307-BA42-ABA2-0BC069CD8E7F}" type="datetimeFigureOut">
               <a:rPr lang="en-US" smtClean="0"/>
-              <a:t>9/28/2026</a:t>
+              <a:t>9/29/2026</a:t>
             </a:fld>
             <a:endParaRPr lang="en-US"/>
           </a:p>
@@ -2370,7 +2374,7 @@
           <a:p>
             <a:fld id="{241EB5C9-1307-BA42-ABA2-0BC069CD8E7F}" type="datetimeFigureOut">
               <a:rPr lang="en-US" smtClean="0"/>
-              <a:t>9/28/2026</a:t>
+              <a:t>9/29/2026</a:t>
             </a:fld>
             <a:endParaRPr lang="en-US"/>
           </a:p>
@@ -2487,7 +2491,7 @@
           <a:p>
             <a:fld id="{241EB5C9-1307-BA42-ABA2-0BC069CD8E7F}" type="datetimeFigureOut">
               <a:rPr lang="en-US" smtClean="0"/>
-              <a:t>9/28/2026</a:t>
+              <a:t>9/29/2026</a:t>
             </a:fld>
             <a:endParaRPr lang="en-US"/>
           </a:p>
@@ -2582,7 +2586,7 @@
           <a:p>
             <a:fld id="{241EB5C9-1307-BA42-ABA2-0BC069CD8E7F}" type="datetimeFigureOut">
               <a:rPr lang="en-US" smtClean="0"/>
-              <a:t>9/28/2026</a:t>
+              <a:t>9/29/2026</a:t>
             </a:fld>
             <a:endParaRPr lang="en-US"/>
           </a:p>
@@ -2857,7 +2861,7 @@
           <a:p>
             <a:fld id="{241EB5C9-1307-BA42-ABA2-0BC069CD8E7F}" type="datetimeFigureOut">
               <a:rPr lang="en-US" smtClean="0"/>
-              <a:t>9/28/2026</a:t>
+              <a:t>9/29/2026</a:t>
             </a:fld>
             <a:endParaRPr lang="en-US"/>
           </a:p>
@@ -3109,7 +3113,7 @@
           <a:p>
             <a:fld id="{241EB5C9-1307-BA42-ABA2-0BC069CD8E7F}" type="datetimeFigureOut">
               <a:rPr lang="en-US" smtClean="0"/>
-              <a:t>9/28/2026</a:t>
+              <a:t>9/29/2026</a:t>
             </a:fld>
             <a:endParaRPr lang="en-US"/>
           </a:p>
@@ -3320,7 +3324,7 @@
           <a:p>
             <a:fld id="{241EB5C9-1307-BA42-ABA2-0BC069CD8E7F}" type="datetimeFigureOut">
               <a:rPr lang="en-US" smtClean="0"/>
-              <a:t>9/28/2026</a:t>
+              <a:t>9/29/2026</a:t>
             </a:fld>
             <a:endParaRPr lang="en-US"/>
           </a:p>
@@ -5485,7 +5489,7 @@
                           <m:begChr m:val="["/>
                           <m:endChr m:val="]"/>
                           <m:ctrlPr>
-                            <a:rPr lang="ar-AE" i="1">
+                            <a:rPr lang="ar-AE" b="0" i="1" smtClean="0">
                               <a:latin typeface="Cambria Math" panose="02040503050406030204" pitchFamily="18" charset="0"/>
                             </a:rPr>
                           </m:ctrlPr>
@@ -14012,8 +14016,8 @@
           </a:p>
         </p:txBody>
       </p:sp>
-      <mc:AlternateContent xmlns:mc="http://schemas.openxmlformats.org/markup-compatibility/2006" xmlns:a14="http://schemas.microsoft.com/office/drawing/2010/main">
-        <mc:Choice Requires="a14">
+      <mc:AlternateContent xmlns:mc="http://schemas.openxmlformats.org/markup-compatibility/2006">
+        <mc:Choice xmlns:a14="http://schemas.microsoft.com/office/drawing/2010/main" Requires="a14">
           <p:sp>
             <p:nvSpPr>
               <p:cNvPr id="3" name="Content Placeholder 2">
@@ -14090,7 +14094,7 @@
                 </a:r>
                 <a:r>
                   <a:rPr lang="en-US" b="1" dirty="0"/>
-                  <a:t>variable value </a:t>
+                  <a:t>fixed variable value </a:t>
                 </a:r>
                 <a14:m>
                   <m:oMath xmlns:m="http://schemas.openxmlformats.org/officeDocument/2006/math">
@@ -14122,7 +14126,7 @@
             </p:txBody>
           </p:sp>
         </mc:Choice>
-        <mc:Fallback xmlns="">
+        <mc:Fallback>
           <p:sp>
             <p:nvSpPr>
               <p:cNvPr id="3" name="Content Placeholder 2">
@@ -20474,7 +20478,7 @@
         </p:spPr>
         <p:txBody>
           <a:bodyPr>
-            <a:normAutofit fontScale="92500" lnSpcReduction="10000"/>
+            <a:normAutofit fontScale="92500"/>
           </a:bodyPr>
           <a:lstStyle/>
           <a:p>
@@ -20507,18 +20511,15 @@
             <a:pPr lvl="0"/>
             <a:r>
               <a:rPr dirty="0"/>
-              <a:t>Logistic regression widely used as a classif</a:t>
+              <a:t>Logistic regression is linear model, with a</a:t>
             </a:r>
             <a:r>
               <a:rPr lang="en-US" dirty="0"/>
-              <a:t>ier</a:t>
-            </a:r>
-          </a:p>
-          <a:p>
-            <a:pPr lvl="0"/>
+              <a:t> discrete</a:t>
+            </a:r>
             <a:r>
               <a:rPr dirty="0"/>
-              <a:t>Logistic regression is linear model, with a binary response or label values, </a:t>
+              <a:t> binary response, </a:t>
             </a:r>
             <a:r>
               <a:rPr dirty="0">
@@ -20770,33 +20771,15 @@
                                   </p:childTnLst>
                                 </p:cTn>
                               </p:par>
-                            </p:childTnLst>
-                          </p:cTn>
-                        </p:par>
-                      </p:childTnLst>
-                    </p:cTn>
-                  </p:par>
-                  <p:par>
-                    <p:cTn id="19" fill="hold">
-                      <p:stCondLst>
-                        <p:cond delay="indefinite"/>
-                      </p:stCondLst>
-                      <p:childTnLst>
-                        <p:par>
-                          <p:cTn id="20" fill="hold">
-                            <p:stCondLst>
-                              <p:cond delay="0"/>
-                            </p:stCondLst>
-                            <p:childTnLst>
                               <p:par>
-                                <p:cTn id="21" presetID="1" presetClass="entr" presetSubtype="0" fill="hold" nodeType="clickEffect">
+                                <p:cTn id="19" presetID="1" presetClass="entr" presetSubtype="0" fill="hold" nodeType="withEffect">
                                   <p:stCondLst>
                                     <p:cond delay="0"/>
                                   </p:stCondLst>
                                   <p:childTnLst>
                                     <p:set>
                                       <p:cBhvr>
-                                        <p:cTn id="22" dur="1" fill="hold">
+                                        <p:cTn id="20" dur="1" fill="hold">
                                           <p:stCondLst>
                                             <p:cond delay="0"/>
                                           </p:stCondLst>
@@ -20820,14 +20803,14 @@
                                 </p:cTn>
                               </p:par>
                               <p:par>
-                                <p:cTn id="23" presetID="1" presetClass="entr" presetSubtype="0" fill="hold" nodeType="withEffect">
+                                <p:cTn id="21" presetID="1" presetClass="entr" presetSubtype="0" fill="hold" nodeType="withEffect">
                                   <p:stCondLst>
                                     <p:cond delay="0"/>
                                   </p:stCondLst>
                                   <p:childTnLst>
                                     <p:set>
                                       <p:cBhvr>
-                                        <p:cTn id="24" dur="1" fill="hold">
+                                        <p:cTn id="22" dur="1" fill="hold">
                                           <p:stCondLst>
                                             <p:cond delay="0"/>
                                           </p:stCondLst>
@@ -20836,37 +20819,6 @@
                                           <p:spTgt spid="3">
                                             <p:txEl>
                                               <p:pRg st="6" end="6"/>
-                                            </p:txEl>
-                                          </p:spTgt>
-                                        </p:tgtEl>
-                                        <p:attrNameLst>
-                                          <p:attrName>style.visibility</p:attrName>
-                                        </p:attrNameLst>
-                                      </p:cBhvr>
-                                      <p:to>
-                                        <p:strVal val="visible"/>
-                                      </p:to>
-                                    </p:set>
-                                  </p:childTnLst>
-                                </p:cTn>
-                              </p:par>
-                              <p:par>
-                                <p:cTn id="25" presetID="1" presetClass="entr" presetSubtype="0" fill="hold" nodeType="withEffect">
-                                  <p:stCondLst>
-                                    <p:cond delay="0"/>
-                                  </p:stCondLst>
-                                  <p:childTnLst>
-                                    <p:set>
-                                      <p:cBhvr>
-                                        <p:cTn id="26" dur="1" fill="hold">
-                                          <p:stCondLst>
-                                            <p:cond delay="0"/>
-                                          </p:stCondLst>
-                                        </p:cTn>
-                                        <p:tgtEl>
-                                          <p:spTgt spid="3">
-                                            <p:txEl>
-                                              <p:pRg st="7" end="7"/>
                                             </p:txEl>
                                           </p:spTgt>
                                         </p:tgtEl>
@@ -20953,8 +20905,8 @@
           </a:p>
         </p:txBody>
       </p:sp>
-      <mc:AlternateContent xmlns:mc="http://schemas.openxmlformats.org/markup-compatibility/2006" xmlns:a14="http://schemas.microsoft.com/office/drawing/2010/main">
-        <mc:Choice Requires="a14">
+      <mc:AlternateContent xmlns:mc="http://schemas.openxmlformats.org/markup-compatibility/2006">
+        <mc:Choice xmlns:a14="http://schemas.microsoft.com/office/drawing/2010/main" Requires="a14">
           <p:sp>
             <p:nvSpPr>
               <p:cNvPr id="3" name="Content Placeholder 2"/>
@@ -20973,7 +20925,7 @@
             </p:spPr>
             <p:txBody>
               <a:bodyPr>
-                <a:normAutofit lnSpcReduction="10000"/>
+                <a:normAutofit fontScale="92500" lnSpcReduction="20000"/>
               </a:bodyPr>
               <a:lstStyle/>
               <a:p>
@@ -21071,29 +21023,17 @@
                       </m:sub>
                     </m:sSub>
                     <m:r>
-                      <a:rPr lang="en-US" b="0" i="1" smtClean="0">
-                        <a:latin typeface="Cambria Math" panose="02040503050406030204" pitchFamily="18" charset="0"/>
-                      </a:rPr>
-                      <m:t>)</m:t>
-                    </m:r>
-                    <m:r>
                       <a:rPr lang="ar-AE">
                         <a:latin typeface="Cambria Math" panose="02040503050406030204" pitchFamily="18" charset="0"/>
                       </a:rPr>
                       <m:t>=1</m:t>
                     </m:r>
-                  </m:oMath>
-                </a14:m>
-                <a:r>
-                  <a:rPr lang="en-US" dirty="0"/>
-                  <a:t>,</a:t>
-                </a:r>
-                <a:r>
-                  <a:rPr lang="ar-AE" dirty="0"/>
-                  <a:t> </a:t>
-                </a:r>
-                <a14:m>
-                  <m:oMath xmlns:m="http://schemas.openxmlformats.org/officeDocument/2006/math">
+                    <m:r>
+                      <a:rPr lang="en-US" b="0" i="0" smtClean="0">
+                        <a:latin typeface="Cambria Math" panose="02040503050406030204" pitchFamily="18" charset="0"/>
+                      </a:rPr>
+                      <m:t>)=</m:t>
+                    </m:r>
                     <m:sSub>
                       <m:sSubPr>
                         <m:ctrlPr>
@@ -21361,62 +21301,260 @@
                       <m:f>
                         <m:fPr>
                           <m:ctrlPr>
-                            <a:rPr lang="en-US" b="0" i="1" smtClean="0">
+                            <a:rPr lang="en-US" i="1">
                               <a:latin typeface="Cambria Math" panose="02040503050406030204" pitchFamily="18" charset="0"/>
                             </a:rPr>
                           </m:ctrlPr>
                         </m:fPr>
                         <m:num>
-                          <m:r>
-                            <a:rPr lang="en-US" b="0" i="1" smtClean="0">
-                              <a:latin typeface="Cambria Math" panose="02040503050406030204" pitchFamily="18" charset="0"/>
-                            </a:rPr>
-                            <m:t>𝑝𝑟𝑜𝑏𝑎𝑏𝑖𝑙𝑖𝑡𝑦</m:t>
-                          </m:r>
-                          <m:r>
-                            <a:rPr lang="en-US" b="0" i="1" smtClean="0">
-                              <a:latin typeface="Cambria Math" panose="02040503050406030204" pitchFamily="18" charset="0"/>
-                            </a:rPr>
-                            <m:t> </m:t>
-                          </m:r>
-                          <m:r>
-                            <a:rPr lang="en-US" b="0" i="1" smtClean="0">
-                              <a:latin typeface="Cambria Math" panose="02040503050406030204" pitchFamily="18" charset="0"/>
-                            </a:rPr>
-                            <m:t>𝑜𝑓</m:t>
-                          </m:r>
-                          <m:r>
-                            <a:rPr lang="en-US" b="0" i="1" smtClean="0">
-                              <a:latin typeface="Cambria Math" panose="02040503050406030204" pitchFamily="18" charset="0"/>
-                            </a:rPr>
-                            <m:t> 1</m:t>
-                          </m:r>
+                          <m:f>
+                            <m:fPr>
+                              <m:ctrlPr>
+                                <a:rPr lang="en-US" i="1">
+                                  <a:latin typeface="Cambria Math" panose="02040503050406030204" pitchFamily="18" charset="0"/>
+                                </a:rPr>
+                              </m:ctrlPr>
+                            </m:fPr>
+                            <m:num>
+                              <m:sSub>
+                                <m:sSubPr>
+                                  <m:ctrlPr>
+                                    <a:rPr lang="en-US" i="1">
+                                      <a:latin typeface="Cambria Math" panose="02040503050406030204" pitchFamily="18" charset="0"/>
+                                    </a:rPr>
+                                  </m:ctrlPr>
+                                </m:sSubPr>
+                                <m:e>
+                                  <m:r>
+                                    <a:rPr lang="en-US" i="1">
+                                      <a:latin typeface="Cambria Math" panose="02040503050406030204" pitchFamily="18" charset="0"/>
+                                    </a:rPr>
+                                    <m:t>𝑃</m:t>
+                                  </m:r>
+                                  <m:r>
+                                    <a:rPr lang="en-US" i="1">
+                                      <a:latin typeface="Cambria Math" panose="02040503050406030204" pitchFamily="18" charset="0"/>
+                                    </a:rPr>
+                                    <m:t>(</m:t>
+                                  </m:r>
+                                  <m:r>
+                                    <a:rPr lang="ar-AE">
+                                      <a:latin typeface="Cambria Math" panose="02040503050406030204" pitchFamily="18" charset="0"/>
+                                    </a:rPr>
+                                    <m:t>𝑦</m:t>
+                                  </m:r>
+                                </m:e>
+                                <m:sub>
+                                  <m:r>
+                                    <a:rPr lang="ar-AE">
+                                      <a:latin typeface="Cambria Math" panose="02040503050406030204" pitchFamily="18" charset="0"/>
+                                    </a:rPr>
+                                    <m:t>𝑖</m:t>
+                                  </m:r>
+                                </m:sub>
+                              </m:sSub>
+                              <m:r>
+                                <a:rPr lang="ar-AE">
+                                  <a:latin typeface="Cambria Math" panose="02040503050406030204" pitchFamily="18" charset="0"/>
+                                </a:rPr>
+                                <m:t>=1</m:t>
+                              </m:r>
+                              <m:r>
+                                <a:rPr lang="en-US">
+                                  <a:latin typeface="Cambria Math" panose="02040503050406030204" pitchFamily="18" charset="0"/>
+                                </a:rPr>
+                                <m:t>)</m:t>
+                              </m:r>
+                            </m:num>
+                            <m:den>
+                              <m:r>
+                                <a:rPr lang="en-US" i="1">
+                                  <a:latin typeface="Cambria Math" panose="02040503050406030204" pitchFamily="18" charset="0"/>
+                                </a:rPr>
+                                <m:t>1−</m:t>
+                              </m:r>
+                              <m:sSub>
+                                <m:sSubPr>
+                                  <m:ctrlPr>
+                                    <a:rPr lang="en-US" i="1">
+                                      <a:latin typeface="Cambria Math" panose="02040503050406030204" pitchFamily="18" charset="0"/>
+                                    </a:rPr>
+                                  </m:ctrlPr>
+                                </m:sSubPr>
+                                <m:e>
+                                  <m:r>
+                                    <a:rPr lang="en-US" i="1">
+                                      <a:latin typeface="Cambria Math" panose="02040503050406030204" pitchFamily="18" charset="0"/>
+                                    </a:rPr>
+                                    <m:t>𝑃</m:t>
+                                  </m:r>
+                                  <m:r>
+                                    <a:rPr lang="en-US" i="1">
+                                      <a:latin typeface="Cambria Math" panose="02040503050406030204" pitchFamily="18" charset="0"/>
+                                    </a:rPr>
+                                    <m:t>(</m:t>
+                                  </m:r>
+                                  <m:r>
+                                    <a:rPr lang="ar-AE">
+                                      <a:latin typeface="Cambria Math" panose="02040503050406030204" pitchFamily="18" charset="0"/>
+                                    </a:rPr>
+                                    <m:t>𝑦</m:t>
+                                  </m:r>
+                                </m:e>
+                                <m:sub>
+                                  <m:r>
+                                    <a:rPr lang="ar-AE">
+                                      <a:latin typeface="Cambria Math" panose="02040503050406030204" pitchFamily="18" charset="0"/>
+                                    </a:rPr>
+                                    <m:t>𝑖</m:t>
+                                  </m:r>
+                                </m:sub>
+                              </m:sSub>
+                              <m:r>
+                                <a:rPr lang="ar-AE">
+                                  <a:latin typeface="Cambria Math" panose="02040503050406030204" pitchFamily="18" charset="0"/>
+                                </a:rPr>
+                                <m:t>=1</m:t>
+                              </m:r>
+                              <m:r>
+                                <a:rPr lang="en-US">
+                                  <a:latin typeface="Cambria Math" panose="02040503050406030204" pitchFamily="18" charset="0"/>
+                                </a:rPr>
+                                <m:t>)</m:t>
+                              </m:r>
+                            </m:den>
+                          </m:f>
                         </m:num>
                         <m:den>
-                          <m:r>
-                            <a:rPr lang="en-US" b="0" i="1" smtClean="0">
-                              <a:latin typeface="Cambria Math" panose="02040503050406030204" pitchFamily="18" charset="0"/>
-                            </a:rPr>
-                            <m:t>𝑝𝑟𝑜𝑏𝑎𝑏𝑖𝑙𝑖𝑡𝑦</m:t>
-                          </m:r>
-                          <m:r>
-                            <a:rPr lang="en-US" b="0" i="1" smtClean="0">
-                              <a:latin typeface="Cambria Math" panose="02040503050406030204" pitchFamily="18" charset="0"/>
-                            </a:rPr>
-                            <m:t> </m:t>
-                          </m:r>
-                          <m:r>
-                            <a:rPr lang="en-US" b="0" i="1" smtClean="0">
-                              <a:latin typeface="Cambria Math" panose="02040503050406030204" pitchFamily="18" charset="0"/>
-                            </a:rPr>
-                            <m:t>𝑜𝑓</m:t>
-                          </m:r>
-                          <m:r>
-                            <a:rPr lang="en-US" b="0" i="1" smtClean="0">
-                              <a:latin typeface="Cambria Math" panose="02040503050406030204" pitchFamily="18" charset="0"/>
-                            </a:rPr>
-                            <m:t> 0</m:t>
-                          </m:r>
+                          <m:f>
+                            <m:fPr>
+                              <m:ctrlPr>
+                                <a:rPr lang="en-US" i="1">
+                                  <a:latin typeface="Cambria Math" panose="02040503050406030204" pitchFamily="18" charset="0"/>
+                                </a:rPr>
+                              </m:ctrlPr>
+                            </m:fPr>
+                            <m:num>
+                              <m:sSub>
+                                <m:sSubPr>
+                                  <m:ctrlPr>
+                                    <a:rPr lang="en-US" i="1">
+                                      <a:latin typeface="Cambria Math" panose="02040503050406030204" pitchFamily="18" charset="0"/>
+                                    </a:rPr>
+                                  </m:ctrlPr>
+                                </m:sSubPr>
+                                <m:e>
+                                  <m:r>
+                                    <a:rPr lang="en-US" i="1">
+                                      <a:latin typeface="Cambria Math" panose="02040503050406030204" pitchFamily="18" charset="0"/>
+                                    </a:rPr>
+                                    <m:t>𝑃</m:t>
+                                  </m:r>
+                                  <m:r>
+                                    <a:rPr lang="en-US" i="1">
+                                      <a:latin typeface="Cambria Math" panose="02040503050406030204" pitchFamily="18" charset="0"/>
+                                    </a:rPr>
+                                    <m:t>(</m:t>
+                                  </m:r>
+                                  <m:r>
+                                    <a:rPr lang="ar-AE">
+                                      <a:latin typeface="Cambria Math" panose="02040503050406030204" pitchFamily="18" charset="0"/>
+                                    </a:rPr>
+                                    <m:t>𝑦</m:t>
+                                  </m:r>
+                                </m:e>
+                                <m:sub>
+                                  <m:r>
+                                    <a:rPr lang="ar-AE">
+                                      <a:latin typeface="Cambria Math" panose="02040503050406030204" pitchFamily="18" charset="0"/>
+                                    </a:rPr>
+                                    <m:t>𝑖</m:t>
+                                  </m:r>
+                                </m:sub>
+                              </m:sSub>
+                              <m:r>
+                                <a:rPr lang="ar-AE">
+                                  <a:latin typeface="Cambria Math" panose="02040503050406030204" pitchFamily="18" charset="0"/>
+                                </a:rPr>
+                                <m:t>=</m:t>
+                              </m:r>
+                              <m:r>
+                                <a:rPr lang="en-US">
+                                  <a:latin typeface="Cambria Math" panose="02040503050406030204" pitchFamily="18" charset="0"/>
+                                </a:rPr>
+                                <m:t>0</m:t>
+                              </m:r>
+                              <m:r>
+                                <a:rPr lang="en-US">
+                                  <a:latin typeface="Cambria Math" panose="02040503050406030204" pitchFamily="18" charset="0"/>
+                                </a:rPr>
+                                <m:t>)</m:t>
+                              </m:r>
+                            </m:num>
+                            <m:den>
+                              <m:r>
+                                <a:rPr lang="en-US" i="1">
+                                  <a:latin typeface="Cambria Math" panose="02040503050406030204" pitchFamily="18" charset="0"/>
+                                </a:rPr>
+                                <m:t>1−</m:t>
+                              </m:r>
+                              <m:sSub>
+                                <m:sSubPr>
+                                  <m:ctrlPr>
+                                    <a:rPr lang="en-US" i="1">
+                                      <a:latin typeface="Cambria Math" panose="02040503050406030204" pitchFamily="18" charset="0"/>
+                                    </a:rPr>
+                                  </m:ctrlPr>
+                                </m:sSubPr>
+                                <m:e>
+                                  <m:r>
+                                    <a:rPr lang="en-US" i="1">
+                                      <a:latin typeface="Cambria Math" panose="02040503050406030204" pitchFamily="18" charset="0"/>
+                                    </a:rPr>
+                                    <m:t>𝑃</m:t>
+                                  </m:r>
+                                  <m:r>
+                                    <a:rPr lang="en-US" i="1">
+                                      <a:latin typeface="Cambria Math" panose="02040503050406030204" pitchFamily="18" charset="0"/>
+                                    </a:rPr>
+                                    <m:t>(</m:t>
+                                  </m:r>
+                                  <m:r>
+                                    <a:rPr lang="ar-AE">
+                                      <a:latin typeface="Cambria Math" panose="02040503050406030204" pitchFamily="18" charset="0"/>
+                                    </a:rPr>
+                                    <m:t>𝑦</m:t>
+                                  </m:r>
+                                </m:e>
+                                <m:sub>
+                                  <m:r>
+                                    <a:rPr lang="ar-AE">
+                                      <a:latin typeface="Cambria Math" panose="02040503050406030204" pitchFamily="18" charset="0"/>
+                                    </a:rPr>
+                                    <m:t>𝑖</m:t>
+                                  </m:r>
+                                </m:sub>
+                              </m:sSub>
+                              <m:r>
+                                <a:rPr lang="ar-AE">
+                                  <a:latin typeface="Cambria Math" panose="02040503050406030204" pitchFamily="18" charset="0"/>
+                                </a:rPr>
+                                <m:t>=</m:t>
+                              </m:r>
+                              <m:r>
+                                <a:rPr lang="en-US">
+                                  <a:latin typeface="Cambria Math" panose="02040503050406030204" pitchFamily="18" charset="0"/>
+                                </a:rPr>
+                                <m:t>0</m:t>
+                              </m:r>
+                              <m:r>
+                                <a:rPr lang="en-US">
+                                  <a:latin typeface="Cambria Math" panose="02040503050406030204" pitchFamily="18" charset="0"/>
+                                </a:rPr>
+                                <m:t>)</m:t>
+                              </m:r>
+                            </m:den>
+                          </m:f>
                         </m:den>
                       </m:f>
                       <m:r>
@@ -21574,7 +21712,7 @@
             </p:txBody>
           </p:sp>
         </mc:Choice>
-        <mc:Fallback xmlns="">
+        <mc:Fallback>
           <p:sp>
             <p:nvSpPr>
               <p:cNvPr id="3" name="Content Placeholder 2"/>
@@ -21593,7 +21731,7 @@
               <a:blipFill>
                 <a:blip r:embed="rId2"/>
                 <a:stretch>
-                  <a:fillRect l="-1111" t="-2389"/>
+                  <a:fillRect l="-963" t="-2901"/>
                 </a:stretch>
               </a:blipFill>
             </p:spPr>
@@ -21617,289 +21755,6 @@
   <p:clrMapOvr>
     <a:masterClrMapping/>
   </p:clrMapOvr>
-  <p:timing>
-    <p:tnLst>
-      <p:par>
-        <p:cTn id="1" dur="indefinite" restart="never" nodeType="tmRoot">
-          <p:childTnLst>
-            <p:seq concurrent="1" nextAc="seek">
-              <p:cTn id="2" dur="indefinite" nodeType="mainSeq">
-                <p:childTnLst>
-                  <p:par>
-                    <p:cTn id="3" fill="hold">
-                      <p:stCondLst>
-                        <p:cond delay="indefinite"/>
-                      </p:stCondLst>
-                      <p:childTnLst>
-                        <p:par>
-                          <p:cTn id="4" fill="hold">
-                            <p:stCondLst>
-                              <p:cond delay="0"/>
-                            </p:stCondLst>
-                            <p:childTnLst>
-                              <p:par>
-                                <p:cTn id="5" presetID="1" presetClass="entr" presetSubtype="0" fill="hold" nodeType="clickEffect">
-                                  <p:stCondLst>
-                                    <p:cond delay="0"/>
-                                  </p:stCondLst>
-                                  <p:childTnLst>
-                                    <p:set>
-                                      <p:cBhvr>
-                                        <p:cTn id="6" dur="1" fill="hold">
-                                          <p:stCondLst>
-                                            <p:cond delay="0"/>
-                                          </p:stCondLst>
-                                        </p:cTn>
-                                        <p:tgtEl>
-                                          <p:spTgt spid="3">
-                                            <p:txEl>
-                                              <p:pRg st="1" end="1"/>
-                                            </p:txEl>
-                                          </p:spTgt>
-                                        </p:tgtEl>
-                                        <p:attrNameLst>
-                                          <p:attrName>style.visibility</p:attrName>
-                                        </p:attrNameLst>
-                                      </p:cBhvr>
-                                      <p:to>
-                                        <p:strVal val="visible"/>
-                                      </p:to>
-                                    </p:set>
-                                  </p:childTnLst>
-                                </p:cTn>
-                              </p:par>
-                              <p:par>
-                                <p:cTn id="7" presetID="1" presetClass="entr" presetSubtype="0" fill="hold" nodeType="withEffect">
-                                  <p:stCondLst>
-                                    <p:cond delay="0"/>
-                                  </p:stCondLst>
-                                  <p:childTnLst>
-                                    <p:set>
-                                      <p:cBhvr>
-                                        <p:cTn id="8" dur="1" fill="hold">
-                                          <p:stCondLst>
-                                            <p:cond delay="0"/>
-                                          </p:stCondLst>
-                                        </p:cTn>
-                                        <p:tgtEl>
-                                          <p:spTgt spid="3">
-                                            <p:txEl>
-                                              <p:pRg st="2" end="2"/>
-                                            </p:txEl>
-                                          </p:spTgt>
-                                        </p:tgtEl>
-                                        <p:attrNameLst>
-                                          <p:attrName>style.visibility</p:attrName>
-                                        </p:attrNameLst>
-                                      </p:cBhvr>
-                                      <p:to>
-                                        <p:strVal val="visible"/>
-                                      </p:to>
-                                    </p:set>
-                                  </p:childTnLst>
-                                </p:cTn>
-                              </p:par>
-                              <p:par>
-                                <p:cTn id="9" presetID="1" presetClass="entr" presetSubtype="0" fill="hold" nodeType="withEffect">
-                                  <p:stCondLst>
-                                    <p:cond delay="0"/>
-                                  </p:stCondLst>
-                                  <p:childTnLst>
-                                    <p:set>
-                                      <p:cBhvr>
-                                        <p:cTn id="10" dur="1" fill="hold">
-                                          <p:stCondLst>
-                                            <p:cond delay="0"/>
-                                          </p:stCondLst>
-                                        </p:cTn>
-                                        <p:tgtEl>
-                                          <p:spTgt spid="3">
-                                            <p:txEl>
-                                              <p:pRg st="3" end="3"/>
-                                            </p:txEl>
-                                          </p:spTgt>
-                                        </p:tgtEl>
-                                        <p:attrNameLst>
-                                          <p:attrName>style.visibility</p:attrName>
-                                        </p:attrNameLst>
-                                      </p:cBhvr>
-                                      <p:to>
-                                        <p:strVal val="visible"/>
-                                      </p:to>
-                                    </p:set>
-                                  </p:childTnLst>
-                                </p:cTn>
-                              </p:par>
-                              <p:par>
-                                <p:cTn id="11" presetID="1" presetClass="entr" presetSubtype="0" fill="hold" nodeType="withEffect">
-                                  <p:stCondLst>
-                                    <p:cond delay="0"/>
-                                  </p:stCondLst>
-                                  <p:childTnLst>
-                                    <p:set>
-                                      <p:cBhvr>
-                                        <p:cTn id="12" dur="1" fill="hold">
-                                          <p:stCondLst>
-                                            <p:cond delay="0"/>
-                                          </p:stCondLst>
-                                        </p:cTn>
-                                        <p:tgtEl>
-                                          <p:spTgt spid="3">
-                                            <p:txEl>
-                                              <p:pRg st="4" end="4"/>
-                                            </p:txEl>
-                                          </p:spTgt>
-                                        </p:tgtEl>
-                                        <p:attrNameLst>
-                                          <p:attrName>style.visibility</p:attrName>
-                                        </p:attrNameLst>
-                                      </p:cBhvr>
-                                      <p:to>
-                                        <p:strVal val="visible"/>
-                                      </p:to>
-                                    </p:set>
-                                  </p:childTnLst>
-                                </p:cTn>
-                              </p:par>
-                              <p:par>
-                                <p:cTn id="13" presetID="1" presetClass="entr" presetSubtype="0" fill="hold" nodeType="withEffect">
-                                  <p:stCondLst>
-                                    <p:cond delay="0"/>
-                                  </p:stCondLst>
-                                  <p:childTnLst>
-                                    <p:set>
-                                      <p:cBhvr>
-                                        <p:cTn id="14" dur="1" fill="hold">
-                                          <p:stCondLst>
-                                            <p:cond delay="0"/>
-                                          </p:stCondLst>
-                                        </p:cTn>
-                                        <p:tgtEl>
-                                          <p:spTgt spid="3">
-                                            <p:txEl>
-                                              <p:pRg st="5" end="5"/>
-                                            </p:txEl>
-                                          </p:spTgt>
-                                        </p:tgtEl>
-                                        <p:attrNameLst>
-                                          <p:attrName>style.visibility</p:attrName>
-                                        </p:attrNameLst>
-                                      </p:cBhvr>
-                                      <p:to>
-                                        <p:strVal val="visible"/>
-                                      </p:to>
-                                    </p:set>
-                                  </p:childTnLst>
-                                </p:cTn>
-                              </p:par>
-                            </p:childTnLst>
-                          </p:cTn>
-                        </p:par>
-                      </p:childTnLst>
-                    </p:cTn>
-                  </p:par>
-                  <p:par>
-                    <p:cTn id="15" fill="hold">
-                      <p:stCondLst>
-                        <p:cond delay="indefinite"/>
-                      </p:stCondLst>
-                      <p:childTnLst>
-                        <p:par>
-                          <p:cTn id="16" fill="hold">
-                            <p:stCondLst>
-                              <p:cond delay="0"/>
-                            </p:stCondLst>
-                            <p:childTnLst>
-                              <p:par>
-                                <p:cTn id="17" presetID="1" presetClass="entr" presetSubtype="0" fill="hold" nodeType="clickEffect">
-                                  <p:stCondLst>
-                                    <p:cond delay="0"/>
-                                  </p:stCondLst>
-                                  <p:childTnLst>
-                                    <p:set>
-                                      <p:cBhvr>
-                                        <p:cTn id="18" dur="1" fill="hold">
-                                          <p:stCondLst>
-                                            <p:cond delay="0"/>
-                                          </p:stCondLst>
-                                        </p:cTn>
-                                        <p:tgtEl>
-                                          <p:spTgt spid="3">
-                                            <p:txEl>
-                                              <p:pRg st="6" end="6"/>
-                                            </p:txEl>
-                                          </p:spTgt>
-                                        </p:tgtEl>
-                                        <p:attrNameLst>
-                                          <p:attrName>style.visibility</p:attrName>
-                                        </p:attrNameLst>
-                                      </p:cBhvr>
-                                      <p:to>
-                                        <p:strVal val="visible"/>
-                                      </p:to>
-                                    </p:set>
-                                  </p:childTnLst>
-                                </p:cTn>
-                              </p:par>
-                              <p:par>
-                                <p:cTn id="19" presetID="1" presetClass="entr" presetSubtype="0" fill="hold" nodeType="withEffect">
-                                  <p:stCondLst>
-                                    <p:cond delay="0"/>
-                                  </p:stCondLst>
-                                  <p:childTnLst>
-                                    <p:set>
-                                      <p:cBhvr>
-                                        <p:cTn id="20" dur="1" fill="hold">
-                                          <p:stCondLst>
-                                            <p:cond delay="0"/>
-                                          </p:stCondLst>
-                                        </p:cTn>
-                                        <p:tgtEl>
-                                          <p:spTgt spid="3">
-                                            <p:txEl>
-                                              <p:pRg st="7" end="7"/>
-                                            </p:txEl>
-                                          </p:spTgt>
-                                        </p:tgtEl>
-                                        <p:attrNameLst>
-                                          <p:attrName>style.visibility</p:attrName>
-                                        </p:attrNameLst>
-                                      </p:cBhvr>
-                                      <p:to>
-                                        <p:strVal val="visible"/>
-                                      </p:to>
-                                    </p:set>
-                                  </p:childTnLst>
-                                </p:cTn>
-                              </p:par>
-                            </p:childTnLst>
-                          </p:cTn>
-                        </p:par>
-                      </p:childTnLst>
-                    </p:cTn>
-                  </p:par>
-                </p:childTnLst>
-              </p:cTn>
-              <p:prevCondLst>
-                <p:cond evt="onPrev" delay="0">
-                  <p:tgtEl>
-                    <p:sldTgt/>
-                  </p:tgtEl>
-                </p:cond>
-              </p:prevCondLst>
-              <p:nextCondLst>
-                <p:cond evt="onNext" delay="0">
-                  <p:tgtEl>
-                    <p:sldTgt/>
-                  </p:tgtEl>
-                </p:cond>
-              </p:nextCondLst>
-            </p:seq>
-          </p:childTnLst>
-        </p:cTn>
-      </p:par>
-    </p:tnLst>
-  </p:timing>
 </p:sld>
 </file>
 
@@ -23105,6 +22960,7 @@
                           <m:ctrlPr>
                             <a:rPr lang="en-US" i="1">
                               <a:latin typeface="Cambria Math" panose="02040503050406030204" pitchFamily="18" charset="0"/>
+                              <a:ea typeface="Cambria Math" panose="02040503050406030204" pitchFamily="18" charset="0"/>
                             </a:rPr>
                           </m:ctrlPr>
                         </m:sSubPr>
@@ -23426,7 +23282,7 @@
                       <m:d>
                         <m:dPr>
                           <m:ctrlPr>
-                            <a:rPr lang="ar-AE" i="1">
+                            <a:rPr lang="en-US" b="0" i="1" smtClean="0">
                               <a:latin typeface="Cambria Math" panose="02040503050406030204" pitchFamily="18" charset="0"/>
                             </a:rPr>
                           </m:ctrlPr>
@@ -32665,7 +32521,7 @@
                       <m:d>
                         <m:dPr>
                           <m:ctrlPr>
-                            <a:rPr lang="en-US" b="0" i="1" smtClean="0">
+                            <a:rPr lang="ar-AE" i="1">
                               <a:latin typeface="Cambria Math" panose="02040503050406030204" pitchFamily="18" charset="0"/>
                             </a:rPr>
                           </m:ctrlPr>
@@ -39523,6 +39379,7 @@
                           <m:ctrlPr>
                             <a:rPr lang="en-US" b="0" i="1" smtClean="0">
                               <a:latin typeface="Cambria Math" panose="02040503050406030204" pitchFamily="18" charset="0"/>
+                              <a:ea typeface="Cambria Math" panose="02040503050406030204" pitchFamily="18" charset="0"/>
                             </a:rPr>
                           </m:ctrlPr>
                         </m:fPr>
@@ -43606,6 +43463,782 @@
         <p:cNvPr id="1" name="">
           <a:extLst>
             <a:ext uri="{FF2B5EF4-FFF2-40B4-BE49-F238E27FC236}">
+              <a16:creationId xmlns:a16="http://schemas.microsoft.com/office/drawing/2014/main" id="{88F7F695-D1C6-0DFF-7782-7EFEE1A0BECD}"/>
+            </a:ext>
+          </a:extLst>
+        </p:cNvPr>
+        <p:cNvGrpSpPr/>
+        <p:nvPr/>
+      </p:nvGrpSpPr>
+      <p:grpSpPr>
+        <a:xfrm>
+          <a:off x="0" y="0"/>
+          <a:ext cx="0" cy="0"/>
+          <a:chOff x="0" y="0"/>
+          <a:chExt cx="0" cy="0"/>
+        </a:xfrm>
+      </p:grpSpPr>
+      <p:sp>
+        <p:nvSpPr>
+          <p:cNvPr id="2" name="Title 1">
+            <a:extLst>
+              <a:ext uri="{FF2B5EF4-FFF2-40B4-BE49-F238E27FC236}">
+                <a16:creationId xmlns:a16="http://schemas.microsoft.com/office/drawing/2014/main" id="{864581DD-AFEF-CF00-9905-1F2D7F285DAD}"/>
+              </a:ext>
+            </a:extLst>
+          </p:cNvPr>
+          <p:cNvSpPr>
+            <a:spLocks noGrp="1"/>
+          </p:cNvSpPr>
+          <p:nvPr>
+            <p:ph type="ctrTitle"/>
+          </p:nvPr>
+        </p:nvSpPr>
+        <p:spPr/>
+        <p:txBody>
+          <a:bodyPr/>
+          <a:lstStyle/>
+          <a:p>
+            <a:r>
+              <a:rPr lang="en-US" dirty="0"/>
+              <a:t>Ordinal Regression </a:t>
+            </a:r>
+          </a:p>
+        </p:txBody>
+      </p:sp>
+    </p:spTree>
+    <p:extLst>
+      <p:ext uri="{BB962C8B-B14F-4D97-AF65-F5344CB8AC3E}">
+        <p14:creationId xmlns:p14="http://schemas.microsoft.com/office/powerpoint/2010/main" val="2926988659"/>
+      </p:ext>
+    </p:extLst>
+  </p:cSld>
+  <p:clrMapOvr>
+    <a:masterClrMapping/>
+  </p:clrMapOvr>
+</p:sld>
+</file>
+
+<file path=ppt/slides/slide62.xml><?xml version="1.0" encoding="utf-8"?>
+<p:sld xmlns:a="http://schemas.openxmlformats.org/drawingml/2006/main" xmlns:r="http://schemas.openxmlformats.org/officeDocument/2006/relationships" xmlns:p="http://schemas.openxmlformats.org/presentationml/2006/main">
+  <p:cSld>
+    <p:spTree>
+      <p:nvGrpSpPr>
+        <p:cNvPr id="1" name="">
+          <a:extLst>
+            <a:ext uri="{FF2B5EF4-FFF2-40B4-BE49-F238E27FC236}">
+              <a16:creationId xmlns:a16="http://schemas.microsoft.com/office/drawing/2014/main" id="{D3F87FCC-2F15-05A8-72C7-6E37D9B34595}"/>
+            </a:ext>
+          </a:extLst>
+        </p:cNvPr>
+        <p:cNvGrpSpPr/>
+        <p:nvPr/>
+      </p:nvGrpSpPr>
+      <p:grpSpPr>
+        <a:xfrm>
+          <a:off x="0" y="0"/>
+          <a:ext cx="0" cy="0"/>
+          <a:chOff x="0" y="0"/>
+          <a:chExt cx="0" cy="0"/>
+        </a:xfrm>
+      </p:grpSpPr>
+      <p:sp>
+        <p:nvSpPr>
+          <p:cNvPr id="2" name="Title 1">
+            <a:extLst>
+              <a:ext uri="{FF2B5EF4-FFF2-40B4-BE49-F238E27FC236}">
+                <a16:creationId xmlns:a16="http://schemas.microsoft.com/office/drawing/2014/main" id="{03456D64-0B84-563B-8907-41C08659B54B}"/>
+              </a:ext>
+            </a:extLst>
+          </p:cNvPr>
+          <p:cNvSpPr>
+            <a:spLocks noGrp="1"/>
+          </p:cNvSpPr>
+          <p:nvPr>
+            <p:ph type="title"/>
+          </p:nvPr>
+        </p:nvSpPr>
+        <p:spPr/>
+        <p:txBody>
+          <a:bodyPr/>
+          <a:lstStyle/>
+          <a:p>
+            <a:pPr marL="0" lvl="0" indent="0">
+              <a:buNone/>
+            </a:pPr>
+            <a:r>
+              <a:rPr lang="en-US" dirty="0"/>
+              <a:t>Ordinal regression </a:t>
+            </a:r>
+            <a:endParaRPr dirty="0"/>
+          </a:p>
+        </p:txBody>
+      </p:sp>
+      <mc:AlternateContent xmlns:mc="http://schemas.openxmlformats.org/markup-compatibility/2006">
+        <mc:Choice xmlns:a14="http://schemas.microsoft.com/office/drawing/2010/main" Requires="a14">
+          <p:sp>
+            <p:nvSpPr>
+              <p:cNvPr id="3" name="Content Placeholder 2">
+                <a:extLst>
+                  <a:ext uri="{FF2B5EF4-FFF2-40B4-BE49-F238E27FC236}">
+                    <a16:creationId xmlns:a16="http://schemas.microsoft.com/office/drawing/2014/main" id="{FDCC5C27-9615-6DC7-8E87-E9A919758ECD}"/>
+                  </a:ext>
+                </a:extLst>
+              </p:cNvPr>
+              <p:cNvSpPr>
+                <a:spLocks noGrp="1"/>
+              </p:cNvSpPr>
+              <p:nvPr>
+                <p:ph idx="1"/>
+              </p:nvPr>
+            </p:nvSpPr>
+            <p:spPr/>
+            <p:txBody>
+              <a:bodyPr>
+                <a:normAutofit/>
+              </a:bodyPr>
+              <a:lstStyle/>
+              <a:p>
+                <a:pPr marL="0" lvl="0" indent="0">
+                  <a:buNone/>
+                </a:pPr>
+                <a:r>
+                  <a:rPr lang="en-US" dirty="0"/>
+                  <a:t>How do we create a model for ordered responses? </a:t>
+                </a:r>
+              </a:p>
+              <a:p>
+                <a:pPr lvl="0"/>
+                <a:r>
+                  <a:rPr lang="en-US" dirty="0"/>
+                  <a:t>The rank in the n-level ordered response needs to be estimated     </a:t>
+                </a:r>
+              </a:p>
+              <a:p>
+                <a:pPr marL="0" lvl="0" indent="0">
+                  <a:buNone/>
+                </a:pPr>
+                <a14:m>
+                  <m:oMathPara xmlns:m="http://schemas.openxmlformats.org/officeDocument/2006/math">
+                    <m:oMath>
+                      <m:sSub>
+                        <m:sSubPr>
+                          <m:ctrlPr>
+                            <a:rPr lang="en-US" b="0" i="1" smtClean="0">
+                              <a:latin typeface="Cambria Math" panose="02040503050406030204" pitchFamily="18" charset="0"/>
+                            </a:rPr>
+                          </m:ctrlPr>
+                        </m:sSubPr>
+                        <m:e>
+                          <m:r>
+                            <a:rPr lang="en-US" b="0" i="1" smtClean="0">
+                              <a:latin typeface="Cambria Math" panose="02040503050406030204" pitchFamily="18" charset="0"/>
+                            </a:rPr>
+                            <m:t>𝑟</m:t>
+                          </m:r>
+                        </m:e>
+                        <m:sub>
+                          <m:r>
+                            <a:rPr lang="en-US" b="0" i="1" smtClean="0">
+                              <a:latin typeface="Cambria Math" panose="02040503050406030204" pitchFamily="18" charset="0"/>
+                            </a:rPr>
+                            <m:t>1</m:t>
+                          </m:r>
+                        </m:sub>
+                      </m:sSub>
+                      <m:r>
+                        <a:rPr lang="en-US" i="1" smtClean="0">
+                          <a:latin typeface="Cambria Math" panose="02040503050406030204" pitchFamily="18" charset="0"/>
+                          <a:ea typeface="Cambria Math" panose="02040503050406030204" pitchFamily="18" charset="0"/>
+                        </a:rPr>
+                        <m:t>≺</m:t>
+                      </m:r>
+                      <m:sSub>
+                        <m:sSubPr>
+                          <m:ctrlPr>
+                            <a:rPr lang="en-US" b="0" i="1" smtClean="0">
+                              <a:latin typeface="Cambria Math" panose="02040503050406030204" pitchFamily="18" charset="0"/>
+                              <a:ea typeface="Cambria Math" panose="02040503050406030204" pitchFamily="18" charset="0"/>
+                            </a:rPr>
+                          </m:ctrlPr>
+                        </m:sSubPr>
+                        <m:e>
+                          <m:r>
+                            <a:rPr lang="en-US" b="0" i="1" smtClean="0">
+                              <a:latin typeface="Cambria Math" panose="02040503050406030204" pitchFamily="18" charset="0"/>
+                              <a:ea typeface="Cambria Math" panose="02040503050406030204" pitchFamily="18" charset="0"/>
+                            </a:rPr>
+                            <m:t>𝑟</m:t>
+                          </m:r>
+                        </m:e>
+                        <m:sub>
+                          <m:r>
+                            <a:rPr lang="en-US" b="0" i="1" smtClean="0">
+                              <a:latin typeface="Cambria Math" panose="02040503050406030204" pitchFamily="18" charset="0"/>
+                              <a:ea typeface="Cambria Math" panose="02040503050406030204" pitchFamily="18" charset="0"/>
+                            </a:rPr>
+                            <m:t>2</m:t>
+                          </m:r>
+                        </m:sub>
+                      </m:sSub>
+                      <m:r>
+                        <a:rPr lang="en-US" i="1">
+                          <a:latin typeface="Cambria Math" panose="02040503050406030204" pitchFamily="18" charset="0"/>
+                          <a:ea typeface="Cambria Math" panose="02040503050406030204" pitchFamily="18" charset="0"/>
+                        </a:rPr>
+                        <m:t>≺</m:t>
+                      </m:r>
+                      <m:sSub>
+                        <m:sSubPr>
+                          <m:ctrlPr>
+                            <a:rPr lang="en-US" i="1">
+                              <a:latin typeface="Cambria Math" panose="02040503050406030204" pitchFamily="18" charset="0"/>
+                              <a:ea typeface="Cambria Math" panose="02040503050406030204" pitchFamily="18" charset="0"/>
+                            </a:rPr>
+                          </m:ctrlPr>
+                        </m:sSubPr>
+                        <m:e>
+                          <m:r>
+                            <a:rPr lang="en-US" i="1">
+                              <a:latin typeface="Cambria Math" panose="02040503050406030204" pitchFamily="18" charset="0"/>
+                              <a:ea typeface="Cambria Math" panose="02040503050406030204" pitchFamily="18" charset="0"/>
+                            </a:rPr>
+                            <m:t>𝑟</m:t>
+                          </m:r>
+                        </m:e>
+                        <m:sub>
+                          <m:r>
+                            <a:rPr lang="en-US" b="0" i="1" smtClean="0">
+                              <a:latin typeface="Cambria Math" panose="02040503050406030204" pitchFamily="18" charset="0"/>
+                              <a:ea typeface="Cambria Math" panose="02040503050406030204" pitchFamily="18" charset="0"/>
+                            </a:rPr>
+                            <m:t>3</m:t>
+                          </m:r>
+                        </m:sub>
+                      </m:sSub>
+                      <m:r>
+                        <a:rPr lang="en-US" b="0" i="1" smtClean="0">
+                          <a:latin typeface="Cambria Math" panose="02040503050406030204" pitchFamily="18" charset="0"/>
+                          <a:ea typeface="Cambria Math" panose="02040503050406030204" pitchFamily="18" charset="0"/>
+                        </a:rPr>
+                        <m:t>…</m:t>
+                      </m:r>
+                      <m:r>
+                        <a:rPr lang="en-US" i="1">
+                          <a:latin typeface="Cambria Math" panose="02040503050406030204" pitchFamily="18" charset="0"/>
+                          <a:ea typeface="Cambria Math" panose="02040503050406030204" pitchFamily="18" charset="0"/>
+                        </a:rPr>
+                        <m:t>≺</m:t>
+                      </m:r>
+                      <m:sSub>
+                        <m:sSubPr>
+                          <m:ctrlPr>
+                            <a:rPr lang="en-US" i="1">
+                              <a:latin typeface="Cambria Math" panose="02040503050406030204" pitchFamily="18" charset="0"/>
+                              <a:ea typeface="Cambria Math" panose="02040503050406030204" pitchFamily="18" charset="0"/>
+                            </a:rPr>
+                          </m:ctrlPr>
+                        </m:sSubPr>
+                        <m:e>
+                          <m:r>
+                            <a:rPr lang="en-US" i="1">
+                              <a:latin typeface="Cambria Math" panose="02040503050406030204" pitchFamily="18" charset="0"/>
+                              <a:ea typeface="Cambria Math" panose="02040503050406030204" pitchFamily="18" charset="0"/>
+                            </a:rPr>
+                            <m:t>𝑟</m:t>
+                          </m:r>
+                        </m:e>
+                        <m:sub>
+                          <m:r>
+                            <a:rPr lang="en-US" b="0" i="1" smtClean="0">
+                              <a:latin typeface="Cambria Math" panose="02040503050406030204" pitchFamily="18" charset="0"/>
+                              <a:ea typeface="Cambria Math" panose="02040503050406030204" pitchFamily="18" charset="0"/>
+                            </a:rPr>
+                            <m:t>𝑛</m:t>
+                          </m:r>
+                        </m:sub>
+                      </m:sSub>
+                    </m:oMath>
+                  </m:oMathPara>
+                </a14:m>
+                <a:endParaRPr lang="en-US" dirty="0"/>
+              </a:p>
+              <a:p>
+                <a:pPr lvl="0"/>
+                <a:r>
+                  <a:rPr lang="en-US" dirty="0"/>
+                  <a:t>We need to estimate the probabilities for the ranks   </a:t>
+                </a:r>
+              </a:p>
+              <a:p>
+                <a:pPr lvl="1"/>
+                <a:r>
+                  <a:rPr lang="en-US" dirty="0"/>
+                  <a:t>Logit model estimates probabilities of the ranks      </a:t>
+                </a:r>
+              </a:p>
+              <a:p>
+                <a:pPr lvl="1"/>
+                <a:r>
+                  <a:rPr lang="en-US" dirty="0"/>
+                  <a:t>Probit model estimates log odds of the ranks </a:t>
+                </a:r>
+                <a:endParaRPr dirty="0"/>
+              </a:p>
+            </p:txBody>
+          </p:sp>
+        </mc:Choice>
+        <mc:Fallback>
+          <p:sp>
+            <p:nvSpPr>
+              <p:cNvPr id="3" name="Content Placeholder 2">
+                <a:extLst>
+                  <a:ext uri="{FF2B5EF4-FFF2-40B4-BE49-F238E27FC236}">
+                    <a16:creationId xmlns:a16="http://schemas.microsoft.com/office/drawing/2014/main" id="{FDCC5C27-9615-6DC7-8E87-E9A919758ECD}"/>
+                  </a:ext>
+                </a:extLst>
+              </p:cNvPr>
+              <p:cNvSpPr>
+                <a:spLocks noGrp="1" noRot="1" noChangeAspect="1" noMove="1" noResize="1" noEditPoints="1" noAdjustHandles="1" noChangeArrowheads="1" noChangeShapeType="1" noTextEdit="1"/>
+              </p:cNvSpPr>
+              <p:nvPr>
+                <p:ph idx="1"/>
+              </p:nvPr>
+            </p:nvSpPr>
+            <p:spPr>
+              <a:blipFill>
+                <a:blip r:embed="rId2"/>
+                <a:stretch>
+                  <a:fillRect l="-1111" t="-1436"/>
+                </a:stretch>
+              </a:blipFill>
+            </p:spPr>
+            <p:txBody>
+              <a:bodyPr/>
+              <a:lstStyle/>
+              <a:p>
+                <a:r>
+                  <a:rPr lang="en-US">
+                    <a:noFill/>
+                  </a:rPr>
+                  <a:t> </a:t>
+                </a:r>
+              </a:p>
+            </p:txBody>
+          </p:sp>
+        </mc:Fallback>
+      </mc:AlternateContent>
+    </p:spTree>
+    <p:extLst>
+      <p:ext uri="{BB962C8B-B14F-4D97-AF65-F5344CB8AC3E}">
+        <p14:creationId xmlns:p14="http://schemas.microsoft.com/office/powerpoint/2010/main" val="3661048809"/>
+      </p:ext>
+    </p:extLst>
+  </p:cSld>
+  <p:clrMapOvr>
+    <a:masterClrMapping/>
+  </p:clrMapOvr>
+</p:sld>
+</file>
+
+<file path=ppt/slides/slide63.xml><?xml version="1.0" encoding="utf-8"?>
+<p:sld xmlns:a="http://schemas.openxmlformats.org/drawingml/2006/main" xmlns:r="http://schemas.openxmlformats.org/officeDocument/2006/relationships" xmlns:p="http://schemas.openxmlformats.org/presentationml/2006/main">
+  <p:cSld>
+    <p:spTree>
+      <p:nvGrpSpPr>
+        <p:cNvPr id="1" name="">
+          <a:extLst>
+            <a:ext uri="{FF2B5EF4-FFF2-40B4-BE49-F238E27FC236}">
+              <a16:creationId xmlns:a16="http://schemas.microsoft.com/office/drawing/2014/main" id="{9A5DAAF5-4CBD-441B-54B6-6F87B14BE9EA}"/>
+            </a:ext>
+          </a:extLst>
+        </p:cNvPr>
+        <p:cNvGrpSpPr/>
+        <p:nvPr/>
+      </p:nvGrpSpPr>
+      <p:grpSpPr>
+        <a:xfrm>
+          <a:off x="0" y="0"/>
+          <a:ext cx="0" cy="0"/>
+          <a:chOff x="0" y="0"/>
+          <a:chExt cx="0" cy="0"/>
+        </a:xfrm>
+      </p:grpSpPr>
+      <p:sp>
+        <p:nvSpPr>
+          <p:cNvPr id="2" name="Title 1">
+            <a:extLst>
+              <a:ext uri="{FF2B5EF4-FFF2-40B4-BE49-F238E27FC236}">
+                <a16:creationId xmlns:a16="http://schemas.microsoft.com/office/drawing/2014/main" id="{317EB637-FF53-8B85-1C22-6C61E0B59AEB}"/>
+              </a:ext>
+            </a:extLst>
+          </p:cNvPr>
+          <p:cNvSpPr>
+            <a:spLocks noGrp="1"/>
+          </p:cNvSpPr>
+          <p:nvPr>
+            <p:ph type="title"/>
+          </p:nvPr>
+        </p:nvSpPr>
+        <p:spPr/>
+        <p:txBody>
+          <a:bodyPr/>
+          <a:lstStyle/>
+          <a:p>
+            <a:pPr marL="0" lvl="0" indent="0">
+              <a:buNone/>
+            </a:pPr>
+            <a:r>
+              <a:rPr lang="en-US" dirty="0"/>
+              <a:t>Ordinal regression </a:t>
+            </a:r>
+            <a:endParaRPr dirty="0"/>
+          </a:p>
+        </p:txBody>
+      </p:sp>
+      <mc:AlternateContent xmlns:mc="http://schemas.openxmlformats.org/markup-compatibility/2006">
+        <mc:Choice xmlns:a14="http://schemas.microsoft.com/office/drawing/2010/main" Requires="a14">
+          <p:sp>
+            <p:nvSpPr>
+              <p:cNvPr id="3" name="Content Placeholder 2">
+                <a:extLst>
+                  <a:ext uri="{FF2B5EF4-FFF2-40B4-BE49-F238E27FC236}">
+                    <a16:creationId xmlns:a16="http://schemas.microsoft.com/office/drawing/2014/main" id="{CB6070E2-70F7-A018-6E47-2030E69C1725}"/>
+                  </a:ext>
+                </a:extLst>
+              </p:cNvPr>
+              <p:cNvSpPr>
+                <a:spLocks noGrp="1"/>
+              </p:cNvSpPr>
+              <p:nvPr>
+                <p:ph idx="1"/>
+              </p:nvPr>
+            </p:nvSpPr>
+            <p:spPr/>
+            <p:txBody>
+              <a:bodyPr>
+                <a:normAutofit/>
+              </a:bodyPr>
+              <a:lstStyle/>
+              <a:p>
+                <a:pPr marL="0" lvl="0" indent="0">
+                  <a:buNone/>
+                </a:pPr>
+                <a:r>
+                  <a:rPr lang="en-US" dirty="0"/>
+                  <a:t>How do we create a model for ordered responses? </a:t>
+                </a:r>
+              </a:p>
+              <a:p>
+                <a:pPr lvl="0"/>
+                <a:r>
+                  <a:rPr lang="en-US" dirty="0"/>
+                  <a:t>The rank in the n-level ordered response needs to be estimated     </a:t>
+                </a:r>
+              </a:p>
+              <a:p>
+                <a:pPr marL="0" lvl="0" indent="0">
+                  <a:buNone/>
+                </a:pPr>
+                <a14:m>
+                  <m:oMathPara xmlns:m="http://schemas.openxmlformats.org/officeDocument/2006/math">
+                    <m:oMath>
+                      <m:sSub>
+                        <m:sSubPr>
+                          <m:ctrlPr>
+                            <a:rPr lang="en-US" b="0" i="1" smtClean="0">
+                              <a:latin typeface="Cambria Math" panose="02040503050406030204" pitchFamily="18" charset="0"/>
+                            </a:rPr>
+                          </m:ctrlPr>
+                        </m:sSubPr>
+                        <m:e>
+                          <m:r>
+                            <a:rPr lang="en-US" b="0" i="1" smtClean="0">
+                              <a:latin typeface="Cambria Math" panose="02040503050406030204" pitchFamily="18" charset="0"/>
+                            </a:rPr>
+                            <m:t>𝑟</m:t>
+                          </m:r>
+                        </m:e>
+                        <m:sub>
+                          <m:r>
+                            <a:rPr lang="en-US" b="0" i="1" smtClean="0">
+                              <a:latin typeface="Cambria Math" panose="02040503050406030204" pitchFamily="18" charset="0"/>
+                            </a:rPr>
+                            <m:t>1</m:t>
+                          </m:r>
+                        </m:sub>
+                      </m:sSub>
+                      <m:r>
+                        <a:rPr lang="en-US" i="1" smtClean="0">
+                          <a:latin typeface="Cambria Math" panose="02040503050406030204" pitchFamily="18" charset="0"/>
+                          <a:ea typeface="Cambria Math" panose="02040503050406030204" pitchFamily="18" charset="0"/>
+                        </a:rPr>
+                        <m:t>≺</m:t>
+                      </m:r>
+                      <m:sSub>
+                        <m:sSubPr>
+                          <m:ctrlPr>
+                            <a:rPr lang="en-US" b="0" i="1" smtClean="0">
+                              <a:latin typeface="Cambria Math" panose="02040503050406030204" pitchFamily="18" charset="0"/>
+                              <a:ea typeface="Cambria Math" panose="02040503050406030204" pitchFamily="18" charset="0"/>
+                            </a:rPr>
+                          </m:ctrlPr>
+                        </m:sSubPr>
+                        <m:e>
+                          <m:r>
+                            <a:rPr lang="en-US" b="0" i="1" smtClean="0">
+                              <a:latin typeface="Cambria Math" panose="02040503050406030204" pitchFamily="18" charset="0"/>
+                              <a:ea typeface="Cambria Math" panose="02040503050406030204" pitchFamily="18" charset="0"/>
+                            </a:rPr>
+                            <m:t>𝑟</m:t>
+                          </m:r>
+                        </m:e>
+                        <m:sub>
+                          <m:r>
+                            <a:rPr lang="en-US" b="0" i="1" smtClean="0">
+                              <a:latin typeface="Cambria Math" panose="02040503050406030204" pitchFamily="18" charset="0"/>
+                              <a:ea typeface="Cambria Math" panose="02040503050406030204" pitchFamily="18" charset="0"/>
+                            </a:rPr>
+                            <m:t>2</m:t>
+                          </m:r>
+                        </m:sub>
+                      </m:sSub>
+                      <m:r>
+                        <a:rPr lang="en-US" i="1">
+                          <a:latin typeface="Cambria Math" panose="02040503050406030204" pitchFamily="18" charset="0"/>
+                          <a:ea typeface="Cambria Math" panose="02040503050406030204" pitchFamily="18" charset="0"/>
+                        </a:rPr>
+                        <m:t>≺</m:t>
+                      </m:r>
+                      <m:sSub>
+                        <m:sSubPr>
+                          <m:ctrlPr>
+                            <a:rPr lang="en-US" i="1">
+                              <a:latin typeface="Cambria Math" panose="02040503050406030204" pitchFamily="18" charset="0"/>
+                              <a:ea typeface="Cambria Math" panose="02040503050406030204" pitchFamily="18" charset="0"/>
+                            </a:rPr>
+                          </m:ctrlPr>
+                        </m:sSubPr>
+                        <m:e>
+                          <m:r>
+                            <a:rPr lang="en-US" i="1">
+                              <a:latin typeface="Cambria Math" panose="02040503050406030204" pitchFamily="18" charset="0"/>
+                              <a:ea typeface="Cambria Math" panose="02040503050406030204" pitchFamily="18" charset="0"/>
+                            </a:rPr>
+                            <m:t>𝑟</m:t>
+                          </m:r>
+                        </m:e>
+                        <m:sub>
+                          <m:r>
+                            <a:rPr lang="en-US" b="0" i="1" smtClean="0">
+                              <a:latin typeface="Cambria Math" panose="02040503050406030204" pitchFamily="18" charset="0"/>
+                              <a:ea typeface="Cambria Math" panose="02040503050406030204" pitchFamily="18" charset="0"/>
+                            </a:rPr>
+                            <m:t>3</m:t>
+                          </m:r>
+                        </m:sub>
+                      </m:sSub>
+                      <m:r>
+                        <a:rPr lang="en-US" b="0" i="1" smtClean="0">
+                          <a:latin typeface="Cambria Math" panose="02040503050406030204" pitchFamily="18" charset="0"/>
+                          <a:ea typeface="Cambria Math" panose="02040503050406030204" pitchFamily="18" charset="0"/>
+                        </a:rPr>
+                        <m:t>…</m:t>
+                      </m:r>
+                      <m:r>
+                        <a:rPr lang="en-US" i="1">
+                          <a:latin typeface="Cambria Math" panose="02040503050406030204" pitchFamily="18" charset="0"/>
+                          <a:ea typeface="Cambria Math" panose="02040503050406030204" pitchFamily="18" charset="0"/>
+                        </a:rPr>
+                        <m:t>≺</m:t>
+                      </m:r>
+                      <m:sSub>
+                        <m:sSubPr>
+                          <m:ctrlPr>
+                            <a:rPr lang="en-US" i="1">
+                              <a:latin typeface="Cambria Math" panose="02040503050406030204" pitchFamily="18" charset="0"/>
+                              <a:ea typeface="Cambria Math" panose="02040503050406030204" pitchFamily="18" charset="0"/>
+                            </a:rPr>
+                          </m:ctrlPr>
+                        </m:sSubPr>
+                        <m:e>
+                          <m:r>
+                            <a:rPr lang="en-US" i="1">
+                              <a:latin typeface="Cambria Math" panose="02040503050406030204" pitchFamily="18" charset="0"/>
+                              <a:ea typeface="Cambria Math" panose="02040503050406030204" pitchFamily="18" charset="0"/>
+                            </a:rPr>
+                            <m:t>𝑟</m:t>
+                          </m:r>
+                        </m:e>
+                        <m:sub>
+                          <m:r>
+                            <a:rPr lang="en-US" b="0" i="1" smtClean="0">
+                              <a:latin typeface="Cambria Math" panose="02040503050406030204" pitchFamily="18" charset="0"/>
+                              <a:ea typeface="Cambria Math" panose="02040503050406030204" pitchFamily="18" charset="0"/>
+                            </a:rPr>
+                            <m:t>𝑛</m:t>
+                          </m:r>
+                        </m:sub>
+                      </m:sSub>
+                    </m:oMath>
+                  </m:oMathPara>
+                </a14:m>
+                <a:endParaRPr lang="en-US" dirty="0"/>
+              </a:p>
+              <a:p>
+                <a:pPr lvl="0"/>
+                <a:r>
+                  <a:rPr lang="en-US" dirty="0"/>
+                  <a:t>We need to estimate the probabilities for the ranks   </a:t>
+                </a:r>
+              </a:p>
+              <a:p>
+                <a:pPr lvl="1"/>
+                <a:r>
+                  <a:rPr lang="en-US" dirty="0"/>
+                  <a:t>Logit model uses proportional odds of the ranks      </a:t>
+                </a:r>
+              </a:p>
+              <a:p>
+                <a:pPr lvl="1"/>
+                <a:r>
+                  <a:rPr lang="en-US" dirty="0"/>
+                  <a:t>Probit model estimates ranks based on order CDF of the </a:t>
+                </a:r>
+                <a:r>
+                  <a:rPr lang="en-US"/>
+                  <a:t>Normal distribution </a:t>
+                </a:r>
+                <a:endParaRPr dirty="0"/>
+              </a:p>
+            </p:txBody>
+          </p:sp>
+        </mc:Choice>
+        <mc:Fallback>
+          <p:sp>
+            <p:nvSpPr>
+              <p:cNvPr id="3" name="Content Placeholder 2">
+                <a:extLst>
+                  <a:ext uri="{FF2B5EF4-FFF2-40B4-BE49-F238E27FC236}">
+                    <a16:creationId xmlns:a16="http://schemas.microsoft.com/office/drawing/2014/main" id="{CB6070E2-70F7-A018-6E47-2030E69C1725}"/>
+                  </a:ext>
+                </a:extLst>
+              </p:cNvPr>
+              <p:cNvSpPr>
+                <a:spLocks noGrp="1" noRot="1" noChangeAspect="1" noMove="1" noResize="1" noEditPoints="1" noAdjustHandles="1" noChangeArrowheads="1" noChangeShapeType="1" noTextEdit="1"/>
+              </p:cNvSpPr>
+              <p:nvPr>
+                <p:ph idx="1"/>
+              </p:nvPr>
+            </p:nvSpPr>
+            <p:spPr>
+              <a:blipFill>
+                <a:blip r:embed="rId2"/>
+                <a:stretch>
+                  <a:fillRect l="-1111" t="-1436"/>
+                </a:stretch>
+              </a:blipFill>
+            </p:spPr>
+            <p:txBody>
+              <a:bodyPr/>
+              <a:lstStyle/>
+              <a:p>
+                <a:r>
+                  <a:rPr lang="en-US">
+                    <a:noFill/>
+                  </a:rPr>
+                  <a:t> </a:t>
+                </a:r>
+              </a:p>
+            </p:txBody>
+          </p:sp>
+        </mc:Fallback>
+      </mc:AlternateContent>
+    </p:spTree>
+    <p:extLst>
+      <p:ext uri="{BB962C8B-B14F-4D97-AF65-F5344CB8AC3E}">
+        <p14:creationId xmlns:p14="http://schemas.microsoft.com/office/powerpoint/2010/main" val="4227940440"/>
+      </p:ext>
+    </p:extLst>
+  </p:cSld>
+  <p:clrMapOvr>
+    <a:masterClrMapping/>
+  </p:clrMapOvr>
+</p:sld>
+</file>
+
+<file path=ppt/slides/slide64.xml><?xml version="1.0" encoding="utf-8"?>
+<p:sld xmlns:a="http://schemas.openxmlformats.org/drawingml/2006/main" xmlns:r="http://schemas.openxmlformats.org/officeDocument/2006/relationships" xmlns:p="http://schemas.openxmlformats.org/presentationml/2006/main">
+  <p:cSld>
+    <p:spTree>
+      <p:nvGrpSpPr>
+        <p:cNvPr id="1" name="">
+          <a:extLst>
+            <a:ext uri="{FF2B5EF4-FFF2-40B4-BE49-F238E27FC236}">
+              <a16:creationId xmlns:a16="http://schemas.microsoft.com/office/drawing/2014/main" id="{1039353C-1F79-D0FC-1EBA-842771A6D5CE}"/>
+            </a:ext>
+          </a:extLst>
+        </p:cNvPr>
+        <p:cNvGrpSpPr/>
+        <p:nvPr/>
+      </p:nvGrpSpPr>
+      <p:grpSpPr>
+        <a:xfrm>
+          <a:off x="0" y="0"/>
+          <a:ext cx="0" cy="0"/>
+          <a:chOff x="0" y="0"/>
+          <a:chExt cx="0" cy="0"/>
+        </a:xfrm>
+      </p:grpSpPr>
+      <p:sp>
+        <p:nvSpPr>
+          <p:cNvPr id="2" name="Title 1">
+            <a:extLst>
+              <a:ext uri="{FF2B5EF4-FFF2-40B4-BE49-F238E27FC236}">
+                <a16:creationId xmlns:a16="http://schemas.microsoft.com/office/drawing/2014/main" id="{6CD90C8A-9A28-C47A-C735-0E8097187539}"/>
+              </a:ext>
+            </a:extLst>
+          </p:cNvPr>
+          <p:cNvSpPr>
+            <a:spLocks noGrp="1"/>
+          </p:cNvSpPr>
+          <p:nvPr>
+            <p:ph type="ctrTitle"/>
+          </p:nvPr>
+        </p:nvSpPr>
+        <p:spPr/>
+        <p:txBody>
+          <a:bodyPr/>
+          <a:lstStyle/>
+          <a:p>
+            <a:r>
+              <a:rPr lang="en-US" dirty="0"/>
+              <a:t>Summary</a:t>
+            </a:r>
+          </a:p>
+        </p:txBody>
+      </p:sp>
+    </p:spTree>
+    <p:extLst>
+      <p:ext uri="{BB962C8B-B14F-4D97-AF65-F5344CB8AC3E}">
+        <p14:creationId xmlns:p14="http://schemas.microsoft.com/office/powerpoint/2010/main" val="956940509"/>
+      </p:ext>
+    </p:extLst>
+  </p:cSld>
+  <p:clrMapOvr>
+    <a:masterClrMapping/>
+  </p:clrMapOvr>
+</p:sld>
+</file>
+
+<file path=ppt/slides/slide65.xml><?xml version="1.0" encoding="utf-8"?>
+<p:sld xmlns:a="http://schemas.openxmlformats.org/drawingml/2006/main" xmlns:r="http://schemas.openxmlformats.org/officeDocument/2006/relationships" xmlns:p="http://schemas.openxmlformats.org/presentationml/2006/main">
+  <p:cSld>
+    <p:spTree>
+      <p:nvGrpSpPr>
+        <p:cNvPr id="1" name="">
+          <a:extLst>
+            <a:ext uri="{FF2B5EF4-FFF2-40B4-BE49-F238E27FC236}">
               <a16:creationId xmlns:a16="http://schemas.microsoft.com/office/drawing/2014/main" id="{E5403FAB-44AB-D252-6A94-8C4F7285DFCC}"/>
             </a:ext>
           </a:extLst>
@@ -43753,7 +44386,7 @@
 </p:sld>
 </file>
 
-<file path=ppt/slides/slide62.xml><?xml version="1.0" encoding="utf-8"?>
+<file path=ppt/slides/slide66.xml><?xml version="1.0" encoding="utf-8"?>
 <p:sld xmlns:a="http://schemas.openxmlformats.org/drawingml/2006/main" xmlns:r="http://schemas.openxmlformats.org/officeDocument/2006/relationships" xmlns:p="http://schemas.openxmlformats.org/presentationml/2006/main">
   <p:cSld>
     <p:spTree>
